--- a/11_Financial_Services_Certificate/MZ-EDU-FS-005_Cohort_Slides_6_Modules.pptx
+++ b/11_Financial_Services_Certificate/MZ-EDU-FS-005_Cohort_Slides_6_Modules.pptx
@@ -8,6 +8,7 @@
     <p:sldId id="256" r:id="rId2"/>
     <p:sldId id="257" r:id="rId3"/>
     <p:sldId id="258" r:id="rId4"/>
+    <p:sldId id="291" r:id="rId42"/>
     <p:sldId id="259" r:id="rId5"/>
     <p:sldId id="260" r:id="rId6"/>
     <p:sldId id="261" r:id="rId7"/>
@@ -4190,6 +4191,1627 @@
 
 <file path=ppt/slides/slide10.xml><?xml version="1.0" encoding="utf-8"?>
 <p:sld xmlns:a="http://schemas.openxmlformats.org/drawingml/2006/main" xmlns:r="http://schemas.openxmlformats.org/officeDocument/2006/relationships" xmlns:p="http://schemas.openxmlformats.org/presentationml/2006/main">
+  <p:cSld name="Slide 9">
+    <p:bg>
+      <p:bgPr>
+        <a:solidFill>
+          <a:srgbClr val="FFFFFF"/>
+        </a:solidFill>
+      </p:bgPr>
+    </p:bg>
+    <p:spTree>
+      <p:nvGrpSpPr>
+        <p:cNvPr id="1" name=""/>
+        <p:cNvGrpSpPr/>
+        <p:nvPr/>
+      </p:nvGrpSpPr>
+      <p:grpSpPr>
+        <a:xfrm>
+          <a:off x="0" y="0"/>
+          <a:ext cx="0" cy="0"/>
+          <a:chOff x="0" y="0"/>
+          <a:chExt cx="0" cy="0"/>
+        </a:xfrm>
+      </p:grpSpPr>
+      <p:sp>
+        <p:nvSpPr>
+          <p:cNvPr id="2" name="Text 0"/>
+          <p:cNvSpPr/>
+          <p:nvPr/>
+        </p:nvSpPr>
+        <p:spPr>
+          <a:xfrm>
+            <a:off x="566928" y="457200"/>
+            <a:ext cx="11055096" cy="292608"/>
+          </a:xfrm>
+          <a:prstGeom prst="rect">
+            <a:avLst/>
+          </a:prstGeom>
+          <a:noFill/>
+          <a:ln/>
+        </p:spPr>
+        <p:txBody>
+          <a:bodyPr wrap="square" rtlCol="0" anchor="ctr"/>
+          <a:lstStyle/>
+          <a:p>
+            <a:pPr indent="0" marL="0">
+              <a:buNone/>
+            </a:pPr>
+            <a:r>
+              <a:rPr lang="en-US" sz="1050" b="1" spc="120" kern="0" dirty="0">
+                <a:solidFill>
+                  <a:srgbClr val="8A8378"/>
+                </a:solidFill>
+                <a:latin typeface="Georgia" pitchFamily="34" charset="0"/>
+                <a:ea typeface="Georgia" pitchFamily="34" charset="-122"/>
+                <a:cs typeface="Georgia" pitchFamily="34" charset="-120"/>
+              </a:rPr>
+              <a:t>THE MAPPING</a:t>
+            </a:r>
+            <a:endParaRPr lang="en-US" sz="1050" dirty="0"/>
+          </a:p>
+        </p:txBody>
+      </p:sp>
+      <p:sp>
+        <p:nvSpPr>
+          <p:cNvPr id="3" name="Text 1"/>
+          <p:cNvSpPr/>
+          <p:nvPr/>
+        </p:nvSpPr>
+        <p:spPr>
+          <a:xfrm>
+            <a:off x="566928" y="749808"/>
+            <a:ext cx="11055096" cy="822960"/>
+          </a:xfrm>
+          <a:prstGeom prst="rect">
+            <a:avLst/>
+          </a:prstGeom>
+          <a:noFill/>
+          <a:ln/>
+        </p:spPr>
+        <p:txBody>
+          <a:bodyPr wrap="square" rtlCol="0" anchor="t"/>
+          <a:lstStyle/>
+          <a:p>
+            <a:pPr indent="0" marL="0">
+              <a:buNone/>
+            </a:pPr>
+            <a:r>
+              <a:rPr lang="en-US" sz="2550" b="1" dirty="0">
+                <a:solidFill>
+                  <a:srgbClr val="1B1A18"/>
+                </a:solidFill>
+                <a:latin typeface="Georgia" pitchFamily="34" charset="0"/>
+                <a:ea typeface="Georgia" pitchFamily="34" charset="-122"/>
+                <a:cs typeface="Georgia" pitchFamily="34" charset="-120"/>
+              </a:rPr>
+              <a:t>Five properties already have a home</a:t>
+            </a:r>
+            <a:endParaRPr lang="en-US" sz="2550" dirty="0"/>
+          </a:p>
+        </p:txBody>
+      </p:sp>
+      <p:graphicFrame>
+        <p:nvGraphicFramePr>
+          <p:cNvPr id="10" name="Table 0"/>
+          <p:cNvGraphicFramePr>
+            <a:graphicFrameLocks noGrp="1"/>
+          </p:cNvGraphicFramePr>
+          <p:nvPr>
+            <p:extLst>
+              <p:ext uri="{D42A27DB-BD31-4B8C-83A1-F6EECF244321}">
+                <p14:modId xmlns:p14="http://schemas.microsoft.com/office/powerpoint/2010/main" val="1579011935"/>
+              </p:ext>
+            </p:extLst>
+          </p:nvPr>
+        </p:nvGraphicFramePr>
+        <p:xfrm>
+          <a:off x="566928" y="1737360"/>
+          <a:ext cx="11055096" cy="914400"/>
+        </p:xfrm>
+        <a:graphic>
+          <a:graphicData uri="http://schemas.openxmlformats.org/drawingml/2006/table">
+            <a:tbl>
+              <a:tblPr/>
+              <a:tblGrid>
+                <a:gridCol w="1371600"/>
+                <a:gridCol w="3291840"/>
+                <a:gridCol w="6391656"/>
+              </a:tblGrid>
+              <a:tr h="0">
+                <a:tc>
+                  <a:txBody>
+                    <a:bodyPr/>
+                    <a:lstStyle/>
+                    <a:p>
+                      <a:pPr indent="0" marL="0">
+                        <a:buNone/>
+                      </a:pPr>
+                      <a:r>
+                        <a:rPr lang="en-US" sz="1200" b="1" dirty="0">
+                          <a:solidFill>
+                            <a:srgbClr val="33302B"/>
+                          </a:solidFill>
+                          <a:latin typeface="Georgia" pitchFamily="34" charset="0"/>
+                          <a:ea typeface="Georgia" pitchFamily="34" charset="-122"/>
+                          <a:cs typeface="Georgia" pitchFamily="34" charset="-120"/>
+                        </a:rPr>
+                        <a:t>Property</a:t>
+                      </a:r>
+                      <a:endParaRPr lang="en-US" sz="1200" dirty="0">
+                        <a:latin typeface="Georgia" charset="0"/>
+                        <a:ea typeface="Georgia" charset="0"/>
+                        <a:cs typeface="Georgia" charset="0"/>
+                      </a:endParaRPr>
+                    </a:p>
+                  </a:txBody>
+                  <a:tcPr marL="82296" marR="82296" marT="82296" marB="82296" anchor="ctr">
+                    <a:lnL w="6350" cap="flat" cmpd="sng" algn="ctr">
+                      <a:solidFill>
+                        <a:srgbClr val="D6D2C9"/>
+                      </a:solidFill>
+                      <a:prstDash val="solid"/>
+                      <a:round/>
+                      <a:headEnd type="none" w="med" len="med"/>
+                      <a:tailEnd type="none" w="med" len="med"/>
+                    </a:lnL>
+                    <a:lnR w="6350" cap="flat" cmpd="sng" algn="ctr">
+                      <a:solidFill>
+                        <a:srgbClr val="D6D2C9"/>
+                      </a:solidFill>
+                      <a:prstDash val="solid"/>
+                      <a:round/>
+                      <a:headEnd type="none" w="med" len="med"/>
+                      <a:tailEnd type="none" w="med" len="med"/>
+                    </a:lnR>
+                    <a:lnT w="6350" cap="flat" cmpd="sng" algn="ctr">
+                      <a:solidFill>
+                        <a:srgbClr val="D6D2C9"/>
+                      </a:solidFill>
+                      <a:prstDash val="solid"/>
+                      <a:round/>
+                      <a:headEnd type="none" w="med" len="med"/>
+                      <a:tailEnd type="none" w="med" len="med"/>
+                    </a:lnT>
+                    <a:lnB w="6350" cap="flat" cmpd="sng" algn="ctr">
+                      <a:solidFill>
+                        <a:srgbClr val="D6D2C9"/>
+                      </a:solidFill>
+                      <a:prstDash val="solid"/>
+                      <a:round/>
+                      <a:headEnd type="none" w="med" len="med"/>
+                      <a:tailEnd type="none" w="med" len="med"/>
+                    </a:lnB>
+                    <a:solidFill>
+                      <a:srgbClr val="F4F2EE"/>
+                    </a:solidFill>
+                  </a:tcPr>
+                </a:tc>
+                <a:tc>
+                  <a:txBody>
+                    <a:bodyPr/>
+                    <a:lstStyle/>
+                    <a:p>
+                      <a:pPr indent="0" marL="0">
+                        <a:buNone/>
+                      </a:pPr>
+                      <a:r>
+                        <a:rPr lang="en-US" sz="1200" b="1" dirty="0">
+                          <a:solidFill>
+                            <a:srgbClr val="33302B"/>
+                          </a:solidFill>
+                          <a:latin typeface="Georgia" pitchFamily="34" charset="0"/>
+                          <a:ea typeface="Georgia" pitchFamily="34" charset="-122"/>
+                          <a:cs typeface="Georgia" pitchFamily="34" charset="-120"/>
+                        </a:rPr>
+                        <a:t>What must survive the boundary</a:t>
+                      </a:r>
+                      <a:endParaRPr lang="en-US" sz="1200" dirty="0">
+                        <a:latin typeface="Georgia" charset="0"/>
+                        <a:ea typeface="Georgia" charset="0"/>
+                        <a:cs typeface="Georgia" charset="0"/>
+                      </a:endParaRPr>
+                    </a:p>
+                  </a:txBody>
+                  <a:tcPr marL="82296" marR="82296" marT="82296" marB="82296" anchor="ctr">
+                    <a:lnL w="6350" cap="flat" cmpd="sng" algn="ctr">
+                      <a:solidFill>
+                        <a:srgbClr val="D6D2C9"/>
+                      </a:solidFill>
+                      <a:prstDash val="solid"/>
+                      <a:round/>
+                      <a:headEnd type="none" w="med" len="med"/>
+                      <a:tailEnd type="none" w="med" len="med"/>
+                    </a:lnL>
+                    <a:lnR w="6350" cap="flat" cmpd="sng" algn="ctr">
+                      <a:solidFill>
+                        <a:srgbClr val="D6D2C9"/>
+                      </a:solidFill>
+                      <a:prstDash val="solid"/>
+                      <a:round/>
+                      <a:headEnd type="none" w="med" len="med"/>
+                      <a:tailEnd type="none" w="med" len="med"/>
+                    </a:lnR>
+                    <a:lnT w="6350" cap="flat" cmpd="sng" algn="ctr">
+                      <a:solidFill>
+                        <a:srgbClr val="D6D2C9"/>
+                      </a:solidFill>
+                      <a:prstDash val="solid"/>
+                      <a:round/>
+                      <a:headEnd type="none" w="med" len="med"/>
+                      <a:tailEnd type="none" w="med" len="med"/>
+                    </a:lnT>
+                    <a:lnB w="6350" cap="flat" cmpd="sng" algn="ctr">
+                      <a:solidFill>
+                        <a:srgbClr val="D6D2C9"/>
+                      </a:solidFill>
+                      <a:prstDash val="solid"/>
+                      <a:round/>
+                      <a:headEnd type="none" w="med" len="med"/>
+                      <a:tailEnd type="none" w="med" len="med"/>
+                    </a:lnB>
+                    <a:solidFill>
+                      <a:srgbClr val="F4F2EE"/>
+                    </a:solidFill>
+                  </a:tcPr>
+                </a:tc>
+                <a:tc>
+                  <a:txBody>
+                    <a:bodyPr/>
+                    <a:lstStyle/>
+                    <a:p>
+                      <a:pPr indent="0" marL="0">
+                        <a:buNone/>
+                      </a:pPr>
+                      <a:r>
+                        <a:rPr lang="en-US" sz="1200" b="1" dirty="0">
+                          <a:solidFill>
+                            <a:srgbClr val="33302B"/>
+                          </a:solidFill>
+                          <a:latin typeface="Georgia" pitchFamily="34" charset="0"/>
+                          <a:ea typeface="Georgia" pitchFamily="34" charset="-122"/>
+                          <a:cs typeface="Georgia" pitchFamily="34" charset="-120"/>
+                        </a:rPr>
+                        <a:t>The instrument that already asks</a:t>
+                      </a:r>
+                      <a:endParaRPr lang="en-US" sz="1200" dirty="0">
+                        <a:latin typeface="Georgia" charset="0"/>
+                        <a:ea typeface="Georgia" charset="0"/>
+                        <a:cs typeface="Georgia" charset="0"/>
+                      </a:endParaRPr>
+                    </a:p>
+                  </a:txBody>
+                  <a:tcPr marL="82296" marR="82296" marT="82296" marB="82296" anchor="ctr">
+                    <a:lnL w="6350" cap="flat" cmpd="sng" algn="ctr">
+                      <a:solidFill>
+                        <a:srgbClr val="D6D2C9"/>
+                      </a:solidFill>
+                      <a:prstDash val="solid"/>
+                      <a:round/>
+                      <a:headEnd type="none" w="med" len="med"/>
+                      <a:tailEnd type="none" w="med" len="med"/>
+                    </a:lnL>
+                    <a:lnR w="6350" cap="flat" cmpd="sng" algn="ctr">
+                      <a:solidFill>
+                        <a:srgbClr val="D6D2C9"/>
+                      </a:solidFill>
+                      <a:prstDash val="solid"/>
+                      <a:round/>
+                      <a:headEnd type="none" w="med" len="med"/>
+                      <a:tailEnd type="none" w="med" len="med"/>
+                    </a:lnR>
+                    <a:lnT w="6350" cap="flat" cmpd="sng" algn="ctr">
+                      <a:solidFill>
+                        <a:srgbClr val="D6D2C9"/>
+                      </a:solidFill>
+                      <a:prstDash val="solid"/>
+                      <a:round/>
+                      <a:headEnd type="none" w="med" len="med"/>
+                      <a:tailEnd type="none" w="med" len="med"/>
+                    </a:lnT>
+                    <a:lnB w="6350" cap="flat" cmpd="sng" algn="ctr">
+                      <a:solidFill>
+                        <a:srgbClr val="D6D2C9"/>
+                      </a:solidFill>
+                      <a:prstDash val="solid"/>
+                      <a:round/>
+                      <a:headEnd type="none" w="med" len="med"/>
+                      <a:tailEnd type="none" w="med" len="med"/>
+                    </a:lnB>
+                    <a:solidFill>
+                      <a:srgbClr val="F4F2EE"/>
+                    </a:solidFill>
+                  </a:tcPr>
+                </a:tc>
+              </a:tr>
+              <a:tr h="0">
+                <a:tc>
+                  <a:txBody>
+                    <a:bodyPr/>
+                    <a:lstStyle/>
+                    <a:p>
+                      <a:pPr indent="0" marL="0">
+                        <a:buNone/>
+                      </a:pPr>
+                      <a:r>
+                        <a:rPr lang="en-US" sz="1150" b="1" dirty="0">
+                          <a:solidFill>
+                            <a:srgbClr val="33302B"/>
+                          </a:solidFill>
+                          <a:latin typeface="Georgia" pitchFamily="34" charset="0"/>
+                          <a:ea typeface="Georgia" pitchFamily="34" charset="-122"/>
+                          <a:cs typeface="Georgia" pitchFamily="34" charset="-120"/>
+                        </a:rPr>
+                        <a:t>Context</a:t>
+                      </a:r>
+                      <a:endParaRPr lang="en-US" sz="1150" dirty="0">
+                        <a:latin typeface="Georgia" charset="0"/>
+                        <a:ea typeface="Georgia" charset="0"/>
+                        <a:cs typeface="Georgia" charset="0"/>
+                      </a:endParaRPr>
+                    </a:p>
+                  </a:txBody>
+                  <a:tcPr marL="82296" marR="82296" marT="82296" marB="82296" anchor="t">
+                    <a:lnL w="6350" cap="flat" cmpd="sng" algn="ctr">
+                      <a:solidFill>
+                        <a:srgbClr val="D6D2C9"/>
+                      </a:solidFill>
+                      <a:prstDash val="solid"/>
+                      <a:round/>
+                      <a:headEnd type="none" w="med" len="med"/>
+                      <a:tailEnd type="none" w="med" len="med"/>
+                    </a:lnL>
+                    <a:lnR w="6350" cap="flat" cmpd="sng" algn="ctr">
+                      <a:solidFill>
+                        <a:srgbClr val="D6D2C9"/>
+                      </a:solidFill>
+                      <a:prstDash val="solid"/>
+                      <a:round/>
+                      <a:headEnd type="none" w="med" len="med"/>
+                      <a:tailEnd type="none" w="med" len="med"/>
+                    </a:lnR>
+                    <a:lnT w="6350" cap="flat" cmpd="sng" algn="ctr">
+                      <a:solidFill>
+                        <a:srgbClr val="D6D2C9"/>
+                      </a:solidFill>
+                      <a:prstDash val="solid"/>
+                      <a:round/>
+                      <a:headEnd type="none" w="med" len="med"/>
+                      <a:tailEnd type="none" w="med" len="med"/>
+                    </a:lnT>
+                    <a:lnB w="6350" cap="flat" cmpd="sng" algn="ctr">
+                      <a:solidFill>
+                        <a:srgbClr val="D6D2C9"/>
+                      </a:solidFill>
+                      <a:prstDash val="solid"/>
+                      <a:round/>
+                      <a:headEnd type="none" w="med" len="med"/>
+                      <a:tailEnd type="none" w="med" len="med"/>
+                    </a:lnB>
+                  </a:tcPr>
+                </a:tc>
+                <a:tc>
+                  <a:txBody>
+                    <a:bodyPr/>
+                    <a:lstStyle/>
+                    <a:p>
+                      <a:pPr indent="0" marL="0">
+                        <a:buNone/>
+                      </a:pPr>
+                      <a:r>
+                        <a:rPr lang="en-US" sz="1150" dirty="0">
+                          <a:solidFill>
+                            <a:srgbClr val="1B1A18"/>
+                          </a:solidFill>
+                          <a:latin typeface="Georgia" pitchFamily="34" charset="0"/>
+                          <a:ea typeface="Georgia" pitchFamily="34" charset="-122"/>
+                          <a:cs typeface="Georgia" pitchFamily="34" charset="-120"/>
+                        </a:rPr>
+                        <a:t>The condition that makes a value mean what it means</a:t>
+                      </a:r>
+                      <a:endParaRPr lang="en-US" sz="1150" dirty="0">
+                        <a:latin typeface="Georgia" charset="0"/>
+                        <a:ea typeface="Georgia" charset="0"/>
+                        <a:cs typeface="Georgia" charset="0"/>
+                      </a:endParaRPr>
+                    </a:p>
+                  </a:txBody>
+                  <a:tcPr marL="82296" marR="82296" marT="82296" marB="82296" anchor="t">
+                    <a:lnL w="6350" cap="flat" cmpd="sng" algn="ctr">
+                      <a:solidFill>
+                        <a:srgbClr val="D6D2C9"/>
+                      </a:solidFill>
+                      <a:prstDash val="solid"/>
+                      <a:round/>
+                      <a:headEnd type="none" w="med" len="med"/>
+                      <a:tailEnd type="none" w="med" len="med"/>
+                    </a:lnL>
+                    <a:lnR w="6350" cap="flat" cmpd="sng" algn="ctr">
+                      <a:solidFill>
+                        <a:srgbClr val="D6D2C9"/>
+                      </a:solidFill>
+                      <a:prstDash val="solid"/>
+                      <a:round/>
+                      <a:headEnd type="none" w="med" len="med"/>
+                      <a:tailEnd type="none" w="med" len="med"/>
+                    </a:lnR>
+                    <a:lnT w="6350" cap="flat" cmpd="sng" algn="ctr">
+                      <a:solidFill>
+                        <a:srgbClr val="D6D2C9"/>
+                      </a:solidFill>
+                      <a:prstDash val="solid"/>
+                      <a:round/>
+                      <a:headEnd type="none" w="med" len="med"/>
+                      <a:tailEnd type="none" w="med" len="med"/>
+                    </a:lnT>
+                    <a:lnB w="6350" cap="flat" cmpd="sng" algn="ctr">
+                      <a:solidFill>
+                        <a:srgbClr val="D6D2C9"/>
+                      </a:solidFill>
+                      <a:prstDash val="solid"/>
+                      <a:round/>
+                      <a:headEnd type="none" w="med" len="med"/>
+                      <a:tailEnd type="none" w="med" len="med"/>
+                    </a:lnB>
+                  </a:tcPr>
+                </a:tc>
+                <a:tc>
+                  <a:txBody>
+                    <a:bodyPr/>
+                    <a:lstStyle/>
+                    <a:p>
+                      <a:pPr indent="0" marL="0">
+                        <a:buNone/>
+                      </a:pPr>
+                      <a:r>
+                        <a:rPr lang="en-US" sz="1150" dirty="0">
+                          <a:solidFill>
+                            <a:srgbClr val="1B1A18"/>
+                          </a:solidFill>
+                          <a:latin typeface="Georgia" pitchFamily="34" charset="0"/>
+                          <a:ea typeface="Georgia" pitchFamily="34" charset="-122"/>
+                          <a:cs typeface="Georgia" pitchFamily="34" charset="-120"/>
+                        </a:rPr>
+                        <a:t>Risk data aggregation: accuracy, completeness, lineage</a:t>
+                      </a:r>
+                      <a:endParaRPr lang="en-US" sz="1150" dirty="0">
+                        <a:latin typeface="Georgia" charset="0"/>
+                        <a:ea typeface="Georgia" charset="0"/>
+                        <a:cs typeface="Georgia" charset="0"/>
+                      </a:endParaRPr>
+                    </a:p>
+                  </a:txBody>
+                  <a:tcPr marL="82296" marR="82296" marT="82296" marB="82296" anchor="t">
+                    <a:lnL w="6350" cap="flat" cmpd="sng" algn="ctr">
+                      <a:solidFill>
+                        <a:srgbClr val="D6D2C9"/>
+                      </a:solidFill>
+                      <a:prstDash val="solid"/>
+                      <a:round/>
+                      <a:headEnd type="none" w="med" len="med"/>
+                      <a:tailEnd type="none" w="med" len="med"/>
+                    </a:lnL>
+                    <a:lnR w="6350" cap="flat" cmpd="sng" algn="ctr">
+                      <a:solidFill>
+                        <a:srgbClr val="D6D2C9"/>
+                      </a:solidFill>
+                      <a:prstDash val="solid"/>
+                      <a:round/>
+                      <a:headEnd type="none" w="med" len="med"/>
+                      <a:tailEnd type="none" w="med" len="med"/>
+                    </a:lnR>
+                    <a:lnT w="6350" cap="flat" cmpd="sng" algn="ctr">
+                      <a:solidFill>
+                        <a:srgbClr val="D6D2C9"/>
+                      </a:solidFill>
+                      <a:prstDash val="solid"/>
+                      <a:round/>
+                      <a:headEnd type="none" w="med" len="med"/>
+                      <a:tailEnd type="none" w="med" len="med"/>
+                    </a:lnT>
+                    <a:lnB w="6350" cap="flat" cmpd="sng" algn="ctr">
+                      <a:solidFill>
+                        <a:srgbClr val="D6D2C9"/>
+                      </a:solidFill>
+                      <a:prstDash val="solid"/>
+                      <a:round/>
+                      <a:headEnd type="none" w="med" len="med"/>
+                      <a:tailEnd type="none" w="med" len="med"/>
+                    </a:lnB>
+                  </a:tcPr>
+                </a:tc>
+              </a:tr>
+              <a:tr h="0">
+                <a:tc>
+                  <a:txBody>
+                    <a:bodyPr/>
+                    <a:lstStyle/>
+                    <a:p>
+                      <a:pPr indent="0" marL="0">
+                        <a:buNone/>
+                      </a:pPr>
+                      <a:r>
+                        <a:rPr lang="en-US" sz="1150" b="1" dirty="0">
+                          <a:solidFill>
+                            <a:srgbClr val="33302B"/>
+                          </a:solidFill>
+                          <a:latin typeface="Georgia" pitchFamily="34" charset="0"/>
+                          <a:ea typeface="Georgia" pitchFamily="34" charset="-122"/>
+                          <a:cs typeface="Georgia" pitchFamily="34" charset="-120"/>
+                        </a:rPr>
+                        <a:t>Authority</a:t>
+                      </a:r>
+                      <a:endParaRPr lang="en-US" sz="1150" dirty="0">
+                        <a:latin typeface="Georgia" charset="0"/>
+                        <a:ea typeface="Georgia" charset="0"/>
+                        <a:cs typeface="Georgia" charset="0"/>
+                      </a:endParaRPr>
+                    </a:p>
+                  </a:txBody>
+                  <a:tcPr marL="82296" marR="82296" marT="82296" marB="82296" anchor="t">
+                    <a:lnL w="6350" cap="flat" cmpd="sng" algn="ctr">
+                      <a:solidFill>
+                        <a:srgbClr val="D6D2C9"/>
+                      </a:solidFill>
+                      <a:prstDash val="solid"/>
+                      <a:round/>
+                      <a:headEnd type="none" w="med" len="med"/>
+                      <a:tailEnd type="none" w="med" len="med"/>
+                    </a:lnL>
+                    <a:lnR w="6350" cap="flat" cmpd="sng" algn="ctr">
+                      <a:solidFill>
+                        <a:srgbClr val="D6D2C9"/>
+                      </a:solidFill>
+                      <a:prstDash val="solid"/>
+                      <a:round/>
+                      <a:headEnd type="none" w="med" len="med"/>
+                      <a:tailEnd type="none" w="med" len="med"/>
+                    </a:lnR>
+                    <a:lnT w="6350" cap="flat" cmpd="sng" algn="ctr">
+                      <a:solidFill>
+                        <a:srgbClr val="D6D2C9"/>
+                      </a:solidFill>
+                      <a:prstDash val="solid"/>
+                      <a:round/>
+                      <a:headEnd type="none" w="med" len="med"/>
+                      <a:tailEnd type="none" w="med" len="med"/>
+                    </a:lnT>
+                    <a:lnB w="6350" cap="flat" cmpd="sng" algn="ctr">
+                      <a:solidFill>
+                        <a:srgbClr val="D6D2C9"/>
+                      </a:solidFill>
+                      <a:prstDash val="solid"/>
+                      <a:round/>
+                      <a:headEnd type="none" w="med" len="med"/>
+                      <a:tailEnd type="none" w="med" len="med"/>
+                    </a:lnB>
+                  </a:tcPr>
+                </a:tc>
+                <a:tc>
+                  <a:txBody>
+                    <a:bodyPr/>
+                    <a:lstStyle/>
+                    <a:p>
+                      <a:pPr indent="0" marL="0">
+                        <a:buNone/>
+                      </a:pPr>
+                      <a:r>
+                        <a:rPr lang="en-US" sz="1150" dirty="0">
+                          <a:solidFill>
+                            <a:srgbClr val="1B1A18"/>
+                          </a:solidFill>
+                          <a:latin typeface="Georgia" pitchFamily="34" charset="0"/>
+                          <a:ea typeface="Georgia" pitchFamily="34" charset="-122"/>
+                          <a:cs typeface="Georgia" pitchFamily="34" charset="-120"/>
+                        </a:rPr>
+                        <a:t>The decision right, consulted at the boundary</a:t>
+                      </a:r>
+                      <a:endParaRPr lang="en-US" sz="1150" dirty="0">
+                        <a:latin typeface="Georgia" charset="0"/>
+                        <a:ea typeface="Georgia" charset="0"/>
+                        <a:cs typeface="Georgia" charset="0"/>
+                      </a:endParaRPr>
+                    </a:p>
+                  </a:txBody>
+                  <a:tcPr marL="82296" marR="82296" marT="82296" marB="82296" anchor="t">
+                    <a:lnL w="6350" cap="flat" cmpd="sng" algn="ctr">
+                      <a:solidFill>
+                        <a:srgbClr val="D6D2C9"/>
+                      </a:solidFill>
+                      <a:prstDash val="solid"/>
+                      <a:round/>
+                      <a:headEnd type="none" w="med" len="med"/>
+                      <a:tailEnd type="none" w="med" len="med"/>
+                    </a:lnL>
+                    <a:lnR w="6350" cap="flat" cmpd="sng" algn="ctr">
+                      <a:solidFill>
+                        <a:srgbClr val="D6D2C9"/>
+                      </a:solidFill>
+                      <a:prstDash val="solid"/>
+                      <a:round/>
+                      <a:headEnd type="none" w="med" len="med"/>
+                      <a:tailEnd type="none" w="med" len="med"/>
+                    </a:lnR>
+                    <a:lnT w="6350" cap="flat" cmpd="sng" algn="ctr">
+                      <a:solidFill>
+                        <a:srgbClr val="D6D2C9"/>
+                      </a:solidFill>
+                      <a:prstDash val="solid"/>
+                      <a:round/>
+                      <a:headEnd type="none" w="med" len="med"/>
+                      <a:tailEnd type="none" w="med" len="med"/>
+                    </a:lnT>
+                    <a:lnB w="6350" cap="flat" cmpd="sng" algn="ctr">
+                      <a:solidFill>
+                        <a:srgbClr val="D6D2C9"/>
+                      </a:solidFill>
+                      <a:prstDash val="solid"/>
+                      <a:round/>
+                      <a:headEnd type="none" w="med" len="med"/>
+                      <a:tailEnd type="none" w="med" len="med"/>
+                    </a:lnB>
+                  </a:tcPr>
+                </a:tc>
+                <a:tc>
+                  <a:txBody>
+                    <a:bodyPr/>
+                    <a:lstStyle/>
+                    <a:p>
+                      <a:pPr indent="0" marL="0">
+                        <a:buNone/>
+                      </a:pPr>
+                      <a:r>
+                        <a:rPr lang="en-US" sz="1150" dirty="0">
+                          <a:solidFill>
+                            <a:srgbClr val="1B1A18"/>
+                          </a:solidFill>
+                          <a:latin typeface="Georgia" pitchFamily="34" charset="0"/>
+                          <a:ea typeface="Georgia" pitchFamily="34" charset="-122"/>
+                          <a:cs typeface="Georgia" pitchFamily="34" charset="-120"/>
+                        </a:rPr>
+                        <a:t>Mandates and delegated authority — recorded for people, not for machines</a:t>
+                      </a:r>
+                      <a:endParaRPr lang="en-US" sz="1150" dirty="0">
+                        <a:latin typeface="Georgia" charset="0"/>
+                        <a:ea typeface="Georgia" charset="0"/>
+                        <a:cs typeface="Georgia" charset="0"/>
+                      </a:endParaRPr>
+                    </a:p>
+                  </a:txBody>
+                  <a:tcPr marL="82296" marR="82296" marT="82296" marB="82296" anchor="t">
+                    <a:lnL w="6350" cap="flat" cmpd="sng" algn="ctr">
+                      <a:solidFill>
+                        <a:srgbClr val="D6D2C9"/>
+                      </a:solidFill>
+                      <a:prstDash val="solid"/>
+                      <a:round/>
+                      <a:headEnd type="none" w="med" len="med"/>
+                      <a:tailEnd type="none" w="med" len="med"/>
+                    </a:lnL>
+                    <a:lnR w="6350" cap="flat" cmpd="sng" algn="ctr">
+                      <a:solidFill>
+                        <a:srgbClr val="D6D2C9"/>
+                      </a:solidFill>
+                      <a:prstDash val="solid"/>
+                      <a:round/>
+                      <a:headEnd type="none" w="med" len="med"/>
+                      <a:tailEnd type="none" w="med" len="med"/>
+                    </a:lnR>
+                    <a:lnT w="6350" cap="flat" cmpd="sng" algn="ctr">
+                      <a:solidFill>
+                        <a:srgbClr val="D6D2C9"/>
+                      </a:solidFill>
+                      <a:prstDash val="solid"/>
+                      <a:round/>
+                      <a:headEnd type="none" w="med" len="med"/>
+                      <a:tailEnd type="none" w="med" len="med"/>
+                    </a:lnT>
+                    <a:lnB w="6350" cap="flat" cmpd="sng" algn="ctr">
+                      <a:solidFill>
+                        <a:srgbClr val="D6D2C9"/>
+                      </a:solidFill>
+                      <a:prstDash val="solid"/>
+                      <a:round/>
+                      <a:headEnd type="none" w="med" len="med"/>
+                      <a:tailEnd type="none" w="med" len="med"/>
+                    </a:lnB>
+                  </a:tcPr>
+                </a:tc>
+              </a:tr>
+              <a:tr h="0">
+                <a:tc>
+                  <a:txBody>
+                    <a:bodyPr/>
+                    <a:lstStyle/>
+                    <a:p>
+                      <a:pPr indent="0" marL="0">
+                        <a:buNone/>
+                      </a:pPr>
+                      <a:r>
+                        <a:rPr lang="en-US" sz="1150" b="1" dirty="0">
+                          <a:solidFill>
+                            <a:srgbClr val="33302B"/>
+                          </a:solidFill>
+                          <a:latin typeface="Georgia" pitchFamily="34" charset="0"/>
+                          <a:ea typeface="Georgia" pitchFamily="34" charset="-122"/>
+                          <a:cs typeface="Georgia" pitchFamily="34" charset="-120"/>
+                        </a:rPr>
+                        <a:t>Accountability</a:t>
+                      </a:r>
+                      <a:endParaRPr lang="en-US" sz="1150" dirty="0">
+                        <a:latin typeface="Georgia" charset="0"/>
+                        <a:ea typeface="Georgia" charset="0"/>
+                        <a:cs typeface="Georgia" charset="0"/>
+                      </a:endParaRPr>
+                    </a:p>
+                  </a:txBody>
+                  <a:tcPr marL="82296" marR="82296" marT="82296" marB="82296" anchor="t">
+                    <a:lnL w="6350" cap="flat" cmpd="sng" algn="ctr">
+                      <a:solidFill>
+                        <a:srgbClr val="D6D2C9"/>
+                      </a:solidFill>
+                      <a:prstDash val="solid"/>
+                      <a:round/>
+                      <a:headEnd type="none" w="med" len="med"/>
+                      <a:tailEnd type="none" w="med" len="med"/>
+                    </a:lnL>
+                    <a:lnR w="6350" cap="flat" cmpd="sng" algn="ctr">
+                      <a:solidFill>
+                        <a:srgbClr val="D6D2C9"/>
+                      </a:solidFill>
+                      <a:prstDash val="solid"/>
+                      <a:round/>
+                      <a:headEnd type="none" w="med" len="med"/>
+                      <a:tailEnd type="none" w="med" len="med"/>
+                    </a:lnR>
+                    <a:lnT w="6350" cap="flat" cmpd="sng" algn="ctr">
+                      <a:solidFill>
+                        <a:srgbClr val="D6D2C9"/>
+                      </a:solidFill>
+                      <a:prstDash val="solid"/>
+                      <a:round/>
+                      <a:headEnd type="none" w="med" len="med"/>
+                      <a:tailEnd type="none" w="med" len="med"/>
+                    </a:lnT>
+                    <a:lnB w="6350" cap="flat" cmpd="sng" algn="ctr">
+                      <a:solidFill>
+                        <a:srgbClr val="D6D2C9"/>
+                      </a:solidFill>
+                      <a:prstDash val="solid"/>
+                      <a:round/>
+                      <a:headEnd type="none" w="med" len="med"/>
+                      <a:tailEnd type="none" w="med" len="med"/>
+                    </a:lnB>
+                  </a:tcPr>
+                </a:tc>
+                <a:tc>
+                  <a:txBody>
+                    <a:bodyPr/>
+                    <a:lstStyle/>
+                    <a:p>
+                      <a:pPr indent="0" marL="0">
+                        <a:buNone/>
+                      </a:pPr>
+                      <a:r>
+                        <a:rPr lang="en-US" sz="1150" dirty="0">
+                          <a:solidFill>
+                            <a:srgbClr val="1B1A18"/>
+                          </a:solidFill>
+                          <a:latin typeface="Georgia" pitchFamily="34" charset="0"/>
+                          <a:ea typeface="Georgia" pitchFamily="34" charset="-122"/>
+                          <a:cs typeface="Georgia" pitchFamily="34" charset="-120"/>
+                        </a:rPr>
+                        <a:t>Attribution generated at execution</a:t>
+                      </a:r>
+                      <a:endParaRPr lang="en-US" sz="1150" dirty="0">
+                        <a:latin typeface="Georgia" charset="0"/>
+                        <a:ea typeface="Georgia" charset="0"/>
+                        <a:cs typeface="Georgia" charset="0"/>
+                      </a:endParaRPr>
+                    </a:p>
+                  </a:txBody>
+                  <a:tcPr marL="82296" marR="82296" marT="82296" marB="82296" anchor="t">
+                    <a:lnL w="6350" cap="flat" cmpd="sng" algn="ctr">
+                      <a:solidFill>
+                        <a:srgbClr val="D6D2C9"/>
+                      </a:solidFill>
+                      <a:prstDash val="solid"/>
+                      <a:round/>
+                      <a:headEnd type="none" w="med" len="med"/>
+                      <a:tailEnd type="none" w="med" len="med"/>
+                    </a:lnL>
+                    <a:lnR w="6350" cap="flat" cmpd="sng" algn="ctr">
+                      <a:solidFill>
+                        <a:srgbClr val="D6D2C9"/>
+                      </a:solidFill>
+                      <a:prstDash val="solid"/>
+                      <a:round/>
+                      <a:headEnd type="none" w="med" len="med"/>
+                      <a:tailEnd type="none" w="med" len="med"/>
+                    </a:lnR>
+                    <a:lnT w="6350" cap="flat" cmpd="sng" algn="ctr">
+                      <a:solidFill>
+                        <a:srgbClr val="D6D2C9"/>
+                      </a:solidFill>
+                      <a:prstDash val="solid"/>
+                      <a:round/>
+                      <a:headEnd type="none" w="med" len="med"/>
+                      <a:tailEnd type="none" w="med" len="med"/>
+                    </a:lnT>
+                    <a:lnB w="6350" cap="flat" cmpd="sng" algn="ctr">
+                      <a:solidFill>
+                        <a:srgbClr val="D6D2C9"/>
+                      </a:solidFill>
+                      <a:prstDash val="solid"/>
+                      <a:round/>
+                      <a:headEnd type="none" w="med" len="med"/>
+                      <a:tailEnd type="none" w="med" len="med"/>
+                    </a:lnB>
+                  </a:tcPr>
+                </a:tc>
+                <a:tc>
+                  <a:txBody>
+                    <a:bodyPr/>
+                    <a:lstStyle/>
+                    <a:p>
+                      <a:pPr indent="0" marL="0">
+                        <a:buNone/>
+                      </a:pPr>
+                      <a:r>
+                        <a:rPr lang="en-US" sz="1150" dirty="0">
+                          <a:solidFill>
+                            <a:srgbClr val="1B1A18"/>
+                          </a:solidFill>
+                          <a:latin typeface="Georgia" pitchFamily="34" charset="0"/>
+                          <a:ea typeface="Georgia" pitchFamily="34" charset="-122"/>
+                          <a:cs typeface="Georgia" pitchFamily="34" charset="-120"/>
+                        </a:rPr>
+                        <a:t>Audit trail and record-keeping obligations</a:t>
+                      </a:r>
+                      <a:endParaRPr lang="en-US" sz="1150" dirty="0">
+                        <a:latin typeface="Georgia" charset="0"/>
+                        <a:ea typeface="Georgia" charset="0"/>
+                        <a:cs typeface="Georgia" charset="0"/>
+                      </a:endParaRPr>
+                    </a:p>
+                  </a:txBody>
+                  <a:tcPr marL="82296" marR="82296" marT="82296" marB="82296" anchor="t">
+                    <a:lnL w="6350" cap="flat" cmpd="sng" algn="ctr">
+                      <a:solidFill>
+                        <a:srgbClr val="D6D2C9"/>
+                      </a:solidFill>
+                      <a:prstDash val="solid"/>
+                      <a:round/>
+                      <a:headEnd type="none" w="med" len="med"/>
+                      <a:tailEnd type="none" w="med" len="med"/>
+                    </a:lnL>
+                    <a:lnR w="6350" cap="flat" cmpd="sng" algn="ctr">
+                      <a:solidFill>
+                        <a:srgbClr val="D6D2C9"/>
+                      </a:solidFill>
+                      <a:prstDash val="solid"/>
+                      <a:round/>
+                      <a:headEnd type="none" w="med" len="med"/>
+                      <a:tailEnd type="none" w="med" len="med"/>
+                    </a:lnR>
+                    <a:lnT w="6350" cap="flat" cmpd="sng" algn="ctr">
+                      <a:solidFill>
+                        <a:srgbClr val="D6D2C9"/>
+                      </a:solidFill>
+                      <a:prstDash val="solid"/>
+                      <a:round/>
+                      <a:headEnd type="none" w="med" len="med"/>
+                      <a:tailEnd type="none" w="med" len="med"/>
+                    </a:lnT>
+                    <a:lnB w="6350" cap="flat" cmpd="sng" algn="ctr">
+                      <a:solidFill>
+                        <a:srgbClr val="D6D2C9"/>
+                      </a:solidFill>
+                      <a:prstDash val="solid"/>
+                      <a:round/>
+                      <a:headEnd type="none" w="med" len="med"/>
+                      <a:tailEnd type="none" w="med" len="med"/>
+                    </a:lnB>
+                  </a:tcPr>
+                </a:tc>
+              </a:tr>
+              <a:tr h="0">
+                <a:tc>
+                  <a:txBody>
+                    <a:bodyPr/>
+                    <a:lstStyle/>
+                    <a:p>
+                      <a:pPr indent="0" marL="0">
+                        <a:buNone/>
+                      </a:pPr>
+                      <a:r>
+                        <a:rPr lang="en-US" sz="1150" b="1" dirty="0">
+                          <a:solidFill>
+                            <a:srgbClr val="33302B"/>
+                          </a:solidFill>
+                          <a:latin typeface="Georgia" pitchFamily="34" charset="0"/>
+                          <a:ea typeface="Georgia" pitchFamily="34" charset="-122"/>
+                          <a:cs typeface="Georgia" pitchFamily="34" charset="-120"/>
+                        </a:rPr>
+                        <a:t>Coordination</a:t>
+                      </a:r>
+                      <a:endParaRPr lang="en-US" sz="1150" dirty="0">
+                        <a:latin typeface="Georgia" charset="0"/>
+                        <a:ea typeface="Georgia" charset="0"/>
+                        <a:cs typeface="Georgia" charset="0"/>
+                      </a:endParaRPr>
+                    </a:p>
+                  </a:txBody>
+                  <a:tcPr marL="82296" marR="82296" marT="82296" marB="82296" anchor="t">
+                    <a:lnL w="6350" cap="flat" cmpd="sng" algn="ctr">
+                      <a:solidFill>
+                        <a:srgbClr val="D6D2C9"/>
+                      </a:solidFill>
+                      <a:prstDash val="solid"/>
+                      <a:round/>
+                      <a:headEnd type="none" w="med" len="med"/>
+                      <a:tailEnd type="none" w="med" len="med"/>
+                    </a:lnL>
+                    <a:lnR w="6350" cap="flat" cmpd="sng" algn="ctr">
+                      <a:solidFill>
+                        <a:srgbClr val="D6D2C9"/>
+                      </a:solidFill>
+                      <a:prstDash val="solid"/>
+                      <a:round/>
+                      <a:headEnd type="none" w="med" len="med"/>
+                      <a:tailEnd type="none" w="med" len="med"/>
+                    </a:lnR>
+                    <a:lnT w="6350" cap="flat" cmpd="sng" algn="ctr">
+                      <a:solidFill>
+                        <a:srgbClr val="D6D2C9"/>
+                      </a:solidFill>
+                      <a:prstDash val="solid"/>
+                      <a:round/>
+                      <a:headEnd type="none" w="med" len="med"/>
+                      <a:tailEnd type="none" w="med" len="med"/>
+                    </a:lnT>
+                    <a:lnB w="6350" cap="flat" cmpd="sng" algn="ctr">
+                      <a:solidFill>
+                        <a:srgbClr val="D6D2C9"/>
+                      </a:solidFill>
+                      <a:prstDash val="solid"/>
+                      <a:round/>
+                      <a:headEnd type="none" w="med" len="med"/>
+                      <a:tailEnd type="none" w="med" len="med"/>
+                    </a:lnB>
+                  </a:tcPr>
+                </a:tc>
+                <a:tc>
+                  <a:txBody>
+                    <a:bodyPr/>
+                    <a:lstStyle/>
+                    <a:p>
+                      <a:pPr indent="0" marL="0">
+                        <a:buNone/>
+                      </a:pPr>
+                      <a:r>
+                        <a:rPr lang="en-US" sz="1150" dirty="0">
+                          <a:solidFill>
+                            <a:srgbClr val="1B1A18"/>
+                          </a:solidFill>
+                          <a:latin typeface="Georgia" pitchFamily="34" charset="0"/>
+                          <a:ea typeface="Georgia" pitchFamily="34" charset="-122"/>
+                          <a:cs typeface="Georgia" pitchFamily="34" charset="-120"/>
+                        </a:rPr>
+                        <a:t>One statement of the invariant, binding all participants</a:t>
+                      </a:r>
+                      <a:endParaRPr lang="en-US" sz="1150" dirty="0">
+                        <a:latin typeface="Georgia" charset="0"/>
+                        <a:ea typeface="Georgia" charset="0"/>
+                        <a:cs typeface="Georgia" charset="0"/>
+                      </a:endParaRPr>
+                    </a:p>
+                  </a:txBody>
+                  <a:tcPr marL="82296" marR="82296" marT="82296" marB="82296" anchor="t">
+                    <a:lnL w="6350" cap="flat" cmpd="sng" algn="ctr">
+                      <a:solidFill>
+                        <a:srgbClr val="D6D2C9"/>
+                      </a:solidFill>
+                      <a:prstDash val="solid"/>
+                      <a:round/>
+                      <a:headEnd type="none" w="med" len="med"/>
+                      <a:tailEnd type="none" w="med" len="med"/>
+                    </a:lnL>
+                    <a:lnR w="6350" cap="flat" cmpd="sng" algn="ctr">
+                      <a:solidFill>
+                        <a:srgbClr val="D6D2C9"/>
+                      </a:solidFill>
+                      <a:prstDash val="solid"/>
+                      <a:round/>
+                      <a:headEnd type="none" w="med" len="med"/>
+                      <a:tailEnd type="none" w="med" len="med"/>
+                    </a:lnR>
+                    <a:lnT w="6350" cap="flat" cmpd="sng" algn="ctr">
+                      <a:solidFill>
+                        <a:srgbClr val="D6D2C9"/>
+                      </a:solidFill>
+                      <a:prstDash val="solid"/>
+                      <a:round/>
+                      <a:headEnd type="none" w="med" len="med"/>
+                      <a:tailEnd type="none" w="med" len="med"/>
+                    </a:lnT>
+                    <a:lnB w="6350" cap="flat" cmpd="sng" algn="ctr">
+                      <a:solidFill>
+                        <a:srgbClr val="D6D2C9"/>
+                      </a:solidFill>
+                      <a:prstDash val="solid"/>
+                      <a:round/>
+                      <a:headEnd type="none" w="med" len="med"/>
+                      <a:tailEnd type="none" w="med" len="med"/>
+                    </a:lnB>
+                  </a:tcPr>
+                </a:tc>
+                <a:tc>
+                  <a:txBody>
+                    <a:bodyPr/>
+                    <a:lstStyle/>
+                    <a:p>
+                      <a:pPr indent="0" marL="0">
+                        <a:buNone/>
+                      </a:pPr>
+                      <a:r>
+                        <a:rPr lang="en-US" sz="1150" dirty="0">
+                          <a:solidFill>
+                            <a:srgbClr val="1B1A18"/>
+                          </a:solidFill>
+                          <a:latin typeface="Georgia" pitchFamily="34" charset="0"/>
+                          <a:ea typeface="Georgia" pitchFamily="34" charset="-122"/>
+                          <a:cs typeface="Georgia" pitchFamily="34" charset="-120"/>
+                        </a:rPr>
+                        <a:t>Group-wide aggregation and consistent risk appetite</a:t>
+                      </a:r>
+                      <a:endParaRPr lang="en-US" sz="1150" dirty="0">
+                        <a:latin typeface="Georgia" charset="0"/>
+                        <a:ea typeface="Georgia" charset="0"/>
+                        <a:cs typeface="Georgia" charset="0"/>
+                      </a:endParaRPr>
+                    </a:p>
+                  </a:txBody>
+                  <a:tcPr marL="82296" marR="82296" marT="82296" marB="82296" anchor="t">
+                    <a:lnL w="6350" cap="flat" cmpd="sng" algn="ctr">
+                      <a:solidFill>
+                        <a:srgbClr val="D6D2C9"/>
+                      </a:solidFill>
+                      <a:prstDash val="solid"/>
+                      <a:round/>
+                      <a:headEnd type="none" w="med" len="med"/>
+                      <a:tailEnd type="none" w="med" len="med"/>
+                    </a:lnL>
+                    <a:lnR w="6350" cap="flat" cmpd="sng" algn="ctr">
+                      <a:solidFill>
+                        <a:srgbClr val="D6D2C9"/>
+                      </a:solidFill>
+                      <a:prstDash val="solid"/>
+                      <a:round/>
+                      <a:headEnd type="none" w="med" len="med"/>
+                      <a:tailEnd type="none" w="med" len="med"/>
+                    </a:lnR>
+                    <a:lnT w="6350" cap="flat" cmpd="sng" algn="ctr">
+                      <a:solidFill>
+                        <a:srgbClr val="D6D2C9"/>
+                      </a:solidFill>
+                      <a:prstDash val="solid"/>
+                      <a:round/>
+                      <a:headEnd type="none" w="med" len="med"/>
+                      <a:tailEnd type="none" w="med" len="med"/>
+                    </a:lnT>
+                    <a:lnB w="6350" cap="flat" cmpd="sng" algn="ctr">
+                      <a:solidFill>
+                        <a:srgbClr val="D6D2C9"/>
+                      </a:solidFill>
+                      <a:prstDash val="solid"/>
+                      <a:round/>
+                      <a:headEnd type="none" w="med" len="med"/>
+                      <a:tailEnd type="none" w="med" len="med"/>
+                    </a:lnB>
+                  </a:tcPr>
+                </a:tc>
+              </a:tr>
+              <a:tr h="0">
+                <a:tc>
+                  <a:txBody>
+                    <a:bodyPr/>
+                    <a:lstStyle/>
+                    <a:p>
+                      <a:pPr indent="0" marL="0">
+                        <a:buNone/>
+                      </a:pPr>
+                      <a:r>
+                        <a:rPr lang="en-US" sz="1150" b="1" dirty="0">
+                          <a:solidFill>
+                            <a:srgbClr val="33302B"/>
+                          </a:solidFill>
+                          <a:latin typeface="Georgia" pitchFamily="34" charset="0"/>
+                          <a:ea typeface="Georgia" pitchFamily="34" charset="-122"/>
+                          <a:cs typeface="Georgia" pitchFamily="34" charset="-120"/>
+                        </a:rPr>
+                        <a:t>Coherence</a:t>
+                      </a:r>
+                      <a:endParaRPr lang="en-US" sz="1150" dirty="0">
+                        <a:latin typeface="Georgia" charset="0"/>
+                        <a:ea typeface="Georgia" charset="0"/>
+                        <a:cs typeface="Georgia" charset="0"/>
+                      </a:endParaRPr>
+                    </a:p>
+                  </a:txBody>
+                  <a:tcPr marL="82296" marR="82296" marT="82296" marB="82296" anchor="t">
+                    <a:lnL w="6350" cap="flat" cmpd="sng" algn="ctr">
+                      <a:solidFill>
+                        <a:srgbClr val="D6D2C9"/>
+                      </a:solidFill>
+                      <a:prstDash val="solid"/>
+                      <a:round/>
+                      <a:headEnd type="none" w="med" len="med"/>
+                      <a:tailEnd type="none" w="med" len="med"/>
+                    </a:lnL>
+                    <a:lnR w="6350" cap="flat" cmpd="sng" algn="ctr">
+                      <a:solidFill>
+                        <a:srgbClr val="D6D2C9"/>
+                      </a:solidFill>
+                      <a:prstDash val="solid"/>
+                      <a:round/>
+                      <a:headEnd type="none" w="med" len="med"/>
+                      <a:tailEnd type="none" w="med" len="med"/>
+                    </a:lnR>
+                    <a:lnT w="6350" cap="flat" cmpd="sng" algn="ctr">
+                      <a:solidFill>
+                        <a:srgbClr val="D6D2C9"/>
+                      </a:solidFill>
+                      <a:prstDash val="solid"/>
+                      <a:round/>
+                      <a:headEnd type="none" w="med" len="med"/>
+                      <a:tailEnd type="none" w="med" len="med"/>
+                    </a:lnT>
+                    <a:lnB w="6350" cap="flat" cmpd="sng" algn="ctr">
+                      <a:solidFill>
+                        <a:srgbClr val="D6D2C9"/>
+                      </a:solidFill>
+                      <a:prstDash val="solid"/>
+                      <a:round/>
+                      <a:headEnd type="none" w="med" len="med"/>
+                      <a:tailEnd type="none" w="med" len="med"/>
+                    </a:lnB>
+                  </a:tcPr>
+                </a:tc>
+                <a:tc>
+                  <a:txBody>
+                    <a:bodyPr/>
+                    <a:lstStyle/>
+                    <a:p>
+                      <a:pPr indent="0" marL="0">
+                        <a:buNone/>
+                      </a:pPr>
+                      <a:r>
+                        <a:rPr lang="en-US" sz="1150" dirty="0">
+                          <a:solidFill>
+                            <a:srgbClr val="1B1A18"/>
+                          </a:solidFill>
+                          <a:latin typeface="Georgia" pitchFamily="34" charset="0"/>
+                          <a:ea typeface="Georgia" pitchFamily="34" charset="-122"/>
+                          <a:cs typeface="Georgia" pitchFamily="34" charset="-120"/>
+                        </a:rPr>
+                        <a:t>One enforcement point, no bypass</a:t>
+                      </a:r>
+                      <a:endParaRPr lang="en-US" sz="1150" dirty="0">
+                        <a:latin typeface="Georgia" charset="0"/>
+                        <a:ea typeface="Georgia" charset="0"/>
+                        <a:cs typeface="Georgia" charset="0"/>
+                      </a:endParaRPr>
+                    </a:p>
+                  </a:txBody>
+                  <a:tcPr marL="82296" marR="82296" marT="82296" marB="82296" anchor="t">
+                    <a:lnL w="6350" cap="flat" cmpd="sng" algn="ctr">
+                      <a:solidFill>
+                        <a:srgbClr val="D6D2C9"/>
+                      </a:solidFill>
+                      <a:prstDash val="solid"/>
+                      <a:round/>
+                      <a:headEnd type="none" w="med" len="med"/>
+                      <a:tailEnd type="none" w="med" len="med"/>
+                    </a:lnL>
+                    <a:lnR w="6350" cap="flat" cmpd="sng" algn="ctr">
+                      <a:solidFill>
+                        <a:srgbClr val="D6D2C9"/>
+                      </a:solidFill>
+                      <a:prstDash val="solid"/>
+                      <a:round/>
+                      <a:headEnd type="none" w="med" len="med"/>
+                      <a:tailEnd type="none" w="med" len="med"/>
+                    </a:lnR>
+                    <a:lnT w="6350" cap="flat" cmpd="sng" algn="ctr">
+                      <a:solidFill>
+                        <a:srgbClr val="D6D2C9"/>
+                      </a:solidFill>
+                      <a:prstDash val="solid"/>
+                      <a:round/>
+                      <a:headEnd type="none" w="med" len="med"/>
+                      <a:tailEnd type="none" w="med" len="med"/>
+                    </a:lnT>
+                    <a:lnB w="6350" cap="flat" cmpd="sng" algn="ctr">
+                      <a:solidFill>
+                        <a:srgbClr val="D6D2C9"/>
+                      </a:solidFill>
+                      <a:prstDash val="solid"/>
+                      <a:round/>
+                      <a:headEnd type="none" w="med" len="med"/>
+                      <a:tailEnd type="none" w="med" len="med"/>
+                    </a:lnB>
+                  </a:tcPr>
+                </a:tc>
+                <a:tc>
+                  <a:txBody>
+                    <a:bodyPr/>
+                    <a:lstStyle/>
+                    <a:p>
+                      <a:pPr indent="0" marL="0">
+                        <a:buNone/>
+                      </a:pPr>
+                      <a:r>
+                        <a:rPr lang="en-US" sz="1150" dirty="0">
+                          <a:solidFill>
+                            <a:srgbClr val="1B1A18"/>
+                          </a:solidFill>
+                          <a:latin typeface="Georgia" pitchFamily="34" charset="0"/>
+                          <a:ea typeface="Georgia" pitchFamily="34" charset="-122"/>
+                          <a:cs typeface="Georgia" pitchFamily="34" charset="-120"/>
+                        </a:rPr>
+                        <a:t>Pre-trade controls; kill functionality; hard limits</a:t>
+                      </a:r>
+                      <a:endParaRPr lang="en-US" sz="1150" dirty="0">
+                        <a:latin typeface="Georgia" charset="0"/>
+                        <a:ea typeface="Georgia" charset="0"/>
+                        <a:cs typeface="Georgia" charset="0"/>
+                      </a:endParaRPr>
+                    </a:p>
+                  </a:txBody>
+                  <a:tcPr marL="82296" marR="82296" marT="82296" marB="82296" anchor="t">
+                    <a:lnL w="6350" cap="flat" cmpd="sng" algn="ctr">
+                      <a:solidFill>
+                        <a:srgbClr val="D6D2C9"/>
+                      </a:solidFill>
+                      <a:prstDash val="solid"/>
+                      <a:round/>
+                      <a:headEnd type="none" w="med" len="med"/>
+                      <a:tailEnd type="none" w="med" len="med"/>
+                    </a:lnL>
+                    <a:lnR w="6350" cap="flat" cmpd="sng" algn="ctr">
+                      <a:solidFill>
+                        <a:srgbClr val="D6D2C9"/>
+                      </a:solidFill>
+                      <a:prstDash val="solid"/>
+                      <a:round/>
+                      <a:headEnd type="none" w="med" len="med"/>
+                      <a:tailEnd type="none" w="med" len="med"/>
+                    </a:lnR>
+                    <a:lnT w="6350" cap="flat" cmpd="sng" algn="ctr">
+                      <a:solidFill>
+                        <a:srgbClr val="D6D2C9"/>
+                      </a:solidFill>
+                      <a:prstDash val="solid"/>
+                      <a:round/>
+                      <a:headEnd type="none" w="med" len="med"/>
+                      <a:tailEnd type="none" w="med" len="med"/>
+                    </a:lnT>
+                    <a:lnB w="6350" cap="flat" cmpd="sng" algn="ctr">
+                      <a:solidFill>
+                        <a:srgbClr val="D6D2C9"/>
+                      </a:solidFill>
+                      <a:prstDash val="solid"/>
+                      <a:round/>
+                      <a:headEnd type="none" w="med" len="med"/>
+                      <a:tailEnd type="none" w="med" len="med"/>
+                    </a:lnB>
+                  </a:tcPr>
+                </a:tc>
+              </a:tr>
+              <a:tr h="0">
+                <a:tc>
+                  <a:txBody>
+                    <a:bodyPr/>
+                    <a:lstStyle/>
+                    <a:p>
+                      <a:pPr indent="0" marL="0">
+                        <a:buNone/>
+                      </a:pPr>
+                      <a:r>
+                        <a:rPr lang="en-US" sz="1150" b="1" dirty="0">
+                          <a:solidFill>
+                            <a:srgbClr val="33302B"/>
+                          </a:solidFill>
+                          <a:latin typeface="Georgia" pitchFamily="34" charset="0"/>
+                          <a:ea typeface="Georgia" pitchFamily="34" charset="-122"/>
+                          <a:cs typeface="Georgia" pitchFamily="34" charset="-120"/>
+                        </a:rPr>
+                        <a:t>Memory</a:t>
+                      </a:r>
+                      <a:endParaRPr lang="en-US" sz="1150" dirty="0">
+                        <a:latin typeface="Georgia" charset="0"/>
+                        <a:ea typeface="Georgia" charset="0"/>
+                        <a:cs typeface="Georgia" charset="0"/>
+                      </a:endParaRPr>
+                    </a:p>
+                  </a:txBody>
+                  <a:tcPr marL="82296" marR="82296" marT="82296" marB="82296" anchor="t">
+                    <a:lnL w="6350" cap="flat" cmpd="sng" algn="ctr">
+                      <a:solidFill>
+                        <a:srgbClr val="D6D2C9"/>
+                      </a:solidFill>
+                      <a:prstDash val="solid"/>
+                      <a:round/>
+                      <a:headEnd type="none" w="med" len="med"/>
+                      <a:tailEnd type="none" w="med" len="med"/>
+                    </a:lnL>
+                    <a:lnR w="6350" cap="flat" cmpd="sng" algn="ctr">
+                      <a:solidFill>
+                        <a:srgbClr val="D6D2C9"/>
+                      </a:solidFill>
+                      <a:prstDash val="solid"/>
+                      <a:round/>
+                      <a:headEnd type="none" w="med" len="med"/>
+                      <a:tailEnd type="none" w="med" len="med"/>
+                    </a:lnR>
+                    <a:lnT w="6350" cap="flat" cmpd="sng" algn="ctr">
+                      <a:solidFill>
+                        <a:srgbClr val="D6D2C9"/>
+                      </a:solidFill>
+                      <a:prstDash val="solid"/>
+                      <a:round/>
+                      <a:headEnd type="none" w="med" len="med"/>
+                      <a:tailEnd type="none" w="med" len="med"/>
+                    </a:lnT>
+                    <a:lnB w="6350" cap="flat" cmpd="sng" algn="ctr">
+                      <a:solidFill>
+                        <a:srgbClr val="D6D2C9"/>
+                      </a:solidFill>
+                      <a:prstDash val="solid"/>
+                      <a:round/>
+                      <a:headEnd type="none" w="med" len="med"/>
+                      <a:tailEnd type="none" w="med" len="med"/>
+                    </a:lnB>
+                  </a:tcPr>
+                </a:tc>
+                <a:tc>
+                  <a:txBody>
+                    <a:bodyPr/>
+                    <a:lstStyle/>
+                    <a:p>
+                      <a:pPr indent="0" marL="0">
+                        <a:buNone/>
+                      </a:pPr>
+                      <a:r>
+                        <a:rPr lang="en-US" sz="1150" dirty="0">
+                          <a:solidFill>
+                            <a:srgbClr val="1B1A18"/>
+                          </a:solidFill>
+                          <a:latin typeface="Georgia" pitchFamily="34" charset="0"/>
+                          <a:ea typeface="Georgia" pitchFamily="34" charset="-122"/>
+                          <a:cs typeface="Georgia" pitchFamily="34" charset="-120"/>
+                        </a:rPr>
+                        <a:t>A durable record with provenance, and the ability to act without the system</a:t>
+                      </a:r>
+                      <a:endParaRPr lang="en-US" sz="1150" dirty="0">
+                        <a:latin typeface="Georgia" charset="0"/>
+                        <a:ea typeface="Georgia" charset="0"/>
+                        <a:cs typeface="Georgia" charset="0"/>
+                      </a:endParaRPr>
+                    </a:p>
+                  </a:txBody>
+                  <a:tcPr marL="82296" marR="82296" marT="82296" marB="82296" anchor="t">
+                    <a:lnL w="6350" cap="flat" cmpd="sng" algn="ctr">
+                      <a:solidFill>
+                        <a:srgbClr val="D6D2C9"/>
+                      </a:solidFill>
+                      <a:prstDash val="solid"/>
+                      <a:round/>
+                      <a:headEnd type="none" w="med" len="med"/>
+                      <a:tailEnd type="none" w="med" len="med"/>
+                    </a:lnL>
+                    <a:lnR w="6350" cap="flat" cmpd="sng" algn="ctr">
+                      <a:solidFill>
+                        <a:srgbClr val="D6D2C9"/>
+                      </a:solidFill>
+                      <a:prstDash val="solid"/>
+                      <a:round/>
+                      <a:headEnd type="none" w="med" len="med"/>
+                      <a:tailEnd type="none" w="med" len="med"/>
+                    </a:lnR>
+                    <a:lnT w="6350" cap="flat" cmpd="sng" algn="ctr">
+                      <a:solidFill>
+                        <a:srgbClr val="D6D2C9"/>
+                      </a:solidFill>
+                      <a:prstDash val="solid"/>
+                      <a:round/>
+                      <a:headEnd type="none" w="med" len="med"/>
+                      <a:tailEnd type="none" w="med" len="med"/>
+                    </a:lnT>
+                    <a:lnB w="6350" cap="flat" cmpd="sng" algn="ctr">
+                      <a:solidFill>
+                        <a:srgbClr val="D6D2C9"/>
+                      </a:solidFill>
+                      <a:prstDash val="solid"/>
+                      <a:round/>
+                      <a:headEnd type="none" w="med" len="med"/>
+                      <a:tailEnd type="none" w="med" len="med"/>
+                    </a:lnB>
+                  </a:tcPr>
+                </a:tc>
+                <a:tc>
+                  <a:txBody>
+                    <a:bodyPr/>
+                    <a:lstStyle/>
+                    <a:p>
+                      <a:pPr indent="0" marL="0">
+                        <a:buNone/>
+                      </a:pPr>
+                      <a:r>
+                        <a:rPr lang="en-US" sz="1150" dirty="0">
+                          <a:solidFill>
+                            <a:srgbClr val="1B1A18"/>
+                          </a:solidFill>
+                          <a:latin typeface="Georgia" pitchFamily="34" charset="0"/>
+                          <a:ea typeface="Georgia" pitchFamily="34" charset="-122"/>
+                          <a:cs typeface="Georgia" pitchFamily="34" charset="-120"/>
+                        </a:rPr>
+                        <a:t>Retention rules and the expectation of reconstruction</a:t>
+                      </a:r>
+                      <a:endParaRPr lang="en-US" sz="1150" dirty="0">
+                        <a:latin typeface="Georgia" charset="0"/>
+                        <a:ea typeface="Georgia" charset="0"/>
+                        <a:cs typeface="Georgia" charset="0"/>
+                      </a:endParaRPr>
+                    </a:p>
+                  </a:txBody>
+                  <a:tcPr marL="82296" marR="82296" marT="82296" marB="82296" anchor="t">
+                    <a:lnL w="6350" cap="flat" cmpd="sng" algn="ctr">
+                      <a:solidFill>
+                        <a:srgbClr val="D6D2C9"/>
+                      </a:solidFill>
+                      <a:prstDash val="solid"/>
+                      <a:round/>
+                      <a:headEnd type="none" w="med" len="med"/>
+                      <a:tailEnd type="none" w="med" len="med"/>
+                    </a:lnL>
+                    <a:lnR w="6350" cap="flat" cmpd="sng" algn="ctr">
+                      <a:solidFill>
+                        <a:srgbClr val="D6D2C9"/>
+                      </a:solidFill>
+                      <a:prstDash val="solid"/>
+                      <a:round/>
+                      <a:headEnd type="none" w="med" len="med"/>
+                      <a:tailEnd type="none" w="med" len="med"/>
+                    </a:lnR>
+                    <a:lnT w="6350" cap="flat" cmpd="sng" algn="ctr">
+                      <a:solidFill>
+                        <a:srgbClr val="D6D2C9"/>
+                      </a:solidFill>
+                      <a:prstDash val="solid"/>
+                      <a:round/>
+                      <a:headEnd type="none" w="med" len="med"/>
+                      <a:tailEnd type="none" w="med" len="med"/>
+                    </a:lnT>
+                    <a:lnB w="6350" cap="flat" cmpd="sng" algn="ctr">
+                      <a:solidFill>
+                        <a:srgbClr val="D6D2C9"/>
+                      </a:solidFill>
+                      <a:prstDash val="solid"/>
+                      <a:round/>
+                      <a:headEnd type="none" w="med" len="med"/>
+                      <a:tailEnd type="none" w="med" len="med"/>
+                    </a:lnB>
+                  </a:tcPr>
+                </a:tc>
+              </a:tr>
+            </a:tbl>
+          </a:graphicData>
+        </a:graphic>
+      </p:graphicFrame>
+      <p:sp>
+        <p:nvSpPr>
+          <p:cNvPr id="5" name="Text 2"/>
+          <p:cNvSpPr/>
+          <p:nvPr/>
+        </p:nvSpPr>
+        <p:spPr>
+          <a:xfrm>
+            <a:off x="566928" y="6473952"/>
+            <a:ext cx="9957816" cy="274320"/>
+          </a:xfrm>
+          <a:prstGeom prst="rect">
+            <a:avLst/>
+          </a:prstGeom>
+          <a:noFill/>
+          <a:ln/>
+        </p:spPr>
+        <p:txBody>
+          <a:bodyPr wrap="square" rtlCol="0" anchor="ctr"/>
+          <a:lstStyle/>
+          <a:p>
+            <a:pPr indent="0" marL="0">
+              <a:buNone/>
+            </a:pPr>
+            <a:r>
+              <a:rPr lang="en-US" sz="900" i="1" dirty="0">
+                <a:solidFill>
+                  <a:srgbClr val="6E6A62"/>
+                </a:solidFill>
+                <a:latin typeface="Georgia" pitchFamily="34" charset="0"/>
+                <a:ea typeface="Georgia" pitchFamily="34" charset="-122"/>
+                <a:cs typeface="Georgia" pitchFamily="34" charset="-120"/>
+              </a:rPr>
+              <a:t>What the Structure Does Not Carry</a:t>
+            </a:r>
+            <a:pPr indent="0" marL="0">
+              <a:buNone/>
+            </a:pPr>
+            <a:r>
+              <a:rPr lang="en-US" sz="900" dirty="0">
+                <a:solidFill>
+                  <a:srgbClr val="6E6A62"/>
+                </a:solidFill>
+                <a:latin typeface="Georgia" pitchFamily="34" charset="0"/>
+                <a:ea typeface="Georgia" pitchFamily="34" charset="-122"/>
+                <a:cs typeface="Georgia" pitchFamily="34" charset="-120"/>
+              </a:rPr>
+              <a:t>  ·  PCERT-FS — Custody in the Regulated Institution</a:t>
+            </a:r>
+            <a:endParaRPr lang="en-US" sz="900" dirty="0"/>
+          </a:p>
+        </p:txBody>
+      </p:sp>
+      <p:sp>
+        <p:nvSpPr>
+          <p:cNvPr id="6" name="Text 3"/>
+          <p:cNvSpPr/>
+          <p:nvPr/>
+        </p:nvSpPr>
+        <p:spPr>
+          <a:xfrm>
+            <a:off x="10707624" y="6473952"/>
+            <a:ext cx="914400" cy="274320"/>
+          </a:xfrm>
+          <a:prstGeom prst="rect">
+            <a:avLst/>
+          </a:prstGeom>
+          <a:noFill/>
+          <a:ln/>
+        </p:spPr>
+        <p:txBody>
+          <a:bodyPr wrap="square" rtlCol="0" anchor="ctr"/>
+          <a:lstStyle/>
+          <a:p>
+            <a:pPr algn="r" indent="0" marL="0">
+              <a:buNone/>
+            </a:pPr>
+            <a:r>
+              <a:rPr lang="en-US" sz="900" dirty="0">
+                <a:solidFill>
+                  <a:srgbClr val="6E6A62"/>
+                </a:solidFill>
+                <a:latin typeface="Georgia" pitchFamily="34" charset="0"/>
+                <a:ea typeface="Georgia" pitchFamily="34" charset="-122"/>
+                <a:cs typeface="Georgia" pitchFamily="34" charset="-120"/>
+              </a:rPr>
+              <a:t>10</a:t>
+            </a:r>
+            <a:endParaRPr lang="en-US" sz="900" dirty="0"/>
+          </a:p>
+        </p:txBody>
+      </p:sp>
+    </p:spTree>
+  </p:cSld>
+  <p:clrMapOvr>
+    <a:masterClrMapping/>
+  </p:clrMapOvr>
+</p:sld>
+</file>
+
+<file path=ppt/slides/slide11.xml><?xml version="1.0" encoding="utf-8"?>
+<p:sld xmlns:a="http://schemas.openxmlformats.org/drawingml/2006/main" xmlns:r="http://schemas.openxmlformats.org/officeDocument/2006/relationships" xmlns:p="http://schemas.openxmlformats.org/presentationml/2006/main">
   <p:cSld name="Slide 10">
     <p:bg>
       <p:bgPr>
@@ -4469,7 +6091,7 @@
                 <a:ea typeface="Georgia" pitchFamily="34" charset="-122"/>
                 <a:cs typeface="Georgia" pitchFamily="34" charset="-120"/>
               </a:rPr>
-              <a:t>10</a:t>
+              <a:t>11</a:t>
             </a:r>
             <a:endParaRPr lang="en-US" sz="900" dirty="0"/>
           </a:p>
@@ -4483,7 +6105,7 @@
 </p:sld>
 </file>
 
-<file path=ppt/slides/slide11.xml><?xml version="1.0" encoding="utf-8"?>
+<file path=ppt/slides/slide12.xml><?xml version="1.0" encoding="utf-8"?>
 <p:sld xmlns:a="http://schemas.openxmlformats.org/drawingml/2006/main" xmlns:r="http://schemas.openxmlformats.org/officeDocument/2006/relationships" xmlns:p="http://schemas.openxmlformats.org/presentationml/2006/main">
   <p:cSld name="Slide 11">
     <p:bg>
@@ -5034,7 +6656,7 @@
                 <a:ea typeface="Georgia" pitchFamily="34" charset="-122"/>
                 <a:cs typeface="Georgia" pitchFamily="34" charset="-120"/>
               </a:rPr>
-              <a:t>11</a:t>
+              <a:t>12</a:t>
             </a:r>
             <a:endParaRPr lang="en-US" sz="900" dirty="0"/>
           </a:p>
@@ -5048,7 +6670,7 @@
 </p:sld>
 </file>
 
-<file path=ppt/slides/slide12.xml><?xml version="1.0" encoding="utf-8"?>
+<file path=ppt/slides/slide13.xml><?xml version="1.0" encoding="utf-8"?>
 <p:sld xmlns:a="http://schemas.openxmlformats.org/drawingml/2006/main" xmlns:r="http://schemas.openxmlformats.org/officeDocument/2006/relationships" xmlns:p="http://schemas.openxmlformats.org/presentationml/2006/main">
   <p:cSld name="Slide 12">
     <p:bg>
@@ -5445,7 +7067,7 @@
                 <a:ea typeface="Georgia" pitchFamily="34" charset="-122"/>
                 <a:cs typeface="Georgia" pitchFamily="34" charset="-120"/>
               </a:rPr>
-              <a:t>12</a:t>
+              <a:t>13</a:t>
             </a:r>
             <a:endParaRPr lang="en-US" sz="900" dirty="0"/>
           </a:p>
@@ -5459,7 +7081,7 @@
 </p:sld>
 </file>
 
-<file path=ppt/slides/slide13.xml><?xml version="1.0" encoding="utf-8"?>
+<file path=ppt/slides/slide14.xml><?xml version="1.0" encoding="utf-8"?>
 <p:sld xmlns:a="http://schemas.openxmlformats.org/drawingml/2006/main" xmlns:r="http://schemas.openxmlformats.org/officeDocument/2006/relationships" xmlns:p="http://schemas.openxmlformats.org/presentationml/2006/main">
   <p:cSld name="Slide 13">
     <p:bg>
@@ -5711,7 +7333,7 @@
                 <a:ea typeface="Georgia" pitchFamily="34" charset="-122"/>
                 <a:cs typeface="Georgia" pitchFamily="34" charset="-120"/>
               </a:rPr>
-              <a:t>13</a:t>
+              <a:t>14</a:t>
             </a:r>
             <a:endParaRPr lang="en-US" sz="900" dirty="0"/>
           </a:p>
@@ -5725,7 +7347,7 @@
 </p:sld>
 </file>
 
-<file path=ppt/slides/slide14.xml><?xml version="1.0" encoding="utf-8"?>
+<file path=ppt/slides/slide15.xml><?xml version="1.0" encoding="utf-8"?>
 <p:sld xmlns:a="http://schemas.openxmlformats.org/drawingml/2006/main" xmlns:r="http://schemas.openxmlformats.org/officeDocument/2006/relationships" xmlns:p="http://schemas.openxmlformats.org/presentationml/2006/main">
   <p:cSld name="Slide 14">
     <p:bg>
@@ -6006,7 +7628,7 @@
                 <a:ea typeface="Georgia" pitchFamily="34" charset="-122"/>
                 <a:cs typeface="Georgia" pitchFamily="34" charset="-120"/>
               </a:rPr>
-              <a:t>14</a:t>
+              <a:t>15</a:t>
             </a:r>
             <a:endParaRPr lang="en-US" sz="900" dirty="0"/>
           </a:p>
@@ -6020,7 +7642,7 @@
 </p:sld>
 </file>
 
-<file path=ppt/slides/slide15.xml><?xml version="1.0" encoding="utf-8"?>
+<file path=ppt/slides/slide16.xml><?xml version="1.0" encoding="utf-8"?>
 <p:sld xmlns:a="http://schemas.openxmlformats.org/drawingml/2006/main" xmlns:r="http://schemas.openxmlformats.org/officeDocument/2006/relationships" xmlns:p="http://schemas.openxmlformats.org/presentationml/2006/main">
   <p:cSld name="Slide 15">
     <p:bg>
@@ -6680,7 +8302,7 @@
                 <a:ea typeface="Georgia" pitchFamily="34" charset="-122"/>
                 <a:cs typeface="Georgia" pitchFamily="34" charset="-120"/>
               </a:rPr>
-              <a:t>15</a:t>
+              <a:t>16</a:t>
             </a:r>
             <a:endParaRPr lang="en-US" sz="900" dirty="0"/>
           </a:p>
@@ -6694,7 +8316,7 @@
 </p:sld>
 </file>
 
-<file path=ppt/slides/slide16.xml><?xml version="1.0" encoding="utf-8"?>
+<file path=ppt/slides/slide17.xml><?xml version="1.0" encoding="utf-8"?>
 <p:sld xmlns:a="http://schemas.openxmlformats.org/drawingml/2006/main" xmlns:r="http://schemas.openxmlformats.org/officeDocument/2006/relationships" xmlns:p="http://schemas.openxmlformats.org/presentationml/2006/main">
   <p:cSld name="Slide 16">
     <p:bg>
@@ -7300,7 +8922,7 @@
                 <a:ea typeface="Georgia" pitchFamily="34" charset="-122"/>
                 <a:cs typeface="Georgia" pitchFamily="34" charset="-120"/>
               </a:rPr>
-              <a:t>16</a:t>
+              <a:t>17</a:t>
             </a:r>
             <a:endParaRPr lang="en-US" sz="900" dirty="0"/>
           </a:p>
@@ -7314,7 +8936,7 @@
 </p:sld>
 </file>
 
-<file path=ppt/slides/slide17.xml><?xml version="1.0" encoding="utf-8"?>
+<file path=ppt/slides/slide18.xml><?xml version="1.0" encoding="utf-8"?>
 <p:sld xmlns:a="http://schemas.openxmlformats.org/drawingml/2006/main" xmlns:r="http://schemas.openxmlformats.org/officeDocument/2006/relationships" xmlns:p="http://schemas.openxmlformats.org/presentationml/2006/main">
   <p:cSld name="Slide 17">
     <p:bg>
@@ -7974,7 +9596,7 @@
                 <a:ea typeface="Georgia" pitchFamily="34" charset="-122"/>
                 <a:cs typeface="Georgia" pitchFamily="34" charset="-120"/>
               </a:rPr>
-              <a:t>17</a:t>
+              <a:t>18</a:t>
             </a:r>
             <a:endParaRPr lang="en-US" sz="900" dirty="0"/>
           </a:p>
@@ -7988,7 +9610,7 @@
 </p:sld>
 </file>
 
-<file path=ppt/slides/slide18.xml><?xml version="1.0" encoding="utf-8"?>
+<file path=ppt/slides/slide19.xml><?xml version="1.0" encoding="utf-8"?>
 <p:sld xmlns:a="http://schemas.openxmlformats.org/drawingml/2006/main" xmlns:r="http://schemas.openxmlformats.org/officeDocument/2006/relationships" xmlns:p="http://schemas.openxmlformats.org/presentationml/2006/main">
   <p:cSld name="Slide 18">
     <p:bg>
@@ -8509,417 +10131,6 @@
       <p:sp>
         <p:nvSpPr>
           <p:cNvPr id="17" name="Text 15"/>
-          <p:cNvSpPr/>
-          <p:nvPr/>
-        </p:nvSpPr>
-        <p:spPr>
-          <a:xfrm>
-            <a:off x="10707624" y="6473952"/>
-            <a:ext cx="914400" cy="274320"/>
-          </a:xfrm>
-          <a:prstGeom prst="rect">
-            <a:avLst/>
-          </a:prstGeom>
-          <a:noFill/>
-          <a:ln/>
-        </p:spPr>
-        <p:txBody>
-          <a:bodyPr wrap="square" rtlCol="0" anchor="ctr"/>
-          <a:lstStyle/>
-          <a:p>
-            <a:pPr algn="r" indent="0" marL="0">
-              <a:buNone/>
-            </a:pPr>
-            <a:r>
-              <a:rPr lang="en-US" sz="900" dirty="0">
-                <a:solidFill>
-                  <a:srgbClr val="6E6A62"/>
-                </a:solidFill>
-                <a:latin typeface="Georgia" pitchFamily="34" charset="0"/>
-                <a:ea typeface="Georgia" pitchFamily="34" charset="-122"/>
-                <a:cs typeface="Georgia" pitchFamily="34" charset="-120"/>
-              </a:rPr>
-              <a:t>18</a:t>
-            </a:r>
-            <a:endParaRPr lang="en-US" sz="900" dirty="0"/>
-          </a:p>
-        </p:txBody>
-      </p:sp>
-    </p:spTree>
-  </p:cSld>
-  <p:clrMapOvr>
-    <a:masterClrMapping/>
-  </p:clrMapOvr>
-</p:sld>
-</file>
-
-<file path=ppt/slides/slide19.xml><?xml version="1.0" encoding="utf-8"?>
-<p:sld xmlns:a="http://schemas.openxmlformats.org/drawingml/2006/main" xmlns:r="http://schemas.openxmlformats.org/officeDocument/2006/relationships" xmlns:p="http://schemas.openxmlformats.org/presentationml/2006/main">
-  <p:cSld name="Slide 19">
-    <p:bg>
-      <p:bgPr>
-        <a:solidFill>
-          <a:srgbClr val="FFFFFF"/>
-        </a:solidFill>
-      </p:bgPr>
-    </p:bg>
-    <p:spTree>
-      <p:nvGrpSpPr>
-        <p:cNvPr id="1" name=""/>
-        <p:cNvGrpSpPr/>
-        <p:nvPr/>
-      </p:nvGrpSpPr>
-      <p:grpSpPr>
-        <a:xfrm>
-          <a:off x="0" y="0"/>
-          <a:ext cx="0" cy="0"/>
-          <a:chOff x="0" y="0"/>
-          <a:chExt cx="0" cy="0"/>
-        </a:xfrm>
-      </p:grpSpPr>
-      <p:sp>
-        <p:nvSpPr>
-          <p:cNvPr id="2" name="Text 0"/>
-          <p:cNvSpPr/>
-          <p:nvPr/>
-        </p:nvSpPr>
-        <p:spPr>
-          <a:xfrm>
-            <a:off x="566928" y="457200"/>
-            <a:ext cx="11055096" cy="292608"/>
-          </a:xfrm>
-          <a:prstGeom prst="rect">
-            <a:avLst/>
-          </a:prstGeom>
-          <a:noFill/>
-          <a:ln/>
-        </p:spPr>
-        <p:txBody>
-          <a:bodyPr wrap="square" rtlCol="0" anchor="ctr"/>
-          <a:lstStyle/>
-          <a:p>
-            <a:pPr indent="0" marL="0">
-              <a:buNone/>
-            </a:pPr>
-            <a:r>
-              <a:rPr lang="en-US" sz="1050" b="1" spc="120" kern="0" dirty="0">
-                <a:solidFill>
-                  <a:srgbClr val="8A8378"/>
-                </a:solidFill>
-                <a:latin typeface="Georgia" pitchFamily="34" charset="0"/>
-                <a:ea typeface="Georgia" pitchFamily="34" charset="-122"/>
-                <a:cs typeface="Georgia" pitchFamily="34" charset="-120"/>
-              </a:rPr>
-              <a:t>CONSEQUENCE RECORD  ·  CASE 1</a:t>
-            </a:r>
-            <a:endParaRPr lang="en-US" sz="1050" dirty="0"/>
-          </a:p>
-        </p:txBody>
-      </p:sp>
-      <p:sp>
-        <p:nvSpPr>
-          <p:cNvPr id="3" name="Text 1"/>
-          <p:cNvSpPr/>
-          <p:nvPr/>
-        </p:nvSpPr>
-        <p:spPr>
-          <a:xfrm>
-            <a:off x="566928" y="749808"/>
-            <a:ext cx="11055096" cy="822960"/>
-          </a:xfrm>
-          <a:prstGeom prst="rect">
-            <a:avLst/>
-          </a:prstGeom>
-          <a:noFill/>
-          <a:ln/>
-        </p:spPr>
-        <p:txBody>
-          <a:bodyPr wrap="square" rtlCol="0" anchor="t"/>
-          <a:lstStyle/>
-          <a:p>
-            <a:pPr indent="0" marL="0">
-              <a:buNone/>
-            </a:pPr>
-            <a:r>
-              <a:rPr lang="en-US" sz="2550" b="1" dirty="0">
-                <a:solidFill>
-                  <a:srgbClr val="1B1A18"/>
-                </a:solidFill>
-                <a:latin typeface="Georgia" pitchFamily="34" charset="0"/>
-                <a:ea typeface="Georgia" pitchFamily="34" charset="-122"/>
-                <a:cs typeface="Georgia" pitchFamily="34" charset="-120"/>
-              </a:rPr>
-              <a:t>Knight Capital — a change that crossed into production</a:t>
-            </a:r>
-            <a:endParaRPr lang="en-US" sz="2550" dirty="0"/>
-          </a:p>
-        </p:txBody>
-      </p:sp>
-      <p:sp>
-        <p:nvSpPr>
-          <p:cNvPr id="4" name="Text 2"/>
-          <p:cNvSpPr/>
-          <p:nvPr/>
-        </p:nvSpPr>
-        <p:spPr>
-          <a:xfrm>
-            <a:off x="566928" y="1627632"/>
-            <a:ext cx="11055096" cy="310896"/>
-          </a:xfrm>
-          <a:prstGeom prst="rect">
-            <a:avLst/>
-          </a:prstGeom>
-          <a:noFill/>
-          <a:ln/>
-        </p:spPr>
-        <p:txBody>
-          <a:bodyPr wrap="square" rtlCol="0" anchor="ctr"/>
-          <a:lstStyle/>
-          <a:p>
-            <a:pPr indent="0" marL="0">
-              <a:buNone/>
-            </a:pPr>
-            <a:r>
-              <a:rPr lang="en-US" sz="1150" i="1" dirty="0">
-                <a:solidFill>
-                  <a:srgbClr val="6E6A62"/>
-                </a:solidFill>
-                <a:latin typeface="Georgia" pitchFamily="34" charset="0"/>
-                <a:ea typeface="Georgia" pitchFamily="34" charset="-122"/>
-                <a:cs typeface="Georgia" pitchFamily="34" charset="-120"/>
-              </a:rPr>
-              <a:t>Primary source: US Securities and Exchange Commission administrative proceeding (2013)</a:t>
-            </a:r>
-            <a:endParaRPr lang="en-US" sz="1150" dirty="0"/>
-          </a:p>
-        </p:txBody>
-      </p:sp>
-      <p:sp>
-        <p:nvSpPr>
-          <p:cNvPr id="5" name="Shape 3"/>
-          <p:cNvSpPr/>
-          <p:nvPr/>
-        </p:nvSpPr>
-        <p:spPr>
-          <a:xfrm>
-            <a:off x="566928" y="2057400"/>
-            <a:ext cx="11055096" cy="2148840"/>
-          </a:xfrm>
-          <a:prstGeom prst="rect">
-            <a:avLst/>
-          </a:prstGeom>
-          <a:solidFill>
-            <a:srgbClr val="F4F2EE"/>
-          </a:solidFill>
-          <a:ln/>
-        </p:spPr>
-      </p:sp>
-      <p:sp>
-        <p:nvSpPr>
-          <p:cNvPr id="6" name="Shape 4"/>
-          <p:cNvSpPr/>
-          <p:nvPr/>
-        </p:nvSpPr>
-        <p:spPr>
-          <a:xfrm>
-            <a:off x="566928" y="2057400"/>
-            <a:ext cx="54864" cy="2148840"/>
-          </a:xfrm>
-          <a:prstGeom prst="rect">
-            <a:avLst/>
-          </a:prstGeom>
-          <a:solidFill>
-            <a:srgbClr val="8A8378"/>
-          </a:solidFill>
-          <a:ln/>
-        </p:spPr>
-      </p:sp>
-      <p:sp>
-        <p:nvSpPr>
-          <p:cNvPr id="7" name="Text 5"/>
-          <p:cNvSpPr/>
-          <p:nvPr/>
-        </p:nvSpPr>
-        <p:spPr>
-          <a:xfrm>
-            <a:off x="841248" y="2212848"/>
-            <a:ext cx="10506456" cy="1874520"/>
-          </a:xfrm>
-          <a:prstGeom prst="rect">
-            <a:avLst/>
-          </a:prstGeom>
-          <a:noFill/>
-          <a:ln/>
-        </p:spPr>
-        <p:txBody>
-          <a:bodyPr wrap="square" rtlCol="0" anchor="ctr"/>
-          <a:lstStyle/>
-          <a:p>
-            <a:pPr indent="0" marL="0">
-              <a:lnSpc>
-                <a:spcPts val="2200"/>
-              </a:lnSpc>
-              <a:buNone/>
-            </a:pPr>
-            <a:r>
-              <a:rPr lang="en-US" sz="1350" dirty="0">
-                <a:solidFill>
-                  <a:srgbClr val="33302B"/>
-                </a:solidFill>
-                <a:latin typeface="Georgia" pitchFamily="34" charset="0"/>
-                <a:ea typeface="Georgia" pitchFamily="34" charset="-122"/>
-                <a:cs typeface="Georgia" pitchFamily="34" charset="-120"/>
-              </a:rPr>
-              <a:t>In August 2012 a deployment left obsolete code active on one of eight servers. Order routing then behaved exactly as written. The firm lost approximately 460 million dollars in roughly forty-five minutes and did not survive as an independent company. The proceeding that followed addressed the absence of adequate controls and supervisory procedures around market access — not any analytical defect.</a:t>
-            </a:r>
-            <a:endParaRPr lang="en-US" sz="1350" dirty="0"/>
-          </a:p>
-          <a:p>
-            <a:pPr indent="0" marL="0">
-              <a:lnSpc>
-                <a:spcPts val="2200"/>
-              </a:lnSpc>
-              <a:buNone/>
-            </a:pPr>
-            <a:endParaRPr lang="en-US" sz="1350" dirty="0"/>
-          </a:p>
-          <a:p>
-            <a:pPr indent="0" marL="0">
-              <a:lnSpc>
-                <a:spcPts val="2200"/>
-              </a:lnSpc>
-              <a:buNone/>
-            </a:pPr>
-            <a:r>
-              <a:rPr lang="en-US" sz="1350" dirty="0">
-                <a:solidFill>
-                  <a:srgbClr val="33302B"/>
-                </a:solidFill>
-                <a:latin typeface="Georgia" pitchFamily="34" charset="0"/>
-                <a:ea typeface="Georgia" pitchFamily="34" charset="-122"/>
-                <a:cs typeface="Georgia" pitchFamily="34" charset="-120"/>
-              </a:rPr>
-              <a:t>No model was wrong. A change crossed into production without the properties that would have caught it.</a:t>
-            </a:r>
-            <a:endParaRPr lang="en-US" sz="1350" dirty="0"/>
-          </a:p>
-        </p:txBody>
-      </p:sp>
-      <p:sp>
-        <p:nvSpPr>
-          <p:cNvPr id="8" name="Text 6"/>
-          <p:cNvSpPr/>
-          <p:nvPr/>
-        </p:nvSpPr>
-        <p:spPr>
-          <a:xfrm>
-            <a:off x="566928" y="4434840"/>
-            <a:ext cx="11055096" cy="1463040"/>
-          </a:xfrm>
-          <a:prstGeom prst="rect">
-            <a:avLst/>
-          </a:prstGeom>
-          <a:noFill/>
-          <a:ln/>
-        </p:spPr>
-        <p:txBody>
-          <a:bodyPr wrap="square" rtlCol="0" anchor="t"/>
-          <a:lstStyle/>
-          <a:p>
-            <a:pPr indent="0" marL="0">
-              <a:lnSpc>
-                <a:spcPts val="2300"/>
-              </a:lnSpc>
-              <a:buNone/>
-            </a:pPr>
-            <a:r>
-              <a:rPr lang="en-US" sz="1400" b="1" dirty="0">
-                <a:solidFill>
-                  <a:srgbClr val="33302B"/>
-                </a:solidFill>
-                <a:latin typeface="Georgia" pitchFamily="34" charset="0"/>
-                <a:ea typeface="Georgia" pitchFamily="34" charset="-122"/>
-                <a:cs typeface="Georgia" pitchFamily="34" charset="-120"/>
-              </a:rPr>
-              <a:t>Properties at issue.   </a:t>
-            </a:r>
-            <a:pPr indent="0" marL="0">
-              <a:lnSpc>
-                <a:spcPts val="2300"/>
-              </a:lnSpc>
-              <a:buNone/>
-            </a:pPr>
-            <a:r>
-              <a:rPr lang="en-US" sz="1400" dirty="0">
-                <a:solidFill>
-                  <a:srgbClr val="6E6A62"/>
-                </a:solidFill>
-                <a:latin typeface="Georgia" pitchFamily="34" charset="0"/>
-                <a:ea typeface="Georgia" pitchFamily="34" charset="-122"/>
-                <a:cs typeface="Georgia" pitchFamily="34" charset="-120"/>
-              </a:rPr>
-              <a:t>Execution coherence, primarily. Also accountability — the firm could not establish quickly enough what was happening, or under whose authority the routing continued. Ask the room what procedure would have caught it, then ask whether that procedure exists where behaviour changes without a release.</a:t>
-            </a:r>
-            <a:endParaRPr lang="en-US" sz="1400" dirty="0"/>
-          </a:p>
-        </p:txBody>
-      </p:sp>
-      <p:sp>
-        <p:nvSpPr>
-          <p:cNvPr id="9" name="Text 7"/>
-          <p:cNvSpPr/>
-          <p:nvPr/>
-        </p:nvSpPr>
-        <p:spPr>
-          <a:xfrm>
-            <a:off x="566928" y="6473952"/>
-            <a:ext cx="9957816" cy="274320"/>
-          </a:xfrm>
-          <a:prstGeom prst="rect">
-            <a:avLst/>
-          </a:prstGeom>
-          <a:noFill/>
-          <a:ln/>
-        </p:spPr>
-        <p:txBody>
-          <a:bodyPr wrap="square" rtlCol="0" anchor="ctr"/>
-          <a:lstStyle/>
-          <a:p>
-            <a:pPr indent="0" marL="0">
-              <a:buNone/>
-            </a:pPr>
-            <a:r>
-              <a:rPr lang="en-US" sz="900" i="1" dirty="0">
-                <a:solidFill>
-                  <a:srgbClr val="6E6A62"/>
-                </a:solidFill>
-                <a:latin typeface="Georgia" pitchFamily="34" charset="0"/>
-                <a:ea typeface="Georgia" pitchFamily="34" charset="-122"/>
-                <a:cs typeface="Georgia" pitchFamily="34" charset="-120"/>
-              </a:rPr>
-              <a:t>What the Structure Does Not Carry</a:t>
-            </a:r>
-            <a:pPr indent="0" marL="0">
-              <a:buNone/>
-            </a:pPr>
-            <a:r>
-              <a:rPr lang="en-US" sz="900" dirty="0">
-                <a:solidFill>
-                  <a:srgbClr val="6E6A62"/>
-                </a:solidFill>
-                <a:latin typeface="Georgia" pitchFamily="34" charset="0"/>
-                <a:ea typeface="Georgia" pitchFamily="34" charset="-122"/>
-                <a:cs typeface="Georgia" pitchFamily="34" charset="-120"/>
-              </a:rPr>
-              <a:t>  ·  PCERT-FS — Custody in the Regulated Institution</a:t>
-            </a:r>
-            <a:endParaRPr lang="en-US" sz="900" dirty="0"/>
-          </a:p>
-        </p:txBody>
-      </p:sp>
-      <p:sp>
-        <p:nvSpPr>
-          <p:cNvPr id="10" name="Text 8"/>
           <p:cNvSpPr/>
           <p:nvPr/>
         </p:nvSpPr>
@@ -9640,6 +10851,417 @@
 
 <file path=ppt/slides/slide20.xml><?xml version="1.0" encoding="utf-8"?>
 <p:sld xmlns:a="http://schemas.openxmlformats.org/drawingml/2006/main" xmlns:r="http://schemas.openxmlformats.org/officeDocument/2006/relationships" xmlns:p="http://schemas.openxmlformats.org/presentationml/2006/main">
+  <p:cSld name="Slide 19">
+    <p:bg>
+      <p:bgPr>
+        <a:solidFill>
+          <a:srgbClr val="FFFFFF"/>
+        </a:solidFill>
+      </p:bgPr>
+    </p:bg>
+    <p:spTree>
+      <p:nvGrpSpPr>
+        <p:cNvPr id="1" name=""/>
+        <p:cNvGrpSpPr/>
+        <p:nvPr/>
+      </p:nvGrpSpPr>
+      <p:grpSpPr>
+        <a:xfrm>
+          <a:off x="0" y="0"/>
+          <a:ext cx="0" cy="0"/>
+          <a:chOff x="0" y="0"/>
+          <a:chExt cx="0" cy="0"/>
+        </a:xfrm>
+      </p:grpSpPr>
+      <p:sp>
+        <p:nvSpPr>
+          <p:cNvPr id="2" name="Text 0"/>
+          <p:cNvSpPr/>
+          <p:nvPr/>
+        </p:nvSpPr>
+        <p:spPr>
+          <a:xfrm>
+            <a:off x="566928" y="457200"/>
+            <a:ext cx="11055096" cy="292608"/>
+          </a:xfrm>
+          <a:prstGeom prst="rect">
+            <a:avLst/>
+          </a:prstGeom>
+          <a:noFill/>
+          <a:ln/>
+        </p:spPr>
+        <p:txBody>
+          <a:bodyPr wrap="square" rtlCol="0" anchor="ctr"/>
+          <a:lstStyle/>
+          <a:p>
+            <a:pPr indent="0" marL="0">
+              <a:buNone/>
+            </a:pPr>
+            <a:r>
+              <a:rPr lang="en-US" sz="1050" b="1" spc="120" kern="0" dirty="0">
+                <a:solidFill>
+                  <a:srgbClr val="8A8378"/>
+                </a:solidFill>
+                <a:latin typeface="Georgia" pitchFamily="34" charset="0"/>
+                <a:ea typeface="Georgia" pitchFamily="34" charset="-122"/>
+                <a:cs typeface="Georgia" pitchFamily="34" charset="-120"/>
+              </a:rPr>
+              <a:t>CONSEQUENCE RECORD  ·  CASE 1</a:t>
+            </a:r>
+            <a:endParaRPr lang="en-US" sz="1050" dirty="0"/>
+          </a:p>
+        </p:txBody>
+      </p:sp>
+      <p:sp>
+        <p:nvSpPr>
+          <p:cNvPr id="3" name="Text 1"/>
+          <p:cNvSpPr/>
+          <p:nvPr/>
+        </p:nvSpPr>
+        <p:spPr>
+          <a:xfrm>
+            <a:off x="566928" y="749808"/>
+            <a:ext cx="11055096" cy="822960"/>
+          </a:xfrm>
+          <a:prstGeom prst="rect">
+            <a:avLst/>
+          </a:prstGeom>
+          <a:noFill/>
+          <a:ln/>
+        </p:spPr>
+        <p:txBody>
+          <a:bodyPr wrap="square" rtlCol="0" anchor="t"/>
+          <a:lstStyle/>
+          <a:p>
+            <a:pPr indent="0" marL="0">
+              <a:buNone/>
+            </a:pPr>
+            <a:r>
+              <a:rPr lang="en-US" sz="2550" b="1" dirty="0">
+                <a:solidFill>
+                  <a:srgbClr val="1B1A18"/>
+                </a:solidFill>
+                <a:latin typeface="Georgia" pitchFamily="34" charset="0"/>
+                <a:ea typeface="Georgia" pitchFamily="34" charset="-122"/>
+                <a:cs typeface="Georgia" pitchFamily="34" charset="-120"/>
+              </a:rPr>
+              <a:t>Knight Capital — a change that crossed into production</a:t>
+            </a:r>
+            <a:endParaRPr lang="en-US" sz="2550" dirty="0"/>
+          </a:p>
+        </p:txBody>
+      </p:sp>
+      <p:sp>
+        <p:nvSpPr>
+          <p:cNvPr id="4" name="Text 2"/>
+          <p:cNvSpPr/>
+          <p:nvPr/>
+        </p:nvSpPr>
+        <p:spPr>
+          <a:xfrm>
+            <a:off x="566928" y="1627632"/>
+            <a:ext cx="11055096" cy="310896"/>
+          </a:xfrm>
+          <a:prstGeom prst="rect">
+            <a:avLst/>
+          </a:prstGeom>
+          <a:noFill/>
+          <a:ln/>
+        </p:spPr>
+        <p:txBody>
+          <a:bodyPr wrap="square" rtlCol="0" anchor="ctr"/>
+          <a:lstStyle/>
+          <a:p>
+            <a:pPr indent="0" marL="0">
+              <a:buNone/>
+            </a:pPr>
+            <a:r>
+              <a:rPr lang="en-US" sz="1150" i="1" dirty="0">
+                <a:solidFill>
+                  <a:srgbClr val="6E6A62"/>
+                </a:solidFill>
+                <a:latin typeface="Georgia" pitchFamily="34" charset="0"/>
+                <a:ea typeface="Georgia" pitchFamily="34" charset="-122"/>
+                <a:cs typeface="Georgia" pitchFamily="34" charset="-120"/>
+              </a:rPr>
+              <a:t>Primary source: US Securities and Exchange Commission administrative proceeding (2013)</a:t>
+            </a:r>
+            <a:endParaRPr lang="en-US" sz="1150" dirty="0"/>
+          </a:p>
+        </p:txBody>
+      </p:sp>
+      <p:sp>
+        <p:nvSpPr>
+          <p:cNvPr id="5" name="Shape 3"/>
+          <p:cNvSpPr/>
+          <p:nvPr/>
+        </p:nvSpPr>
+        <p:spPr>
+          <a:xfrm>
+            <a:off x="566928" y="2057400"/>
+            <a:ext cx="11055096" cy="2148840"/>
+          </a:xfrm>
+          <a:prstGeom prst="rect">
+            <a:avLst/>
+          </a:prstGeom>
+          <a:solidFill>
+            <a:srgbClr val="F4F2EE"/>
+          </a:solidFill>
+          <a:ln/>
+        </p:spPr>
+      </p:sp>
+      <p:sp>
+        <p:nvSpPr>
+          <p:cNvPr id="6" name="Shape 4"/>
+          <p:cNvSpPr/>
+          <p:nvPr/>
+        </p:nvSpPr>
+        <p:spPr>
+          <a:xfrm>
+            <a:off x="566928" y="2057400"/>
+            <a:ext cx="54864" cy="2148840"/>
+          </a:xfrm>
+          <a:prstGeom prst="rect">
+            <a:avLst/>
+          </a:prstGeom>
+          <a:solidFill>
+            <a:srgbClr val="8A8378"/>
+          </a:solidFill>
+          <a:ln/>
+        </p:spPr>
+      </p:sp>
+      <p:sp>
+        <p:nvSpPr>
+          <p:cNvPr id="7" name="Text 5"/>
+          <p:cNvSpPr/>
+          <p:nvPr/>
+        </p:nvSpPr>
+        <p:spPr>
+          <a:xfrm>
+            <a:off x="841248" y="2212848"/>
+            <a:ext cx="10506456" cy="1874520"/>
+          </a:xfrm>
+          <a:prstGeom prst="rect">
+            <a:avLst/>
+          </a:prstGeom>
+          <a:noFill/>
+          <a:ln/>
+        </p:spPr>
+        <p:txBody>
+          <a:bodyPr wrap="square" rtlCol="0" anchor="ctr"/>
+          <a:lstStyle/>
+          <a:p>
+            <a:pPr indent="0" marL="0">
+              <a:lnSpc>
+                <a:spcPts val="2200"/>
+              </a:lnSpc>
+              <a:buNone/>
+            </a:pPr>
+            <a:r>
+              <a:rPr lang="en-US" sz="1350" dirty="0">
+                <a:solidFill>
+                  <a:srgbClr val="33302B"/>
+                </a:solidFill>
+                <a:latin typeface="Georgia" pitchFamily="34" charset="0"/>
+                <a:ea typeface="Georgia" pitchFamily="34" charset="-122"/>
+                <a:cs typeface="Georgia" pitchFamily="34" charset="-120"/>
+              </a:rPr>
+              <a:t>In August 2012 a deployment left obsolete code active on one of eight servers. Order routing then behaved exactly as written. The firm lost approximately 460 million dollars in roughly forty-five minutes and did not survive as an independent company. The proceeding that followed addressed the absence of adequate controls and supervisory procedures around market access — not any analytical defect.</a:t>
+            </a:r>
+            <a:endParaRPr lang="en-US" sz="1350" dirty="0"/>
+          </a:p>
+          <a:p>
+            <a:pPr indent="0" marL="0">
+              <a:lnSpc>
+                <a:spcPts val="2200"/>
+              </a:lnSpc>
+              <a:buNone/>
+            </a:pPr>
+            <a:endParaRPr lang="en-US" sz="1350" dirty="0"/>
+          </a:p>
+          <a:p>
+            <a:pPr indent="0" marL="0">
+              <a:lnSpc>
+                <a:spcPts val="2200"/>
+              </a:lnSpc>
+              <a:buNone/>
+            </a:pPr>
+            <a:r>
+              <a:rPr lang="en-US" sz="1350" dirty="0">
+                <a:solidFill>
+                  <a:srgbClr val="33302B"/>
+                </a:solidFill>
+                <a:latin typeface="Georgia" pitchFamily="34" charset="0"/>
+                <a:ea typeface="Georgia" pitchFamily="34" charset="-122"/>
+                <a:cs typeface="Georgia" pitchFamily="34" charset="-120"/>
+              </a:rPr>
+              <a:t>No model was wrong. A change crossed into production without the properties that would have caught it.</a:t>
+            </a:r>
+            <a:endParaRPr lang="en-US" sz="1350" dirty="0"/>
+          </a:p>
+        </p:txBody>
+      </p:sp>
+      <p:sp>
+        <p:nvSpPr>
+          <p:cNvPr id="8" name="Text 6"/>
+          <p:cNvSpPr/>
+          <p:nvPr/>
+        </p:nvSpPr>
+        <p:spPr>
+          <a:xfrm>
+            <a:off x="566928" y="4434840"/>
+            <a:ext cx="11055096" cy="1463040"/>
+          </a:xfrm>
+          <a:prstGeom prst="rect">
+            <a:avLst/>
+          </a:prstGeom>
+          <a:noFill/>
+          <a:ln/>
+        </p:spPr>
+        <p:txBody>
+          <a:bodyPr wrap="square" rtlCol="0" anchor="t"/>
+          <a:lstStyle/>
+          <a:p>
+            <a:pPr indent="0" marL="0">
+              <a:lnSpc>
+                <a:spcPts val="2300"/>
+              </a:lnSpc>
+              <a:buNone/>
+            </a:pPr>
+            <a:r>
+              <a:rPr lang="en-US" sz="1400" b="1" dirty="0">
+                <a:solidFill>
+                  <a:srgbClr val="33302B"/>
+                </a:solidFill>
+                <a:latin typeface="Georgia" pitchFamily="34" charset="0"/>
+                <a:ea typeface="Georgia" pitchFamily="34" charset="-122"/>
+                <a:cs typeface="Georgia" pitchFamily="34" charset="-120"/>
+              </a:rPr>
+              <a:t>Properties at issue.   </a:t>
+            </a:r>
+            <a:pPr indent="0" marL="0">
+              <a:lnSpc>
+                <a:spcPts val="2300"/>
+              </a:lnSpc>
+              <a:buNone/>
+            </a:pPr>
+            <a:r>
+              <a:rPr lang="en-US" sz="1400" dirty="0">
+                <a:solidFill>
+                  <a:srgbClr val="6E6A62"/>
+                </a:solidFill>
+                <a:latin typeface="Georgia" pitchFamily="34" charset="0"/>
+                <a:ea typeface="Georgia" pitchFamily="34" charset="-122"/>
+                <a:cs typeface="Georgia" pitchFamily="34" charset="-120"/>
+              </a:rPr>
+              <a:t>Execution coherence, primarily. Also accountability — the firm could not establish quickly enough what was happening, or under whose authority the routing continued. Ask the room what procedure would have caught it, then ask whether that procedure exists where behaviour changes without a release.</a:t>
+            </a:r>
+            <a:endParaRPr lang="en-US" sz="1400" dirty="0"/>
+          </a:p>
+        </p:txBody>
+      </p:sp>
+      <p:sp>
+        <p:nvSpPr>
+          <p:cNvPr id="9" name="Text 7"/>
+          <p:cNvSpPr/>
+          <p:nvPr/>
+        </p:nvSpPr>
+        <p:spPr>
+          <a:xfrm>
+            <a:off x="566928" y="6473952"/>
+            <a:ext cx="9957816" cy="274320"/>
+          </a:xfrm>
+          <a:prstGeom prst="rect">
+            <a:avLst/>
+          </a:prstGeom>
+          <a:noFill/>
+          <a:ln/>
+        </p:spPr>
+        <p:txBody>
+          <a:bodyPr wrap="square" rtlCol="0" anchor="ctr"/>
+          <a:lstStyle/>
+          <a:p>
+            <a:pPr indent="0" marL="0">
+              <a:buNone/>
+            </a:pPr>
+            <a:r>
+              <a:rPr lang="en-US" sz="900" i="1" dirty="0">
+                <a:solidFill>
+                  <a:srgbClr val="6E6A62"/>
+                </a:solidFill>
+                <a:latin typeface="Georgia" pitchFamily="34" charset="0"/>
+                <a:ea typeface="Georgia" pitchFamily="34" charset="-122"/>
+                <a:cs typeface="Georgia" pitchFamily="34" charset="-120"/>
+              </a:rPr>
+              <a:t>What the Structure Does Not Carry</a:t>
+            </a:r>
+            <a:pPr indent="0" marL="0">
+              <a:buNone/>
+            </a:pPr>
+            <a:r>
+              <a:rPr lang="en-US" sz="900" dirty="0">
+                <a:solidFill>
+                  <a:srgbClr val="6E6A62"/>
+                </a:solidFill>
+                <a:latin typeface="Georgia" pitchFamily="34" charset="0"/>
+                <a:ea typeface="Georgia" pitchFamily="34" charset="-122"/>
+                <a:cs typeface="Georgia" pitchFamily="34" charset="-120"/>
+              </a:rPr>
+              <a:t>  ·  PCERT-FS — Custody in the Regulated Institution</a:t>
+            </a:r>
+            <a:endParaRPr lang="en-US" sz="900" dirty="0"/>
+          </a:p>
+        </p:txBody>
+      </p:sp>
+      <p:sp>
+        <p:nvSpPr>
+          <p:cNvPr id="10" name="Text 8"/>
+          <p:cNvSpPr/>
+          <p:nvPr/>
+        </p:nvSpPr>
+        <p:spPr>
+          <a:xfrm>
+            <a:off x="10707624" y="6473952"/>
+            <a:ext cx="914400" cy="274320"/>
+          </a:xfrm>
+          <a:prstGeom prst="rect">
+            <a:avLst/>
+          </a:prstGeom>
+          <a:noFill/>
+          <a:ln/>
+        </p:spPr>
+        <p:txBody>
+          <a:bodyPr wrap="square" rtlCol="0" anchor="ctr"/>
+          <a:lstStyle/>
+          <a:p>
+            <a:pPr algn="r" indent="0" marL="0">
+              <a:buNone/>
+            </a:pPr>
+            <a:r>
+              <a:rPr lang="en-US" sz="900" dirty="0">
+                <a:solidFill>
+                  <a:srgbClr val="6E6A62"/>
+                </a:solidFill>
+                <a:latin typeface="Georgia" pitchFamily="34" charset="0"/>
+                <a:ea typeface="Georgia" pitchFamily="34" charset="-122"/>
+                <a:cs typeface="Georgia" pitchFamily="34" charset="-120"/>
+              </a:rPr>
+              <a:t>20</a:t>
+            </a:r>
+            <a:endParaRPr lang="en-US" sz="900" dirty="0"/>
+          </a:p>
+        </p:txBody>
+      </p:sp>
+    </p:spTree>
+  </p:cSld>
+  <p:clrMapOvr>
+    <a:masterClrMapping/>
+  </p:clrMapOvr>
+</p:sld>
+</file>
+
+<file path=ppt/slides/slide21.xml><?xml version="1.0" encoding="utf-8"?>
+<p:sld xmlns:a="http://schemas.openxmlformats.org/drawingml/2006/main" xmlns:r="http://schemas.openxmlformats.org/officeDocument/2006/relationships" xmlns:p="http://schemas.openxmlformats.org/presentationml/2006/main">
   <p:cSld name="Slide 20">
     <p:bg>
       <p:bgPr>
@@ -9890,7 +11512,7 @@
                 <a:ea typeface="Georgia" pitchFamily="34" charset="-122"/>
                 <a:cs typeface="Georgia" pitchFamily="34" charset="-120"/>
               </a:rPr>
-              <a:t>20</a:t>
+              <a:t>21</a:t>
             </a:r>
             <a:endParaRPr lang="en-US" sz="900" dirty="0"/>
           </a:p>
@@ -9904,7 +11526,7 @@
 </p:sld>
 </file>
 
-<file path=ppt/slides/slide21.xml><?xml version="1.0" encoding="utf-8"?>
+<file path=ppt/slides/slide22.xml><?xml version="1.0" encoding="utf-8"?>
 <p:sld xmlns:a="http://schemas.openxmlformats.org/drawingml/2006/main" xmlns:r="http://schemas.openxmlformats.org/officeDocument/2006/relationships" xmlns:p="http://schemas.openxmlformats.org/presentationml/2006/main">
   <p:cSld name="Slide 21">
     <p:bg>
@@ -10185,7 +11807,7 @@
                 <a:ea typeface="Georgia" pitchFamily="34" charset="-122"/>
                 <a:cs typeface="Georgia" pitchFamily="34" charset="-120"/>
               </a:rPr>
-              <a:t>21</a:t>
+              <a:t>22</a:t>
             </a:r>
             <a:endParaRPr lang="en-US" sz="900" dirty="0"/>
           </a:p>
@@ -10199,7 +11821,7 @@
 </p:sld>
 </file>
 
-<file path=ppt/slides/slide22.xml><?xml version="1.0" encoding="utf-8"?>
+<file path=ppt/slides/slide23.xml><?xml version="1.0" encoding="utf-8"?>
 <p:sld xmlns:a="http://schemas.openxmlformats.org/drawingml/2006/main" xmlns:r="http://schemas.openxmlformats.org/officeDocument/2006/relationships" xmlns:p="http://schemas.openxmlformats.org/presentationml/2006/main">
   <p:cSld name="Slide 22">
     <p:bg>
@@ -10741,7 +12363,7 @@
                 <a:ea typeface="Georgia" pitchFamily="34" charset="-122"/>
                 <a:cs typeface="Georgia" pitchFamily="34" charset="-120"/>
               </a:rPr>
-              <a:t>22</a:t>
+              <a:t>23</a:t>
             </a:r>
             <a:endParaRPr lang="en-US" sz="900" dirty="0"/>
           </a:p>
@@ -10755,7 +12377,7 @@
 </p:sld>
 </file>
 
-<file path=ppt/slides/slide23.xml><?xml version="1.0" encoding="utf-8"?>
+<file path=ppt/slides/slide24.xml><?xml version="1.0" encoding="utf-8"?>
 <p:sld xmlns:a="http://schemas.openxmlformats.org/drawingml/2006/main" xmlns:r="http://schemas.openxmlformats.org/officeDocument/2006/relationships" xmlns:p="http://schemas.openxmlformats.org/presentationml/2006/main">
   <p:cSld name="Slide 23">
     <p:bg>
@@ -11152,7 +12774,7 @@
                 <a:ea typeface="Georgia" pitchFamily="34" charset="-122"/>
                 <a:cs typeface="Georgia" pitchFamily="34" charset="-120"/>
               </a:rPr>
-              <a:t>23</a:t>
+              <a:t>24</a:t>
             </a:r>
             <a:endParaRPr lang="en-US" sz="900" dirty="0"/>
           </a:p>
@@ -11166,7 +12788,7 @@
 </p:sld>
 </file>
 
-<file path=ppt/slides/slide24.xml><?xml version="1.0" encoding="utf-8"?>
+<file path=ppt/slides/slide25.xml><?xml version="1.0" encoding="utf-8"?>
 <p:sld xmlns:a="http://schemas.openxmlformats.org/drawingml/2006/main" xmlns:r="http://schemas.openxmlformats.org/officeDocument/2006/relationships" xmlns:p="http://schemas.openxmlformats.org/presentationml/2006/main">
   <p:cSld name="Slide 24">
     <p:bg>
@@ -11717,7 +13339,7 @@
                 <a:ea typeface="Georgia" pitchFamily="34" charset="-122"/>
                 <a:cs typeface="Georgia" pitchFamily="34" charset="-120"/>
               </a:rPr>
-              <a:t>24</a:t>
+              <a:t>25</a:t>
             </a:r>
             <a:endParaRPr lang="en-US" sz="900" dirty="0"/>
           </a:p>
@@ -11731,7 +13353,7 @@
 </p:sld>
 </file>
 
-<file path=ppt/slides/slide25.xml><?xml version="1.0" encoding="utf-8"?>
+<file path=ppt/slides/slide26.xml><?xml version="1.0" encoding="utf-8"?>
 <p:sld xmlns:a="http://schemas.openxmlformats.org/drawingml/2006/main" xmlns:r="http://schemas.openxmlformats.org/officeDocument/2006/relationships" xmlns:p="http://schemas.openxmlformats.org/presentationml/2006/main">
   <p:cSld name="Slide 25">
     <p:bg>
@@ -11983,7 +13605,7 @@
                 <a:ea typeface="Georgia" pitchFamily="34" charset="-122"/>
                 <a:cs typeface="Georgia" pitchFamily="34" charset="-120"/>
               </a:rPr>
-              <a:t>25</a:t>
+              <a:t>26</a:t>
             </a:r>
             <a:endParaRPr lang="en-US" sz="900" dirty="0"/>
           </a:p>
@@ -11997,7 +13619,7 @@
 </p:sld>
 </file>
 
-<file path=ppt/slides/slide26.xml><?xml version="1.0" encoding="utf-8"?>
+<file path=ppt/slides/slide27.xml><?xml version="1.0" encoding="utf-8"?>
 <p:sld xmlns:a="http://schemas.openxmlformats.org/drawingml/2006/main" xmlns:r="http://schemas.openxmlformats.org/officeDocument/2006/relationships" xmlns:p="http://schemas.openxmlformats.org/presentationml/2006/main">
   <p:cSld name="Slide 26">
     <p:bg>
@@ -12603,7 +14225,7 @@
                 <a:ea typeface="Georgia" pitchFamily="34" charset="-122"/>
                 <a:cs typeface="Georgia" pitchFamily="34" charset="-120"/>
               </a:rPr>
-              <a:t>26</a:t>
+              <a:t>27</a:t>
             </a:r>
             <a:endParaRPr lang="en-US" sz="900" dirty="0"/>
           </a:p>
@@ -12617,7 +14239,7 @@
 </p:sld>
 </file>
 
-<file path=ppt/slides/slide27.xml><?xml version="1.0" encoding="utf-8"?>
+<file path=ppt/slides/slide28.xml><?xml version="1.0" encoding="utf-8"?>
 <p:sld xmlns:a="http://schemas.openxmlformats.org/drawingml/2006/main" xmlns:r="http://schemas.openxmlformats.org/officeDocument/2006/relationships" xmlns:p="http://schemas.openxmlformats.org/presentationml/2006/main">
   <p:cSld name="Slide 27">
     <p:bg>
@@ -12898,7 +14520,7 @@
                 <a:ea typeface="Georgia" pitchFamily="34" charset="-122"/>
                 <a:cs typeface="Georgia" pitchFamily="34" charset="-120"/>
               </a:rPr>
-              <a:t>27</a:t>
+              <a:t>28</a:t>
             </a:r>
             <a:endParaRPr lang="en-US" sz="900" dirty="0"/>
           </a:p>
@@ -12912,7 +14534,7 @@
 </p:sld>
 </file>
 
-<file path=ppt/slides/slide28.xml><?xml version="1.0" encoding="utf-8"?>
+<file path=ppt/slides/slide29.xml><?xml version="1.0" encoding="utf-8"?>
 <p:sld xmlns:a="http://schemas.openxmlformats.org/drawingml/2006/main" xmlns:r="http://schemas.openxmlformats.org/officeDocument/2006/relationships" xmlns:p="http://schemas.openxmlformats.org/presentationml/2006/main">
   <p:cSld name="Slide 28">
     <p:bg>
@@ -13433,272 +15055,6 @@
       <p:sp>
         <p:nvSpPr>
           <p:cNvPr id="17" name="Text 15"/>
-          <p:cNvSpPr/>
-          <p:nvPr/>
-        </p:nvSpPr>
-        <p:spPr>
-          <a:xfrm>
-            <a:off x="10707624" y="6473952"/>
-            <a:ext cx="914400" cy="274320"/>
-          </a:xfrm>
-          <a:prstGeom prst="rect">
-            <a:avLst/>
-          </a:prstGeom>
-          <a:noFill/>
-          <a:ln/>
-        </p:spPr>
-        <p:txBody>
-          <a:bodyPr wrap="square" rtlCol="0" anchor="ctr"/>
-          <a:lstStyle/>
-          <a:p>
-            <a:pPr algn="r" indent="0" marL="0">
-              <a:buNone/>
-            </a:pPr>
-            <a:r>
-              <a:rPr lang="en-US" sz="900" dirty="0">
-                <a:solidFill>
-                  <a:srgbClr val="6E6A62"/>
-                </a:solidFill>
-                <a:latin typeface="Georgia" pitchFamily="34" charset="0"/>
-                <a:ea typeface="Georgia" pitchFamily="34" charset="-122"/>
-                <a:cs typeface="Georgia" pitchFamily="34" charset="-120"/>
-              </a:rPr>
-              <a:t>28</a:t>
-            </a:r>
-            <a:endParaRPr lang="en-US" sz="900" dirty="0"/>
-          </a:p>
-        </p:txBody>
-      </p:sp>
-    </p:spTree>
-  </p:cSld>
-  <p:clrMapOvr>
-    <a:masterClrMapping/>
-  </p:clrMapOvr>
-</p:sld>
-</file>
-
-<file path=ppt/slides/slide29.xml><?xml version="1.0" encoding="utf-8"?>
-<p:sld xmlns:a="http://schemas.openxmlformats.org/drawingml/2006/main" xmlns:r="http://schemas.openxmlformats.org/officeDocument/2006/relationships" xmlns:p="http://schemas.openxmlformats.org/presentationml/2006/main">
-  <p:cSld name="Slide 29">
-    <p:bg>
-      <p:bgPr>
-        <a:solidFill>
-          <a:srgbClr val="1B1A18"/>
-        </a:solidFill>
-      </p:bgPr>
-    </p:bg>
-    <p:spTree>
-      <p:nvGrpSpPr>
-        <p:cNvPr id="1" name=""/>
-        <p:cNvGrpSpPr/>
-        <p:nvPr/>
-      </p:nvGrpSpPr>
-      <p:grpSpPr>
-        <a:xfrm>
-          <a:off x="0" y="0"/>
-          <a:ext cx="0" cy="0"/>
-          <a:chOff x="0" y="0"/>
-          <a:chExt cx="0" cy="0"/>
-        </a:xfrm>
-      </p:grpSpPr>
-      <p:sp>
-        <p:nvSpPr>
-          <p:cNvPr id="2" name="Shape 0"/>
-          <p:cNvSpPr/>
-          <p:nvPr/>
-        </p:nvSpPr>
-        <p:spPr>
-          <a:xfrm>
-            <a:off x="566928" y="2148840"/>
-            <a:ext cx="1554480" cy="310896"/>
-          </a:xfrm>
-          <a:prstGeom prst="roundRect">
-            <a:avLst>
-              <a:gd name="adj" fmla="val 47059"/>
-            </a:avLst>
-          </a:prstGeom>
-          <a:solidFill>
-            <a:srgbClr val="8A8378"/>
-          </a:solidFill>
-          <a:ln/>
-        </p:spPr>
-      </p:sp>
-      <p:sp>
-        <p:nvSpPr>
-          <p:cNvPr id="3" name="Text 1"/>
-          <p:cNvSpPr/>
-          <p:nvPr/>
-        </p:nvSpPr>
-        <p:spPr>
-          <a:xfrm>
-            <a:off x="566928" y="2148840"/>
-            <a:ext cx="1554480" cy="310896"/>
-          </a:xfrm>
-          <a:prstGeom prst="rect">
-            <a:avLst/>
-          </a:prstGeom>
-          <a:noFill/>
-          <a:ln/>
-        </p:spPr>
-        <p:txBody>
-          <a:bodyPr wrap="square" rtlCol="0" anchor="ctr"/>
-          <a:lstStyle/>
-          <a:p>
-            <a:pPr algn="ctr" indent="0" marL="0">
-              <a:buNone/>
-            </a:pPr>
-            <a:r>
-              <a:rPr lang="en-US" sz="1050" b="1" spc="60" kern="0" dirty="0">
-                <a:solidFill>
-                  <a:srgbClr val="1B1A18"/>
-                </a:solidFill>
-                <a:latin typeface="Georgia" pitchFamily="34" charset="0"/>
-                <a:ea typeface="Georgia" pitchFamily="34" charset="-122"/>
-                <a:cs typeface="Georgia" pitchFamily="34" charset="-120"/>
-              </a:rPr>
-              <a:t>MODULE 6</a:t>
-            </a:r>
-            <a:endParaRPr lang="en-US" sz="1050" dirty="0"/>
-          </a:p>
-        </p:txBody>
-      </p:sp>
-      <p:sp>
-        <p:nvSpPr>
-          <p:cNvPr id="4" name="Text 2"/>
-          <p:cNvSpPr/>
-          <p:nvPr/>
-        </p:nvSpPr>
-        <p:spPr>
-          <a:xfrm>
-            <a:off x="566928" y="2606040"/>
-            <a:ext cx="10515600" cy="1005840"/>
-          </a:xfrm>
-          <a:prstGeom prst="rect">
-            <a:avLst/>
-          </a:prstGeom>
-          <a:noFill/>
-          <a:ln/>
-        </p:spPr>
-        <p:txBody>
-          <a:bodyPr wrap="square" rtlCol="0" anchor="ctr"/>
-          <a:lstStyle/>
-          <a:p>
-            <a:pPr indent="0" marL="0">
-              <a:buNone/>
-            </a:pPr>
-            <a:r>
-              <a:rPr lang="en-US" sz="3550" b="1" dirty="0">
-                <a:solidFill>
-                  <a:srgbClr val="FFFFFF"/>
-                </a:solidFill>
-                <a:latin typeface="Georgia" pitchFamily="34" charset="0"/>
-                <a:ea typeface="Georgia" pitchFamily="34" charset="-122"/>
-                <a:cs typeface="Georgia" pitchFamily="34" charset="-120"/>
-              </a:rPr>
-              <a:t>The Protocol, the Rules, and the Capstone</a:t>
-            </a:r>
-            <a:endParaRPr lang="en-US" sz="3550" dirty="0"/>
-          </a:p>
-        </p:txBody>
-      </p:sp>
-      <p:sp>
-        <p:nvSpPr>
-          <p:cNvPr id="5" name="Text 3"/>
-          <p:cNvSpPr/>
-          <p:nvPr/>
-        </p:nvSpPr>
-        <p:spPr>
-          <a:xfrm>
-            <a:off x="566928" y="3657600"/>
-            <a:ext cx="9875520" cy="1097280"/>
-          </a:xfrm>
-          <a:prstGeom prst="rect">
-            <a:avLst/>
-          </a:prstGeom>
-          <a:noFill/>
-          <a:ln/>
-        </p:spPr>
-        <p:txBody>
-          <a:bodyPr wrap="square" rtlCol="0" anchor="ctr"/>
-          <a:lstStyle/>
-          <a:p>
-            <a:pPr indent="0" marL="0">
-              <a:lnSpc>
-                <a:spcPts val="2400"/>
-              </a:lnSpc>
-              <a:buNone/>
-            </a:pPr>
-            <a:r>
-              <a:rPr lang="en-US" sz="1500" dirty="0">
-                <a:solidFill>
-                  <a:srgbClr val="E4DFD5"/>
-                </a:solidFill>
-                <a:latin typeface="Georgia" pitchFamily="34" charset="0"/>
-                <a:ea typeface="Georgia" pitchFamily="34" charset="-122"/>
-                <a:cs typeface="Georgia" pitchFamily="34" charset="-120"/>
-              </a:rPr>
-              <a:t>Nine assessments, six rules, and one assessment written in your own language. Chapters 22 and 23.</a:t>
-            </a:r>
-            <a:endParaRPr lang="en-US" sz="1500" dirty="0"/>
-          </a:p>
-        </p:txBody>
-      </p:sp>
-      <p:sp>
-        <p:nvSpPr>
-          <p:cNvPr id="6" name="Text 4"/>
-          <p:cNvSpPr/>
-          <p:nvPr/>
-        </p:nvSpPr>
-        <p:spPr>
-          <a:xfrm>
-            <a:off x="566928" y="6473952"/>
-            <a:ext cx="9957816" cy="274320"/>
-          </a:xfrm>
-          <a:prstGeom prst="rect">
-            <a:avLst/>
-          </a:prstGeom>
-          <a:noFill/>
-          <a:ln/>
-        </p:spPr>
-        <p:txBody>
-          <a:bodyPr wrap="square" rtlCol="0" anchor="ctr"/>
-          <a:lstStyle/>
-          <a:p>
-            <a:pPr indent="0" marL="0">
-              <a:buNone/>
-            </a:pPr>
-            <a:r>
-              <a:rPr lang="en-US" sz="900" i="1" dirty="0">
-                <a:solidFill>
-                  <a:srgbClr val="6E6A62"/>
-                </a:solidFill>
-                <a:latin typeface="Georgia" pitchFamily="34" charset="0"/>
-                <a:ea typeface="Georgia" pitchFamily="34" charset="-122"/>
-                <a:cs typeface="Georgia" pitchFamily="34" charset="-120"/>
-              </a:rPr>
-              <a:t>What the Structure Does Not Carry</a:t>
-            </a:r>
-            <a:pPr indent="0" marL="0">
-              <a:buNone/>
-            </a:pPr>
-            <a:r>
-              <a:rPr lang="en-US" sz="900" dirty="0">
-                <a:solidFill>
-                  <a:srgbClr val="6E6A62"/>
-                </a:solidFill>
-                <a:latin typeface="Georgia" pitchFamily="34" charset="0"/>
-                <a:ea typeface="Georgia" pitchFamily="34" charset="-122"/>
-                <a:cs typeface="Georgia" pitchFamily="34" charset="-120"/>
-              </a:rPr>
-              <a:t>  ·  PCERT-FS — Custody in the Regulated Institution</a:t>
-            </a:r>
-            <a:endParaRPr lang="en-US" sz="900" dirty="0"/>
-          </a:p>
-        </p:txBody>
-      </p:sp>
-      <p:sp>
-        <p:nvSpPr>
-          <p:cNvPr id="7" name="Text 5"/>
           <p:cNvSpPr/>
           <p:nvPr/>
         </p:nvSpPr>
@@ -14040,6 +15396,272 @@
 
 <file path=ppt/slides/slide30.xml><?xml version="1.0" encoding="utf-8"?>
 <p:sld xmlns:a="http://schemas.openxmlformats.org/drawingml/2006/main" xmlns:r="http://schemas.openxmlformats.org/officeDocument/2006/relationships" xmlns:p="http://schemas.openxmlformats.org/presentationml/2006/main">
+  <p:cSld name="Slide 29">
+    <p:bg>
+      <p:bgPr>
+        <a:solidFill>
+          <a:srgbClr val="1B1A18"/>
+        </a:solidFill>
+      </p:bgPr>
+    </p:bg>
+    <p:spTree>
+      <p:nvGrpSpPr>
+        <p:cNvPr id="1" name=""/>
+        <p:cNvGrpSpPr/>
+        <p:nvPr/>
+      </p:nvGrpSpPr>
+      <p:grpSpPr>
+        <a:xfrm>
+          <a:off x="0" y="0"/>
+          <a:ext cx="0" cy="0"/>
+          <a:chOff x="0" y="0"/>
+          <a:chExt cx="0" cy="0"/>
+        </a:xfrm>
+      </p:grpSpPr>
+      <p:sp>
+        <p:nvSpPr>
+          <p:cNvPr id="2" name="Shape 0"/>
+          <p:cNvSpPr/>
+          <p:nvPr/>
+        </p:nvSpPr>
+        <p:spPr>
+          <a:xfrm>
+            <a:off x="566928" y="2148840"/>
+            <a:ext cx="1554480" cy="310896"/>
+          </a:xfrm>
+          <a:prstGeom prst="roundRect">
+            <a:avLst>
+              <a:gd name="adj" fmla="val 47059"/>
+            </a:avLst>
+          </a:prstGeom>
+          <a:solidFill>
+            <a:srgbClr val="8A8378"/>
+          </a:solidFill>
+          <a:ln/>
+        </p:spPr>
+      </p:sp>
+      <p:sp>
+        <p:nvSpPr>
+          <p:cNvPr id="3" name="Text 1"/>
+          <p:cNvSpPr/>
+          <p:nvPr/>
+        </p:nvSpPr>
+        <p:spPr>
+          <a:xfrm>
+            <a:off x="566928" y="2148840"/>
+            <a:ext cx="1554480" cy="310896"/>
+          </a:xfrm>
+          <a:prstGeom prst="rect">
+            <a:avLst/>
+          </a:prstGeom>
+          <a:noFill/>
+          <a:ln/>
+        </p:spPr>
+        <p:txBody>
+          <a:bodyPr wrap="square" rtlCol="0" anchor="ctr"/>
+          <a:lstStyle/>
+          <a:p>
+            <a:pPr algn="ctr" indent="0" marL="0">
+              <a:buNone/>
+            </a:pPr>
+            <a:r>
+              <a:rPr lang="en-US" sz="1050" b="1" spc="60" kern="0" dirty="0">
+                <a:solidFill>
+                  <a:srgbClr val="1B1A18"/>
+                </a:solidFill>
+                <a:latin typeface="Georgia" pitchFamily="34" charset="0"/>
+                <a:ea typeface="Georgia" pitchFamily="34" charset="-122"/>
+                <a:cs typeface="Georgia" pitchFamily="34" charset="-120"/>
+              </a:rPr>
+              <a:t>MODULE 6</a:t>
+            </a:r>
+            <a:endParaRPr lang="en-US" sz="1050" dirty="0"/>
+          </a:p>
+        </p:txBody>
+      </p:sp>
+      <p:sp>
+        <p:nvSpPr>
+          <p:cNvPr id="4" name="Text 2"/>
+          <p:cNvSpPr/>
+          <p:nvPr/>
+        </p:nvSpPr>
+        <p:spPr>
+          <a:xfrm>
+            <a:off x="566928" y="2606040"/>
+            <a:ext cx="10515600" cy="1005840"/>
+          </a:xfrm>
+          <a:prstGeom prst="rect">
+            <a:avLst/>
+          </a:prstGeom>
+          <a:noFill/>
+          <a:ln/>
+        </p:spPr>
+        <p:txBody>
+          <a:bodyPr wrap="square" rtlCol="0" anchor="ctr"/>
+          <a:lstStyle/>
+          <a:p>
+            <a:pPr indent="0" marL="0">
+              <a:buNone/>
+            </a:pPr>
+            <a:r>
+              <a:rPr lang="en-US" sz="3550" b="1" dirty="0">
+                <a:solidFill>
+                  <a:srgbClr val="FFFFFF"/>
+                </a:solidFill>
+                <a:latin typeface="Georgia" pitchFamily="34" charset="0"/>
+                <a:ea typeface="Georgia" pitchFamily="34" charset="-122"/>
+                <a:cs typeface="Georgia" pitchFamily="34" charset="-120"/>
+              </a:rPr>
+              <a:t>The Protocol, the Rules, and the Capstone</a:t>
+            </a:r>
+            <a:endParaRPr lang="en-US" sz="3550" dirty="0"/>
+          </a:p>
+        </p:txBody>
+      </p:sp>
+      <p:sp>
+        <p:nvSpPr>
+          <p:cNvPr id="5" name="Text 3"/>
+          <p:cNvSpPr/>
+          <p:nvPr/>
+        </p:nvSpPr>
+        <p:spPr>
+          <a:xfrm>
+            <a:off x="566928" y="3657600"/>
+            <a:ext cx="9875520" cy="1097280"/>
+          </a:xfrm>
+          <a:prstGeom prst="rect">
+            <a:avLst/>
+          </a:prstGeom>
+          <a:noFill/>
+          <a:ln/>
+        </p:spPr>
+        <p:txBody>
+          <a:bodyPr wrap="square" rtlCol="0" anchor="ctr"/>
+          <a:lstStyle/>
+          <a:p>
+            <a:pPr indent="0" marL="0">
+              <a:lnSpc>
+                <a:spcPts val="2400"/>
+              </a:lnSpc>
+              <a:buNone/>
+            </a:pPr>
+            <a:r>
+              <a:rPr lang="en-US" sz="1500" dirty="0">
+                <a:solidFill>
+                  <a:srgbClr val="E4DFD5"/>
+                </a:solidFill>
+                <a:latin typeface="Georgia" pitchFamily="34" charset="0"/>
+                <a:ea typeface="Georgia" pitchFamily="34" charset="-122"/>
+                <a:cs typeface="Georgia" pitchFamily="34" charset="-120"/>
+              </a:rPr>
+              <a:t>Nine assessments, six rules, and one assessment written in your own language. Chapters 22 and 23.</a:t>
+            </a:r>
+            <a:endParaRPr lang="en-US" sz="1500" dirty="0"/>
+          </a:p>
+        </p:txBody>
+      </p:sp>
+      <p:sp>
+        <p:nvSpPr>
+          <p:cNvPr id="6" name="Text 4"/>
+          <p:cNvSpPr/>
+          <p:nvPr/>
+        </p:nvSpPr>
+        <p:spPr>
+          <a:xfrm>
+            <a:off x="566928" y="6473952"/>
+            <a:ext cx="9957816" cy="274320"/>
+          </a:xfrm>
+          <a:prstGeom prst="rect">
+            <a:avLst/>
+          </a:prstGeom>
+          <a:noFill/>
+          <a:ln/>
+        </p:spPr>
+        <p:txBody>
+          <a:bodyPr wrap="square" rtlCol="0" anchor="ctr"/>
+          <a:lstStyle/>
+          <a:p>
+            <a:pPr indent="0" marL="0">
+              <a:buNone/>
+            </a:pPr>
+            <a:r>
+              <a:rPr lang="en-US" sz="900" i="1" dirty="0">
+                <a:solidFill>
+                  <a:srgbClr val="6E6A62"/>
+                </a:solidFill>
+                <a:latin typeface="Georgia" pitchFamily="34" charset="0"/>
+                <a:ea typeface="Georgia" pitchFamily="34" charset="-122"/>
+                <a:cs typeface="Georgia" pitchFamily="34" charset="-120"/>
+              </a:rPr>
+              <a:t>What the Structure Does Not Carry</a:t>
+            </a:r>
+            <a:pPr indent="0" marL="0">
+              <a:buNone/>
+            </a:pPr>
+            <a:r>
+              <a:rPr lang="en-US" sz="900" dirty="0">
+                <a:solidFill>
+                  <a:srgbClr val="6E6A62"/>
+                </a:solidFill>
+                <a:latin typeface="Georgia" pitchFamily="34" charset="0"/>
+                <a:ea typeface="Georgia" pitchFamily="34" charset="-122"/>
+                <a:cs typeface="Georgia" pitchFamily="34" charset="-120"/>
+              </a:rPr>
+              <a:t>  ·  PCERT-FS — Custody in the Regulated Institution</a:t>
+            </a:r>
+            <a:endParaRPr lang="en-US" sz="900" dirty="0"/>
+          </a:p>
+        </p:txBody>
+      </p:sp>
+      <p:sp>
+        <p:nvSpPr>
+          <p:cNvPr id="7" name="Text 5"/>
+          <p:cNvSpPr/>
+          <p:nvPr/>
+        </p:nvSpPr>
+        <p:spPr>
+          <a:xfrm>
+            <a:off x="10707624" y="6473952"/>
+            <a:ext cx="914400" cy="274320"/>
+          </a:xfrm>
+          <a:prstGeom prst="rect">
+            <a:avLst/>
+          </a:prstGeom>
+          <a:noFill/>
+          <a:ln/>
+        </p:spPr>
+        <p:txBody>
+          <a:bodyPr wrap="square" rtlCol="0" anchor="ctr"/>
+          <a:lstStyle/>
+          <a:p>
+            <a:pPr algn="r" indent="0" marL="0">
+              <a:buNone/>
+            </a:pPr>
+            <a:r>
+              <a:rPr lang="en-US" sz="900" dirty="0">
+                <a:solidFill>
+                  <a:srgbClr val="6E6A62"/>
+                </a:solidFill>
+                <a:latin typeface="Georgia" pitchFamily="34" charset="0"/>
+                <a:ea typeface="Georgia" pitchFamily="34" charset="-122"/>
+                <a:cs typeface="Georgia" pitchFamily="34" charset="-120"/>
+              </a:rPr>
+              <a:t>30</a:t>
+            </a:r>
+            <a:endParaRPr lang="en-US" sz="900" dirty="0"/>
+          </a:p>
+        </p:txBody>
+      </p:sp>
+    </p:spTree>
+  </p:cSld>
+  <p:clrMapOvr>
+    <a:masterClrMapping/>
+  </p:clrMapOvr>
+</p:sld>
+</file>
+
+<file path=ppt/slides/slide31.xml><?xml version="1.0" encoding="utf-8"?>
+<p:sld xmlns:a="http://schemas.openxmlformats.org/drawingml/2006/main" xmlns:r="http://schemas.openxmlformats.org/officeDocument/2006/relationships" xmlns:p="http://schemas.openxmlformats.org/presentationml/2006/main">
   <p:cSld name="Slide 30">
     <p:bg>
       <p:bgPr>
@@ -14319,7 +15941,7 @@
                 <a:ea typeface="Georgia" pitchFamily="34" charset="-122"/>
                 <a:cs typeface="Georgia" pitchFamily="34" charset="-120"/>
               </a:rPr>
-              <a:t>30</a:t>
+              <a:t>31</a:t>
             </a:r>
             <a:endParaRPr lang="en-US" sz="900" dirty="0"/>
           </a:p>
@@ -14333,7 +15955,7 @@
 </p:sld>
 </file>
 
-<file path=ppt/slides/slide31.xml><?xml version="1.0" encoding="utf-8"?>
+<file path=ppt/slides/slide32.xml><?xml version="1.0" encoding="utf-8"?>
 <p:sld xmlns:a="http://schemas.openxmlformats.org/drawingml/2006/main" xmlns:r="http://schemas.openxmlformats.org/officeDocument/2006/relationships" xmlns:p="http://schemas.openxmlformats.org/presentationml/2006/main">
   <p:cSld name="Slide 31">
     <p:bg>
@@ -16728,7 +18350,7 @@
                 <a:ea typeface="Georgia" pitchFamily="34" charset="-122"/>
                 <a:cs typeface="Georgia" pitchFamily="34" charset="-120"/>
               </a:rPr>
-              <a:t>31</a:t>
+              <a:t>32</a:t>
             </a:r>
             <a:endParaRPr lang="en-US" sz="900" dirty="0"/>
           </a:p>
@@ -16742,7 +18364,7 @@
 </p:sld>
 </file>
 
-<file path=ppt/slides/slide32.xml><?xml version="1.0" encoding="utf-8"?>
+<file path=ppt/slides/slide33.xml><?xml version="1.0" encoding="utf-8"?>
 <p:sld xmlns:a="http://schemas.openxmlformats.org/drawingml/2006/main" xmlns:r="http://schemas.openxmlformats.org/officeDocument/2006/relationships" xmlns:p="http://schemas.openxmlformats.org/presentationml/2006/main">
   <p:cSld name="Slide 32">
     <p:bg>
@@ -17402,7 +19024,7 @@
                 <a:ea typeface="Georgia" pitchFamily="34" charset="-122"/>
                 <a:cs typeface="Georgia" pitchFamily="34" charset="-120"/>
               </a:rPr>
-              <a:t>32</a:t>
+              <a:t>33</a:t>
             </a:r>
             <a:endParaRPr lang="en-US" sz="900" dirty="0"/>
           </a:p>
@@ -17416,7 +19038,7 @@
 </p:sld>
 </file>
 
-<file path=ppt/slides/slide33.xml><?xml version="1.0" encoding="utf-8"?>
+<file path=ppt/slides/slide34.xml><?xml version="1.0" encoding="utf-8"?>
 <p:sld xmlns:a="http://schemas.openxmlformats.org/drawingml/2006/main" xmlns:r="http://schemas.openxmlformats.org/officeDocument/2006/relationships" xmlns:p="http://schemas.openxmlformats.org/presentationml/2006/main">
   <p:cSld name="Slide 33">
     <p:bg>
@@ -17967,7 +19589,7 @@
                 <a:ea typeface="Georgia" pitchFamily="34" charset="-122"/>
                 <a:cs typeface="Georgia" pitchFamily="34" charset="-120"/>
               </a:rPr>
-              <a:t>33</a:t>
+              <a:t>34</a:t>
             </a:r>
             <a:endParaRPr lang="en-US" sz="900" dirty="0"/>
           </a:p>
@@ -17981,7 +19603,7 @@
 </p:sld>
 </file>
 
-<file path=ppt/slides/slide34.xml><?xml version="1.0" encoding="utf-8"?>
+<file path=ppt/slides/slide35.xml><?xml version="1.0" encoding="utf-8"?>
 <p:sld xmlns:a="http://schemas.openxmlformats.org/drawingml/2006/main" xmlns:r="http://schemas.openxmlformats.org/officeDocument/2006/relationships" xmlns:p="http://schemas.openxmlformats.org/presentationml/2006/main">
   <p:cSld name="Slide 34">
     <p:bg>
@@ -18262,7 +19884,7 @@
                 <a:ea typeface="Georgia" pitchFamily="34" charset="-122"/>
                 <a:cs typeface="Georgia" pitchFamily="34" charset="-120"/>
               </a:rPr>
-              <a:t>34</a:t>
+              <a:t>35</a:t>
             </a:r>
             <a:endParaRPr lang="en-US" sz="900" dirty="0"/>
           </a:p>
@@ -18276,7 +19898,7 @@
 </p:sld>
 </file>
 
-<file path=ppt/slides/slide35.xml><?xml version="1.0" encoding="utf-8"?>
+<file path=ppt/slides/slide36.xml><?xml version="1.0" encoding="utf-8"?>
 <p:sld xmlns:a="http://schemas.openxmlformats.org/drawingml/2006/main" xmlns:r="http://schemas.openxmlformats.org/officeDocument/2006/relationships" xmlns:p="http://schemas.openxmlformats.org/presentationml/2006/main">
   <p:cSld name="Slide 35">
     <p:bg>
@@ -18559,7 +20181,7 @@
                 <a:ea typeface="Georgia" pitchFamily="34" charset="-122"/>
                 <a:cs typeface="Georgia" pitchFamily="34" charset="-120"/>
               </a:rPr>
-              <a:t>35</a:t>
+              <a:t>36</a:t>
             </a:r>
             <a:endParaRPr lang="en-US" sz="900" dirty="0"/>
           </a:p>
@@ -18574,6 +20196,680 @@
 </file>
 
 <file path=ppt/slides/slide4.xml><?xml version="1.0" encoding="utf-8"?>
+<p:sld xmlns:a="http://schemas.openxmlformats.org/drawingml/2006/main" xmlns:r="http://schemas.openxmlformats.org/officeDocument/2006/relationships" xmlns:p="http://schemas.openxmlformats.org/presentationml/2006/main">
+  <p:cSld name="Slide 5">
+    <p:bg>
+      <p:bgPr>
+        <a:solidFill>
+          <a:srgbClr val="FFFFFF"/>
+        </a:solidFill>
+      </p:bgPr>
+    </p:bg>
+    <p:spTree>
+      <p:nvGrpSpPr>
+        <p:cNvPr id="1" name=""/>
+        <p:cNvGrpSpPr/>
+        <p:nvPr/>
+      </p:nvGrpSpPr>
+      <p:grpSpPr>
+        <a:xfrm>
+          <a:off x="0" y="0"/>
+          <a:ext cx="0" cy="0"/>
+          <a:chOff x="0" y="0"/>
+          <a:chExt cx="0" cy="0"/>
+        </a:xfrm>
+      </p:grpSpPr>
+      <p:sp>
+        <p:nvSpPr>
+          <p:cNvPr id="2" name="Text 0"/>
+          <p:cNvSpPr/>
+          <p:nvPr/>
+        </p:nvSpPr>
+        <p:spPr>
+          <a:xfrm>
+            <a:off x="566928" y="457200"/>
+            <a:ext cx="11055096" cy="292608"/>
+          </a:xfrm>
+          <a:prstGeom prst="rect">
+            <a:avLst/>
+          </a:prstGeom>
+          <a:noFill/>
+          <a:ln/>
+        </p:spPr>
+        <p:txBody>
+          <a:bodyPr wrap="square" rtlCol="0" anchor="ctr"/>
+          <a:lstStyle/>
+          <a:p>
+            <a:pPr indent="0" marL="0">
+              <a:buNone/>
+            </a:pPr>
+            <a:r>
+              <a:rPr lang="en-US" sz="1050" b="1" spc="120" kern="0" dirty="0">
+                <a:solidFill>
+                  <a:srgbClr val="8A8378"/>
+                </a:solidFill>
+                <a:latin typeface="Georgia" pitchFamily="34" charset="0"/>
+                <a:ea typeface="Georgia" pitchFamily="34" charset="-122"/>
+                <a:cs typeface="Georgia" pitchFamily="34" charset="-120"/>
+              </a:rPr>
+              <a:t>WHO WAS KEEPING THE PROPERTIES</a:t>
+            </a:r>
+            <a:endParaRPr lang="en-US" sz="1050" dirty="0"/>
+          </a:p>
+        </p:txBody>
+      </p:sp>
+      <p:sp>
+        <p:nvSpPr>
+          <p:cNvPr id="3" name="Text 1"/>
+          <p:cNvSpPr/>
+          <p:nvPr/>
+        </p:nvSpPr>
+        <p:spPr>
+          <a:xfrm>
+            <a:off x="566928" y="749808"/>
+            <a:ext cx="11055096" cy="822960"/>
+          </a:xfrm>
+          <a:prstGeom prst="rect">
+            <a:avLst/>
+          </a:prstGeom>
+          <a:noFill/>
+          <a:ln/>
+        </p:spPr>
+        <p:txBody>
+          <a:bodyPr wrap="square" rtlCol="0" anchor="t"/>
+          <a:lstStyle/>
+          <a:p>
+            <a:pPr indent="0" marL="0">
+              <a:buNone/>
+            </a:pPr>
+            <a:r>
+              <a:rPr lang="en-US" sz="2550" b="1" dirty="0">
+                <a:solidFill>
+                  <a:srgbClr val="1B1A18"/>
+                </a:solidFill>
+                <a:latin typeface="Georgia" pitchFamily="34" charset="0"/>
+                <a:ea typeface="Georgia" pitchFamily="34" charset="-122"/>
+                <a:cs typeface="Georgia" pitchFamily="34" charset="-120"/>
+              </a:rPr>
+              <a:t>The controls assumed a layer of people</a:t>
+            </a:r>
+            <a:endParaRPr lang="en-US" sz="2550" dirty="0"/>
+          </a:p>
+        </p:txBody>
+      </p:sp>
+      <p:sp>
+        <p:nvSpPr>
+          <p:cNvPr id="4" name="Shape 2"/>
+          <p:cNvSpPr/>
+          <p:nvPr/>
+        </p:nvSpPr>
+        <p:spPr>
+          <a:xfrm>
+            <a:off x="566928" y="1691640"/>
+            <a:ext cx="457200" cy="457200"/>
+          </a:xfrm>
+          <a:prstGeom prst="ellipse">
+            <a:avLst/>
+          </a:prstGeom>
+          <a:solidFill>
+            <a:srgbClr val="1B1A18"/>
+          </a:solidFill>
+          <a:ln/>
+        </p:spPr>
+      </p:sp>
+      <p:sp>
+        <p:nvSpPr>
+          <p:cNvPr id="5" name="Text 3"/>
+          <p:cNvSpPr/>
+          <p:nvPr/>
+        </p:nvSpPr>
+        <p:spPr>
+          <a:xfrm>
+            <a:off x="566928" y="1691640"/>
+            <a:ext cx="457200" cy="457200"/>
+          </a:xfrm>
+          <a:prstGeom prst="rect">
+            <a:avLst/>
+          </a:prstGeom>
+          <a:noFill/>
+          <a:ln/>
+        </p:spPr>
+        <p:txBody>
+          <a:bodyPr wrap="square" rtlCol="0" anchor="ctr"/>
+          <a:lstStyle/>
+          <a:p>
+            <a:pPr algn="ctr" indent="0" marL="0">
+              <a:buNone/>
+            </a:pPr>
+            <a:r>
+              <a:rPr lang="en-US" sz="1400" b="1" dirty="0">
+                <a:solidFill>
+                  <a:srgbClr val="FFFFFF"/>
+                </a:solidFill>
+                <a:latin typeface="Georgia" pitchFamily="34" charset="0"/>
+                <a:ea typeface="Georgia" pitchFamily="34" charset="-122"/>
+                <a:cs typeface="Georgia" pitchFamily="34" charset="-120"/>
+              </a:rPr>
+              <a:t>1</a:t>
+            </a:r>
+            <a:endParaRPr lang="en-US" sz="1400" dirty="0"/>
+          </a:p>
+        </p:txBody>
+      </p:sp>
+      <p:sp>
+        <p:nvSpPr>
+          <p:cNvPr id="6" name="Text 4"/>
+          <p:cNvSpPr/>
+          <p:nvPr/>
+        </p:nvSpPr>
+        <p:spPr>
+          <a:xfrm>
+            <a:off x="1234440" y="1636776"/>
+            <a:ext cx="10277856" cy="1024128"/>
+          </a:xfrm>
+          <a:prstGeom prst="rect">
+            <a:avLst/>
+          </a:prstGeom>
+          <a:noFill/>
+          <a:ln/>
+        </p:spPr>
+        <p:txBody>
+          <a:bodyPr wrap="square" rtlCol="0" anchor="t"/>
+          <a:lstStyle/>
+          <a:p>
+            <a:pPr indent="0" marL="0">
+              <a:lnSpc>
+                <a:spcPts val="2200"/>
+              </a:lnSpc>
+              <a:buNone/>
+            </a:pPr>
+            <a:r>
+              <a:rPr lang="en-US" sz="1500" b="1" dirty="0">
+                <a:solidFill>
+                  <a:srgbClr val="33302B"/>
+                </a:solidFill>
+                <a:latin typeface="Georgia" pitchFamily="34" charset="0"/>
+                <a:ea typeface="Georgia" pitchFamily="34" charset="-122"/>
+                <a:cs typeface="Georgia" pitchFamily="34" charset="-120"/>
+              </a:rPr>
+              <a:t>Your controls were specified for people.   </a:t>
+            </a:r>
+            <a:pPr indent="0" marL="0">
+              <a:lnSpc>
+                <a:spcPts val="2200"/>
+              </a:lnSpc>
+              <a:buNone/>
+            </a:pPr>
+            <a:r>
+              <a:rPr lang="en-US" sz="1500" dirty="0">
+                <a:solidFill>
+                  <a:srgbClr val="6E6A62"/>
+                </a:solidFill>
+                <a:latin typeface="Georgia" pitchFamily="34" charset="0"/>
+                <a:ea typeface="Georgia" pitchFamily="34" charset="-122"/>
+                <a:cs typeface="Georgia" pitchFamily="34" charset="-120"/>
+              </a:rPr>
+              <a:t>Segregation of duties, four eyes, reconciliation — each assumed a person who understood what a figure meant, who could approve it, and who remembered why the limit was set.</a:t>
+            </a:r>
+            <a:endParaRPr lang="en-US" sz="1500" dirty="0"/>
+          </a:p>
+        </p:txBody>
+      </p:sp>
+      <p:sp>
+        <p:nvSpPr>
+          <p:cNvPr id="7" name="Shape 5"/>
+          <p:cNvSpPr/>
+          <p:nvPr/>
+        </p:nvSpPr>
+        <p:spPr>
+          <a:xfrm>
+            <a:off x="566928" y="2857500"/>
+            <a:ext cx="457200" cy="457200"/>
+          </a:xfrm>
+          <a:prstGeom prst="ellipse">
+            <a:avLst/>
+          </a:prstGeom>
+          <a:solidFill>
+            <a:srgbClr val="1B1A18"/>
+          </a:solidFill>
+          <a:ln/>
+        </p:spPr>
+      </p:sp>
+      <p:sp>
+        <p:nvSpPr>
+          <p:cNvPr id="8" name="Text 6"/>
+          <p:cNvSpPr/>
+          <p:nvPr/>
+        </p:nvSpPr>
+        <p:spPr>
+          <a:xfrm>
+            <a:off x="566928" y="2857500"/>
+            <a:ext cx="457200" cy="457200"/>
+          </a:xfrm>
+          <a:prstGeom prst="rect">
+            <a:avLst/>
+          </a:prstGeom>
+          <a:noFill/>
+          <a:ln/>
+        </p:spPr>
+        <p:txBody>
+          <a:bodyPr wrap="square" rtlCol="0" anchor="ctr"/>
+          <a:lstStyle/>
+          <a:p>
+            <a:pPr algn="ctr" indent="0" marL="0">
+              <a:buNone/>
+            </a:pPr>
+            <a:r>
+              <a:rPr lang="en-US" sz="1400" b="1" dirty="0">
+                <a:solidFill>
+                  <a:srgbClr val="FFFFFF"/>
+                </a:solidFill>
+                <a:latin typeface="Georgia" pitchFamily="34" charset="0"/>
+                <a:ea typeface="Georgia" pitchFamily="34" charset="-122"/>
+                <a:cs typeface="Georgia" pitchFamily="34" charset="-120"/>
+              </a:rPr>
+              <a:t>2</a:t>
+            </a:r>
+            <a:endParaRPr lang="en-US" sz="1400" dirty="0"/>
+          </a:p>
+        </p:txBody>
+      </p:sp>
+      <p:sp>
+        <p:nvSpPr>
+          <p:cNvPr id="9" name="Text 7"/>
+          <p:cNvSpPr/>
+          <p:nvPr/>
+        </p:nvSpPr>
+        <p:spPr>
+          <a:xfrm>
+            <a:off x="1234440" y="2802636"/>
+            <a:ext cx="10277856" cy="1024128"/>
+          </a:xfrm>
+          <a:prstGeom prst="rect">
+            <a:avLst/>
+          </a:prstGeom>
+          <a:noFill/>
+          <a:ln/>
+        </p:spPr>
+        <p:txBody>
+          <a:bodyPr wrap="square" rtlCol="0" anchor="t"/>
+          <a:lstStyle/>
+          <a:p>
+            <a:pPr indent="0" marL="0">
+              <a:lnSpc>
+                <a:spcPts val="2200"/>
+              </a:lnSpc>
+              <a:buNone/>
+            </a:pPr>
+            <a:r>
+              <a:rPr lang="en-US" sz="1500" b="1" dirty="0">
+                <a:solidFill>
+                  <a:srgbClr val="33302B"/>
+                </a:solidFill>
+                <a:latin typeface="Georgia" pitchFamily="34" charset="0"/>
+                <a:ea typeface="Georgia" pitchFamily="34" charset="-122"/>
+                <a:cs typeface="Georgia" pitchFamily="34" charset="-120"/>
+              </a:rPr>
+              <a:t>That layer was invisible because it was salaried.   </a:t>
+            </a:r>
+            <a:pPr indent="0" marL="0">
+              <a:lnSpc>
+                <a:spcPts val="2200"/>
+              </a:lnSpc>
+              <a:buNone/>
+            </a:pPr>
+            <a:r>
+              <a:rPr lang="en-US" sz="1500" dirty="0">
+                <a:solidFill>
+                  <a:srgbClr val="6E6A62"/>
+                </a:solidFill>
+                <a:latin typeface="Georgia" pitchFamily="34" charset="0"/>
+                <a:ea typeface="Georgia" pitchFamily="34" charset="-122"/>
+                <a:cs typeface="Georgia" pitchFamily="34" charset="-120"/>
+              </a:rPr>
+              <a:t>Analysts reconciled, controllers interpreted, risk staff knew which number to trust — effort that never appeared as a control in any framework, because it was the staff doing their jobs.</a:t>
+            </a:r>
+            <a:endParaRPr lang="en-US" sz="1500" dirty="0"/>
+          </a:p>
+        </p:txBody>
+      </p:sp>
+      <p:sp>
+        <p:nvSpPr>
+          <p:cNvPr id="10" name="Shape 8"/>
+          <p:cNvSpPr/>
+          <p:nvPr/>
+        </p:nvSpPr>
+        <p:spPr>
+          <a:xfrm>
+            <a:off x="566928" y="4023360"/>
+            <a:ext cx="457200" cy="457200"/>
+          </a:xfrm>
+          <a:prstGeom prst="ellipse">
+            <a:avLst/>
+          </a:prstGeom>
+          <a:solidFill>
+            <a:srgbClr val="1B1A18"/>
+          </a:solidFill>
+          <a:ln/>
+        </p:spPr>
+      </p:sp>
+      <p:sp>
+        <p:nvSpPr>
+          <p:cNvPr id="11" name="Text 9"/>
+          <p:cNvSpPr/>
+          <p:nvPr/>
+        </p:nvSpPr>
+        <p:spPr>
+          <a:xfrm>
+            <a:off x="566928" y="4023360"/>
+            <a:ext cx="457200" cy="457200"/>
+          </a:xfrm>
+          <a:prstGeom prst="rect">
+            <a:avLst/>
+          </a:prstGeom>
+          <a:noFill/>
+          <a:ln/>
+        </p:spPr>
+        <p:txBody>
+          <a:bodyPr wrap="square" rtlCol="0" anchor="ctr"/>
+          <a:lstStyle/>
+          <a:p>
+            <a:pPr algn="ctr" indent="0" marL="0">
+              <a:buNone/>
+            </a:pPr>
+            <a:r>
+              <a:rPr lang="en-US" sz="1400" b="1" dirty="0">
+                <a:solidFill>
+                  <a:srgbClr val="FFFFFF"/>
+                </a:solidFill>
+                <a:latin typeface="Georgia" pitchFamily="34" charset="0"/>
+                <a:ea typeface="Georgia" pitchFamily="34" charset="-122"/>
+                <a:cs typeface="Georgia" pitchFamily="34" charset="-120"/>
+              </a:rPr>
+              <a:t>3</a:t>
+            </a:r>
+            <a:endParaRPr lang="en-US" sz="1400" dirty="0"/>
+          </a:p>
+        </p:txBody>
+      </p:sp>
+      <p:sp>
+        <p:nvSpPr>
+          <p:cNvPr id="12" name="Text 10"/>
+          <p:cNvSpPr/>
+          <p:nvPr/>
+        </p:nvSpPr>
+        <p:spPr>
+          <a:xfrm>
+            <a:off x="1234440" y="3968496"/>
+            <a:ext cx="10277856" cy="1024128"/>
+          </a:xfrm>
+          <a:prstGeom prst="rect">
+            <a:avLst/>
+          </a:prstGeom>
+          <a:noFill/>
+          <a:ln/>
+        </p:spPr>
+        <p:txBody>
+          <a:bodyPr wrap="square" rtlCol="0" anchor="t"/>
+          <a:lstStyle/>
+          <a:p>
+            <a:pPr indent="0" marL="0">
+              <a:lnSpc>
+                <a:spcPts val="2200"/>
+              </a:lnSpc>
+              <a:buNone/>
+            </a:pPr>
+            <a:r>
+              <a:rPr lang="en-US" sz="1500" b="1" dirty="0">
+                <a:solidFill>
+                  <a:srgbClr val="33302B"/>
+                </a:solidFill>
+                <a:latin typeface="Georgia" pitchFamily="34" charset="0"/>
+                <a:ea typeface="Georgia" pitchFamily="34" charset="-122"/>
+                <a:cs typeface="Georgia" pitchFamily="34" charset="-120"/>
+              </a:rPr>
+              <a:t>Agentic deployment removes it from the boundary.   </a:t>
+            </a:r>
+            <a:pPr indent="0" marL="0">
+              <a:lnSpc>
+                <a:spcPts val="2200"/>
+              </a:lnSpc>
+              <a:buNone/>
+            </a:pPr>
+            <a:r>
+              <a:rPr lang="en-US" sz="1500" dirty="0">
+                <a:solidFill>
+                  <a:srgbClr val="6E6A62"/>
+                </a:solidFill>
+                <a:latin typeface="Georgia" pitchFamily="34" charset="0"/>
+                <a:ea typeface="Georgia" pitchFamily="34" charset="-122"/>
+                <a:cs typeface="Georgia" pitchFamily="34" charset="-120"/>
+              </a:rPr>
+              <a:t>Automate the step and the person leaves with what they carried. Five of the six properties your instruments already require were being held, in part, by that person.</a:t>
+            </a:r>
+            <a:endParaRPr lang="en-US" sz="1500" dirty="0"/>
+          </a:p>
+        </p:txBody>
+      </p:sp>
+      <p:sp>
+        <p:nvSpPr>
+          <p:cNvPr id="13" name="Shape 11"/>
+          <p:cNvSpPr/>
+          <p:nvPr/>
+        </p:nvSpPr>
+        <p:spPr>
+          <a:xfrm>
+            <a:off x="566928" y="5189220"/>
+            <a:ext cx="457200" cy="457200"/>
+          </a:xfrm>
+          <a:prstGeom prst="ellipse">
+            <a:avLst/>
+          </a:prstGeom>
+          <a:solidFill>
+            <a:srgbClr val="1B1A18"/>
+          </a:solidFill>
+          <a:ln/>
+        </p:spPr>
+      </p:sp>
+      <p:sp>
+        <p:nvSpPr>
+          <p:cNvPr id="14" name="Text 12"/>
+          <p:cNvSpPr/>
+          <p:nvPr/>
+        </p:nvSpPr>
+        <p:spPr>
+          <a:xfrm>
+            <a:off x="566928" y="5189220"/>
+            <a:ext cx="457200" cy="457200"/>
+          </a:xfrm>
+          <a:prstGeom prst="rect">
+            <a:avLst/>
+          </a:prstGeom>
+          <a:noFill/>
+          <a:ln/>
+        </p:spPr>
+        <p:txBody>
+          <a:bodyPr wrap="square" rtlCol="0" anchor="ctr"/>
+          <a:lstStyle/>
+          <a:p>
+            <a:pPr algn="ctr" indent="0" marL="0">
+              <a:buNone/>
+            </a:pPr>
+            <a:r>
+              <a:rPr lang="en-US" sz="1400" b="1" dirty="0">
+                <a:solidFill>
+                  <a:srgbClr val="FFFFFF"/>
+                </a:solidFill>
+                <a:latin typeface="Georgia" pitchFamily="34" charset="0"/>
+                <a:ea typeface="Georgia" pitchFamily="34" charset="-122"/>
+                <a:cs typeface="Georgia" pitchFamily="34" charset="-120"/>
+              </a:rPr>
+              <a:t>4</a:t>
+            </a:r>
+            <a:endParaRPr lang="en-US" sz="1400" dirty="0"/>
+          </a:p>
+        </p:txBody>
+      </p:sp>
+      <p:sp>
+        <p:nvSpPr>
+          <p:cNvPr id="15" name="Text 13"/>
+          <p:cNvSpPr/>
+          <p:nvPr/>
+        </p:nvSpPr>
+        <p:spPr>
+          <a:xfrm>
+            <a:off x="1234440" y="5134356"/>
+            <a:ext cx="10277856" cy="1024128"/>
+          </a:xfrm>
+          <a:prstGeom prst="rect">
+            <a:avLst/>
+          </a:prstGeom>
+          <a:noFill/>
+          <a:ln/>
+        </p:spPr>
+        <p:txBody>
+          <a:bodyPr wrap="square" rtlCol="0" anchor="t"/>
+          <a:lstStyle/>
+          <a:p>
+            <a:pPr indent="0" marL="0">
+              <a:lnSpc>
+                <a:spcPts val="2200"/>
+              </a:lnSpc>
+              <a:buNone/>
+            </a:pPr>
+            <a:r>
+              <a:rPr lang="en-US" sz="1500" b="1" dirty="0">
+                <a:solidFill>
+                  <a:srgbClr val="33302B"/>
+                </a:solidFill>
+                <a:latin typeface="Georgia" pitchFamily="34" charset="0"/>
+                <a:ea typeface="Georgia" pitchFamily="34" charset="-122"/>
+                <a:cs typeface="Georgia" pitchFamily="34" charset="-120"/>
+              </a:rPr>
+              <a:t>The gap you never closed becomes visible.   </a:t>
+            </a:r>
+            <a:pPr indent="0" marL="0">
+              <a:lnSpc>
+                <a:spcPts val="2200"/>
+              </a:lnSpc>
+              <a:buNone/>
+            </a:pPr>
+            <a:r>
+              <a:rPr lang="en-US" sz="1500" dirty="0">
+                <a:solidFill>
+                  <a:srgbClr val="6E6A62"/>
+                </a:solidFill>
+                <a:latin typeface="Georgia" pitchFamily="34" charset="0"/>
+                <a:ea typeface="Georgia" pitchFamily="34" charset="-122"/>
+                <a:cs typeface="Georgia" pitchFamily="34" charset="-120"/>
+              </a:rPr>
+              <a:t>What the structure did not carry, people carried — until now. Finding those unowned properties, in your own institution, is the work of this course.</a:t>
+            </a:r>
+            <a:endParaRPr lang="en-US" sz="1500" dirty="0"/>
+          </a:p>
+        </p:txBody>
+      </p:sp>
+      <p:sp>
+        <p:nvSpPr>
+          <p:cNvPr id="16" name="Text 14"/>
+          <p:cNvSpPr/>
+          <p:nvPr/>
+        </p:nvSpPr>
+        <p:spPr>
+          <a:xfrm>
+            <a:off x="566928" y="6473952"/>
+            <a:ext cx="9957816" cy="274320"/>
+          </a:xfrm>
+          <a:prstGeom prst="rect">
+            <a:avLst/>
+          </a:prstGeom>
+          <a:noFill/>
+          <a:ln/>
+        </p:spPr>
+        <p:txBody>
+          <a:bodyPr wrap="square" rtlCol="0" anchor="ctr"/>
+          <a:lstStyle/>
+          <a:p>
+            <a:pPr indent="0" marL="0">
+              <a:buNone/>
+            </a:pPr>
+            <a:r>
+              <a:rPr lang="en-US" sz="900" i="1" dirty="0">
+                <a:solidFill>
+                  <a:srgbClr val="6E6A62"/>
+                </a:solidFill>
+                <a:latin typeface="Georgia" pitchFamily="34" charset="0"/>
+                <a:ea typeface="Georgia" pitchFamily="34" charset="-122"/>
+                <a:cs typeface="Georgia" pitchFamily="34" charset="-120"/>
+              </a:rPr>
+              <a:t>What the Structure Does Not Carry</a:t>
+            </a:r>
+            <a:pPr indent="0" marL="0">
+              <a:buNone/>
+            </a:pPr>
+            <a:r>
+              <a:rPr lang="en-US" sz="900" dirty="0">
+                <a:solidFill>
+                  <a:srgbClr val="6E6A62"/>
+                </a:solidFill>
+                <a:latin typeface="Georgia" pitchFamily="34" charset="0"/>
+                <a:ea typeface="Georgia" pitchFamily="34" charset="-122"/>
+                <a:cs typeface="Georgia" pitchFamily="34" charset="-120"/>
+              </a:rPr>
+              <a:t>  ·  PCERT-FS — Custody in the Regulated Institution</a:t>
+            </a:r>
+            <a:endParaRPr lang="en-US" sz="900" dirty="0"/>
+          </a:p>
+        </p:txBody>
+      </p:sp>
+      <p:sp>
+        <p:nvSpPr>
+          <p:cNvPr id="17" name="Text 15"/>
+          <p:cNvSpPr/>
+          <p:nvPr/>
+        </p:nvSpPr>
+        <p:spPr>
+          <a:xfrm>
+            <a:off x="10707624" y="6473952"/>
+            <a:ext cx="914400" cy="274320"/>
+          </a:xfrm>
+          <a:prstGeom prst="rect">
+            <a:avLst/>
+          </a:prstGeom>
+          <a:noFill/>
+          <a:ln/>
+        </p:spPr>
+        <p:txBody>
+          <a:bodyPr wrap="square" rtlCol="0" anchor="ctr"/>
+          <a:lstStyle/>
+          <a:p>
+            <a:pPr algn="r" indent="0" marL="0">
+              <a:buNone/>
+            </a:pPr>
+            <a:r>
+              <a:rPr lang="en-US" sz="900" dirty="0">
+                <a:solidFill>
+                  <a:srgbClr val="6E6A62"/>
+                </a:solidFill>
+                <a:latin typeface="Georgia" pitchFamily="34" charset="0"/>
+                <a:ea typeface="Georgia" pitchFamily="34" charset="-122"/>
+                <a:cs typeface="Georgia" pitchFamily="34" charset="-120"/>
+              </a:rPr>
+              <a:t>4</a:t>
+            </a:r>
+            <a:endParaRPr lang="en-US" sz="900" dirty="0"/>
+          </a:p>
+        </p:txBody>
+      </p:sp>
+    </p:spTree>
+  </p:cSld>
+  <p:clrMapOvr>
+    <a:masterClrMapping/>
+  </p:clrMapOvr>
+</p:sld>
+</file>
+
+<file path=ppt/slides/slide5.xml><?xml version="1.0" encoding="utf-8"?>
 <p:sld xmlns:a="http://schemas.openxmlformats.org/drawingml/2006/main" xmlns:r="http://schemas.openxmlformats.org/officeDocument/2006/relationships" xmlns:p="http://schemas.openxmlformats.org/presentationml/2006/main">
   <p:cSld name="Slide 4">
     <p:bg>
@@ -18825,7 +21121,7 @@
                 <a:ea typeface="Georgia" pitchFamily="34" charset="-122"/>
                 <a:cs typeface="Georgia" pitchFamily="34" charset="-120"/>
               </a:rPr>
-              <a:t>4</a:t>
+              <a:t>5</a:t>
             </a:r>
             <a:endParaRPr lang="en-US" sz="900" dirty="0"/>
           </a:p>
@@ -18839,7 +21135,7 @@
 </p:sld>
 </file>
 
-<file path=ppt/slides/slide5.xml><?xml version="1.0" encoding="utf-8"?>
+<file path=ppt/slides/slide6.xml><?xml version="1.0" encoding="utf-8"?>
 <p:sld xmlns:a="http://schemas.openxmlformats.org/drawingml/2006/main" xmlns:r="http://schemas.openxmlformats.org/officeDocument/2006/relationships" xmlns:p="http://schemas.openxmlformats.org/presentationml/2006/main">
   <p:cSld name="Slide 5">
     <p:bg>
@@ -19499,7 +21795,7 @@
                 <a:ea typeface="Georgia" pitchFamily="34" charset="-122"/>
                 <a:cs typeface="Georgia" pitchFamily="34" charset="-120"/>
               </a:rPr>
-              <a:t>5</a:t>
+              <a:t>6</a:t>
             </a:r>
             <a:endParaRPr lang="en-US" sz="900" dirty="0"/>
           </a:p>
@@ -19513,7 +21809,7 @@
 </p:sld>
 </file>
 
-<file path=ppt/slides/slide6.xml><?xml version="1.0" encoding="utf-8"?>
+<file path=ppt/slides/slide7.xml><?xml version="1.0" encoding="utf-8"?>
 <p:sld xmlns:a="http://schemas.openxmlformats.org/drawingml/2006/main" xmlns:r="http://schemas.openxmlformats.org/officeDocument/2006/relationships" xmlns:p="http://schemas.openxmlformats.org/presentationml/2006/main">
   <p:cSld name="Slide 6">
     <p:bg>
@@ -20119,7 +22415,7 @@
                 <a:ea typeface="Georgia" pitchFamily="34" charset="-122"/>
                 <a:cs typeface="Georgia" pitchFamily="34" charset="-120"/>
               </a:rPr>
-              <a:t>6</a:t>
+              <a:t>7</a:t>
             </a:r>
             <a:endParaRPr lang="en-US" sz="900" dirty="0"/>
           </a:p>
@@ -20133,7 +22429,7 @@
 </p:sld>
 </file>
 
-<file path=ppt/slides/slide7.xml><?xml version="1.0" encoding="utf-8"?>
+<file path=ppt/slides/slide8.xml><?xml version="1.0" encoding="utf-8"?>
 <p:sld xmlns:a="http://schemas.openxmlformats.org/drawingml/2006/main" xmlns:r="http://schemas.openxmlformats.org/officeDocument/2006/relationships" xmlns:p="http://schemas.openxmlformats.org/presentationml/2006/main">
   <p:cSld name="Slide 7">
     <p:bg>
@@ -20684,7 +22980,7 @@
                 <a:ea typeface="Georgia" pitchFamily="34" charset="-122"/>
                 <a:cs typeface="Georgia" pitchFamily="34" charset="-120"/>
               </a:rPr>
-              <a:t>7</a:t>
+              <a:t>8</a:t>
             </a:r>
             <a:endParaRPr lang="en-US" sz="900" dirty="0"/>
           </a:p>
@@ -20698,7 +22994,7 @@
 </p:sld>
 </file>
 
-<file path=ppt/slides/slide8.xml><?xml version="1.0" encoding="utf-8"?>
+<file path=ppt/slides/slide9.xml><?xml version="1.0" encoding="utf-8"?>
 <p:sld xmlns:a="http://schemas.openxmlformats.org/drawingml/2006/main" xmlns:r="http://schemas.openxmlformats.org/officeDocument/2006/relationships" xmlns:p="http://schemas.openxmlformats.org/presentationml/2006/main">
   <p:cSld name="Slide 8">
     <p:bg>
@@ -20920,1627 +23216,6 @@
       <p:sp>
         <p:nvSpPr>
           <p:cNvPr id="7" name="Text 5"/>
-          <p:cNvSpPr/>
-          <p:nvPr/>
-        </p:nvSpPr>
-        <p:spPr>
-          <a:xfrm>
-            <a:off x="10707624" y="6473952"/>
-            <a:ext cx="914400" cy="274320"/>
-          </a:xfrm>
-          <a:prstGeom prst="rect">
-            <a:avLst/>
-          </a:prstGeom>
-          <a:noFill/>
-          <a:ln/>
-        </p:spPr>
-        <p:txBody>
-          <a:bodyPr wrap="square" rtlCol="0" anchor="ctr"/>
-          <a:lstStyle/>
-          <a:p>
-            <a:pPr algn="r" indent="0" marL="0">
-              <a:buNone/>
-            </a:pPr>
-            <a:r>
-              <a:rPr lang="en-US" sz="900" dirty="0">
-                <a:solidFill>
-                  <a:srgbClr val="6E6A62"/>
-                </a:solidFill>
-                <a:latin typeface="Georgia" pitchFamily="34" charset="0"/>
-                <a:ea typeface="Georgia" pitchFamily="34" charset="-122"/>
-                <a:cs typeface="Georgia" pitchFamily="34" charset="-120"/>
-              </a:rPr>
-              <a:t>8</a:t>
-            </a:r>
-            <a:endParaRPr lang="en-US" sz="900" dirty="0"/>
-          </a:p>
-        </p:txBody>
-      </p:sp>
-    </p:spTree>
-  </p:cSld>
-  <p:clrMapOvr>
-    <a:masterClrMapping/>
-  </p:clrMapOvr>
-</p:sld>
-</file>
-
-<file path=ppt/slides/slide9.xml><?xml version="1.0" encoding="utf-8"?>
-<p:sld xmlns:a="http://schemas.openxmlformats.org/drawingml/2006/main" xmlns:r="http://schemas.openxmlformats.org/officeDocument/2006/relationships" xmlns:p="http://schemas.openxmlformats.org/presentationml/2006/main">
-  <p:cSld name="Slide 9">
-    <p:bg>
-      <p:bgPr>
-        <a:solidFill>
-          <a:srgbClr val="FFFFFF"/>
-        </a:solidFill>
-      </p:bgPr>
-    </p:bg>
-    <p:spTree>
-      <p:nvGrpSpPr>
-        <p:cNvPr id="1" name=""/>
-        <p:cNvGrpSpPr/>
-        <p:nvPr/>
-      </p:nvGrpSpPr>
-      <p:grpSpPr>
-        <a:xfrm>
-          <a:off x="0" y="0"/>
-          <a:ext cx="0" cy="0"/>
-          <a:chOff x="0" y="0"/>
-          <a:chExt cx="0" cy="0"/>
-        </a:xfrm>
-      </p:grpSpPr>
-      <p:sp>
-        <p:nvSpPr>
-          <p:cNvPr id="2" name="Text 0"/>
-          <p:cNvSpPr/>
-          <p:nvPr/>
-        </p:nvSpPr>
-        <p:spPr>
-          <a:xfrm>
-            <a:off x="566928" y="457200"/>
-            <a:ext cx="11055096" cy="292608"/>
-          </a:xfrm>
-          <a:prstGeom prst="rect">
-            <a:avLst/>
-          </a:prstGeom>
-          <a:noFill/>
-          <a:ln/>
-        </p:spPr>
-        <p:txBody>
-          <a:bodyPr wrap="square" rtlCol="0" anchor="ctr"/>
-          <a:lstStyle/>
-          <a:p>
-            <a:pPr indent="0" marL="0">
-              <a:buNone/>
-            </a:pPr>
-            <a:r>
-              <a:rPr lang="en-US" sz="1050" b="1" spc="120" kern="0" dirty="0">
-                <a:solidFill>
-                  <a:srgbClr val="8A8378"/>
-                </a:solidFill>
-                <a:latin typeface="Georgia" pitchFamily="34" charset="0"/>
-                <a:ea typeface="Georgia" pitchFamily="34" charset="-122"/>
-                <a:cs typeface="Georgia" pitchFamily="34" charset="-120"/>
-              </a:rPr>
-              <a:t>THE MAPPING</a:t>
-            </a:r>
-            <a:endParaRPr lang="en-US" sz="1050" dirty="0"/>
-          </a:p>
-        </p:txBody>
-      </p:sp>
-      <p:sp>
-        <p:nvSpPr>
-          <p:cNvPr id="3" name="Text 1"/>
-          <p:cNvSpPr/>
-          <p:nvPr/>
-        </p:nvSpPr>
-        <p:spPr>
-          <a:xfrm>
-            <a:off x="566928" y="749808"/>
-            <a:ext cx="11055096" cy="822960"/>
-          </a:xfrm>
-          <a:prstGeom prst="rect">
-            <a:avLst/>
-          </a:prstGeom>
-          <a:noFill/>
-          <a:ln/>
-        </p:spPr>
-        <p:txBody>
-          <a:bodyPr wrap="square" rtlCol="0" anchor="t"/>
-          <a:lstStyle/>
-          <a:p>
-            <a:pPr indent="0" marL="0">
-              <a:buNone/>
-            </a:pPr>
-            <a:r>
-              <a:rPr lang="en-US" sz="2550" b="1" dirty="0">
-                <a:solidFill>
-                  <a:srgbClr val="1B1A18"/>
-                </a:solidFill>
-                <a:latin typeface="Georgia" pitchFamily="34" charset="0"/>
-                <a:ea typeface="Georgia" pitchFamily="34" charset="-122"/>
-                <a:cs typeface="Georgia" pitchFamily="34" charset="-120"/>
-              </a:rPr>
-              <a:t>Five properties already have a home</a:t>
-            </a:r>
-            <a:endParaRPr lang="en-US" sz="2550" dirty="0"/>
-          </a:p>
-        </p:txBody>
-      </p:sp>
-      <p:graphicFrame>
-        <p:nvGraphicFramePr>
-          <p:cNvPr id="10" name="Table 0"/>
-          <p:cNvGraphicFramePr>
-            <a:graphicFrameLocks noGrp="1"/>
-          </p:cNvGraphicFramePr>
-          <p:nvPr>
-            <p:extLst>
-              <p:ext uri="{D42A27DB-BD31-4B8C-83A1-F6EECF244321}">
-                <p14:modId xmlns:p14="http://schemas.microsoft.com/office/powerpoint/2010/main" val="1579011935"/>
-              </p:ext>
-            </p:extLst>
-          </p:nvPr>
-        </p:nvGraphicFramePr>
-        <p:xfrm>
-          <a:off x="566928" y="1737360"/>
-          <a:ext cx="11055096" cy="914400"/>
-        </p:xfrm>
-        <a:graphic>
-          <a:graphicData uri="http://schemas.openxmlformats.org/drawingml/2006/table">
-            <a:tbl>
-              <a:tblPr/>
-              <a:tblGrid>
-                <a:gridCol w="1371600"/>
-                <a:gridCol w="3291840"/>
-                <a:gridCol w="6391656"/>
-              </a:tblGrid>
-              <a:tr h="0">
-                <a:tc>
-                  <a:txBody>
-                    <a:bodyPr/>
-                    <a:lstStyle/>
-                    <a:p>
-                      <a:pPr indent="0" marL="0">
-                        <a:buNone/>
-                      </a:pPr>
-                      <a:r>
-                        <a:rPr lang="en-US" sz="1200" b="1" dirty="0">
-                          <a:solidFill>
-                            <a:srgbClr val="33302B"/>
-                          </a:solidFill>
-                          <a:latin typeface="Georgia" pitchFamily="34" charset="0"/>
-                          <a:ea typeface="Georgia" pitchFamily="34" charset="-122"/>
-                          <a:cs typeface="Georgia" pitchFamily="34" charset="-120"/>
-                        </a:rPr>
-                        <a:t>Property</a:t>
-                      </a:r>
-                      <a:endParaRPr lang="en-US" sz="1200" dirty="0">
-                        <a:latin typeface="Georgia" charset="0"/>
-                        <a:ea typeface="Georgia" charset="0"/>
-                        <a:cs typeface="Georgia" charset="0"/>
-                      </a:endParaRPr>
-                    </a:p>
-                  </a:txBody>
-                  <a:tcPr marL="82296" marR="82296" marT="82296" marB="82296" anchor="ctr">
-                    <a:lnL w="6350" cap="flat" cmpd="sng" algn="ctr">
-                      <a:solidFill>
-                        <a:srgbClr val="D6D2C9"/>
-                      </a:solidFill>
-                      <a:prstDash val="solid"/>
-                      <a:round/>
-                      <a:headEnd type="none" w="med" len="med"/>
-                      <a:tailEnd type="none" w="med" len="med"/>
-                    </a:lnL>
-                    <a:lnR w="6350" cap="flat" cmpd="sng" algn="ctr">
-                      <a:solidFill>
-                        <a:srgbClr val="D6D2C9"/>
-                      </a:solidFill>
-                      <a:prstDash val="solid"/>
-                      <a:round/>
-                      <a:headEnd type="none" w="med" len="med"/>
-                      <a:tailEnd type="none" w="med" len="med"/>
-                    </a:lnR>
-                    <a:lnT w="6350" cap="flat" cmpd="sng" algn="ctr">
-                      <a:solidFill>
-                        <a:srgbClr val="D6D2C9"/>
-                      </a:solidFill>
-                      <a:prstDash val="solid"/>
-                      <a:round/>
-                      <a:headEnd type="none" w="med" len="med"/>
-                      <a:tailEnd type="none" w="med" len="med"/>
-                    </a:lnT>
-                    <a:lnB w="6350" cap="flat" cmpd="sng" algn="ctr">
-                      <a:solidFill>
-                        <a:srgbClr val="D6D2C9"/>
-                      </a:solidFill>
-                      <a:prstDash val="solid"/>
-                      <a:round/>
-                      <a:headEnd type="none" w="med" len="med"/>
-                      <a:tailEnd type="none" w="med" len="med"/>
-                    </a:lnB>
-                    <a:solidFill>
-                      <a:srgbClr val="F4F2EE"/>
-                    </a:solidFill>
-                  </a:tcPr>
-                </a:tc>
-                <a:tc>
-                  <a:txBody>
-                    <a:bodyPr/>
-                    <a:lstStyle/>
-                    <a:p>
-                      <a:pPr indent="0" marL="0">
-                        <a:buNone/>
-                      </a:pPr>
-                      <a:r>
-                        <a:rPr lang="en-US" sz="1200" b="1" dirty="0">
-                          <a:solidFill>
-                            <a:srgbClr val="33302B"/>
-                          </a:solidFill>
-                          <a:latin typeface="Georgia" pitchFamily="34" charset="0"/>
-                          <a:ea typeface="Georgia" pitchFamily="34" charset="-122"/>
-                          <a:cs typeface="Georgia" pitchFamily="34" charset="-120"/>
-                        </a:rPr>
-                        <a:t>What must survive the boundary</a:t>
-                      </a:r>
-                      <a:endParaRPr lang="en-US" sz="1200" dirty="0">
-                        <a:latin typeface="Georgia" charset="0"/>
-                        <a:ea typeface="Georgia" charset="0"/>
-                        <a:cs typeface="Georgia" charset="0"/>
-                      </a:endParaRPr>
-                    </a:p>
-                  </a:txBody>
-                  <a:tcPr marL="82296" marR="82296" marT="82296" marB="82296" anchor="ctr">
-                    <a:lnL w="6350" cap="flat" cmpd="sng" algn="ctr">
-                      <a:solidFill>
-                        <a:srgbClr val="D6D2C9"/>
-                      </a:solidFill>
-                      <a:prstDash val="solid"/>
-                      <a:round/>
-                      <a:headEnd type="none" w="med" len="med"/>
-                      <a:tailEnd type="none" w="med" len="med"/>
-                    </a:lnL>
-                    <a:lnR w="6350" cap="flat" cmpd="sng" algn="ctr">
-                      <a:solidFill>
-                        <a:srgbClr val="D6D2C9"/>
-                      </a:solidFill>
-                      <a:prstDash val="solid"/>
-                      <a:round/>
-                      <a:headEnd type="none" w="med" len="med"/>
-                      <a:tailEnd type="none" w="med" len="med"/>
-                    </a:lnR>
-                    <a:lnT w="6350" cap="flat" cmpd="sng" algn="ctr">
-                      <a:solidFill>
-                        <a:srgbClr val="D6D2C9"/>
-                      </a:solidFill>
-                      <a:prstDash val="solid"/>
-                      <a:round/>
-                      <a:headEnd type="none" w="med" len="med"/>
-                      <a:tailEnd type="none" w="med" len="med"/>
-                    </a:lnT>
-                    <a:lnB w="6350" cap="flat" cmpd="sng" algn="ctr">
-                      <a:solidFill>
-                        <a:srgbClr val="D6D2C9"/>
-                      </a:solidFill>
-                      <a:prstDash val="solid"/>
-                      <a:round/>
-                      <a:headEnd type="none" w="med" len="med"/>
-                      <a:tailEnd type="none" w="med" len="med"/>
-                    </a:lnB>
-                    <a:solidFill>
-                      <a:srgbClr val="F4F2EE"/>
-                    </a:solidFill>
-                  </a:tcPr>
-                </a:tc>
-                <a:tc>
-                  <a:txBody>
-                    <a:bodyPr/>
-                    <a:lstStyle/>
-                    <a:p>
-                      <a:pPr indent="0" marL="0">
-                        <a:buNone/>
-                      </a:pPr>
-                      <a:r>
-                        <a:rPr lang="en-US" sz="1200" b="1" dirty="0">
-                          <a:solidFill>
-                            <a:srgbClr val="33302B"/>
-                          </a:solidFill>
-                          <a:latin typeface="Georgia" pitchFamily="34" charset="0"/>
-                          <a:ea typeface="Georgia" pitchFamily="34" charset="-122"/>
-                          <a:cs typeface="Georgia" pitchFamily="34" charset="-120"/>
-                        </a:rPr>
-                        <a:t>The instrument that already asks</a:t>
-                      </a:r>
-                      <a:endParaRPr lang="en-US" sz="1200" dirty="0">
-                        <a:latin typeface="Georgia" charset="0"/>
-                        <a:ea typeface="Georgia" charset="0"/>
-                        <a:cs typeface="Georgia" charset="0"/>
-                      </a:endParaRPr>
-                    </a:p>
-                  </a:txBody>
-                  <a:tcPr marL="82296" marR="82296" marT="82296" marB="82296" anchor="ctr">
-                    <a:lnL w="6350" cap="flat" cmpd="sng" algn="ctr">
-                      <a:solidFill>
-                        <a:srgbClr val="D6D2C9"/>
-                      </a:solidFill>
-                      <a:prstDash val="solid"/>
-                      <a:round/>
-                      <a:headEnd type="none" w="med" len="med"/>
-                      <a:tailEnd type="none" w="med" len="med"/>
-                    </a:lnL>
-                    <a:lnR w="6350" cap="flat" cmpd="sng" algn="ctr">
-                      <a:solidFill>
-                        <a:srgbClr val="D6D2C9"/>
-                      </a:solidFill>
-                      <a:prstDash val="solid"/>
-                      <a:round/>
-                      <a:headEnd type="none" w="med" len="med"/>
-                      <a:tailEnd type="none" w="med" len="med"/>
-                    </a:lnR>
-                    <a:lnT w="6350" cap="flat" cmpd="sng" algn="ctr">
-                      <a:solidFill>
-                        <a:srgbClr val="D6D2C9"/>
-                      </a:solidFill>
-                      <a:prstDash val="solid"/>
-                      <a:round/>
-                      <a:headEnd type="none" w="med" len="med"/>
-                      <a:tailEnd type="none" w="med" len="med"/>
-                    </a:lnT>
-                    <a:lnB w="6350" cap="flat" cmpd="sng" algn="ctr">
-                      <a:solidFill>
-                        <a:srgbClr val="D6D2C9"/>
-                      </a:solidFill>
-                      <a:prstDash val="solid"/>
-                      <a:round/>
-                      <a:headEnd type="none" w="med" len="med"/>
-                      <a:tailEnd type="none" w="med" len="med"/>
-                    </a:lnB>
-                    <a:solidFill>
-                      <a:srgbClr val="F4F2EE"/>
-                    </a:solidFill>
-                  </a:tcPr>
-                </a:tc>
-              </a:tr>
-              <a:tr h="0">
-                <a:tc>
-                  <a:txBody>
-                    <a:bodyPr/>
-                    <a:lstStyle/>
-                    <a:p>
-                      <a:pPr indent="0" marL="0">
-                        <a:buNone/>
-                      </a:pPr>
-                      <a:r>
-                        <a:rPr lang="en-US" sz="1150" b="1" dirty="0">
-                          <a:solidFill>
-                            <a:srgbClr val="33302B"/>
-                          </a:solidFill>
-                          <a:latin typeface="Georgia" pitchFamily="34" charset="0"/>
-                          <a:ea typeface="Georgia" pitchFamily="34" charset="-122"/>
-                          <a:cs typeface="Georgia" pitchFamily="34" charset="-120"/>
-                        </a:rPr>
-                        <a:t>Context</a:t>
-                      </a:r>
-                      <a:endParaRPr lang="en-US" sz="1150" dirty="0">
-                        <a:latin typeface="Georgia" charset="0"/>
-                        <a:ea typeface="Georgia" charset="0"/>
-                        <a:cs typeface="Georgia" charset="0"/>
-                      </a:endParaRPr>
-                    </a:p>
-                  </a:txBody>
-                  <a:tcPr marL="82296" marR="82296" marT="82296" marB="82296" anchor="t">
-                    <a:lnL w="6350" cap="flat" cmpd="sng" algn="ctr">
-                      <a:solidFill>
-                        <a:srgbClr val="D6D2C9"/>
-                      </a:solidFill>
-                      <a:prstDash val="solid"/>
-                      <a:round/>
-                      <a:headEnd type="none" w="med" len="med"/>
-                      <a:tailEnd type="none" w="med" len="med"/>
-                    </a:lnL>
-                    <a:lnR w="6350" cap="flat" cmpd="sng" algn="ctr">
-                      <a:solidFill>
-                        <a:srgbClr val="D6D2C9"/>
-                      </a:solidFill>
-                      <a:prstDash val="solid"/>
-                      <a:round/>
-                      <a:headEnd type="none" w="med" len="med"/>
-                      <a:tailEnd type="none" w="med" len="med"/>
-                    </a:lnR>
-                    <a:lnT w="6350" cap="flat" cmpd="sng" algn="ctr">
-                      <a:solidFill>
-                        <a:srgbClr val="D6D2C9"/>
-                      </a:solidFill>
-                      <a:prstDash val="solid"/>
-                      <a:round/>
-                      <a:headEnd type="none" w="med" len="med"/>
-                      <a:tailEnd type="none" w="med" len="med"/>
-                    </a:lnT>
-                    <a:lnB w="6350" cap="flat" cmpd="sng" algn="ctr">
-                      <a:solidFill>
-                        <a:srgbClr val="D6D2C9"/>
-                      </a:solidFill>
-                      <a:prstDash val="solid"/>
-                      <a:round/>
-                      <a:headEnd type="none" w="med" len="med"/>
-                      <a:tailEnd type="none" w="med" len="med"/>
-                    </a:lnB>
-                  </a:tcPr>
-                </a:tc>
-                <a:tc>
-                  <a:txBody>
-                    <a:bodyPr/>
-                    <a:lstStyle/>
-                    <a:p>
-                      <a:pPr indent="0" marL="0">
-                        <a:buNone/>
-                      </a:pPr>
-                      <a:r>
-                        <a:rPr lang="en-US" sz="1150" dirty="0">
-                          <a:solidFill>
-                            <a:srgbClr val="1B1A18"/>
-                          </a:solidFill>
-                          <a:latin typeface="Georgia" pitchFamily="34" charset="0"/>
-                          <a:ea typeface="Georgia" pitchFamily="34" charset="-122"/>
-                          <a:cs typeface="Georgia" pitchFamily="34" charset="-120"/>
-                        </a:rPr>
-                        <a:t>The condition that makes a value mean what it means</a:t>
-                      </a:r>
-                      <a:endParaRPr lang="en-US" sz="1150" dirty="0">
-                        <a:latin typeface="Georgia" charset="0"/>
-                        <a:ea typeface="Georgia" charset="0"/>
-                        <a:cs typeface="Georgia" charset="0"/>
-                      </a:endParaRPr>
-                    </a:p>
-                  </a:txBody>
-                  <a:tcPr marL="82296" marR="82296" marT="82296" marB="82296" anchor="t">
-                    <a:lnL w="6350" cap="flat" cmpd="sng" algn="ctr">
-                      <a:solidFill>
-                        <a:srgbClr val="D6D2C9"/>
-                      </a:solidFill>
-                      <a:prstDash val="solid"/>
-                      <a:round/>
-                      <a:headEnd type="none" w="med" len="med"/>
-                      <a:tailEnd type="none" w="med" len="med"/>
-                    </a:lnL>
-                    <a:lnR w="6350" cap="flat" cmpd="sng" algn="ctr">
-                      <a:solidFill>
-                        <a:srgbClr val="D6D2C9"/>
-                      </a:solidFill>
-                      <a:prstDash val="solid"/>
-                      <a:round/>
-                      <a:headEnd type="none" w="med" len="med"/>
-                      <a:tailEnd type="none" w="med" len="med"/>
-                    </a:lnR>
-                    <a:lnT w="6350" cap="flat" cmpd="sng" algn="ctr">
-                      <a:solidFill>
-                        <a:srgbClr val="D6D2C9"/>
-                      </a:solidFill>
-                      <a:prstDash val="solid"/>
-                      <a:round/>
-                      <a:headEnd type="none" w="med" len="med"/>
-                      <a:tailEnd type="none" w="med" len="med"/>
-                    </a:lnT>
-                    <a:lnB w="6350" cap="flat" cmpd="sng" algn="ctr">
-                      <a:solidFill>
-                        <a:srgbClr val="D6D2C9"/>
-                      </a:solidFill>
-                      <a:prstDash val="solid"/>
-                      <a:round/>
-                      <a:headEnd type="none" w="med" len="med"/>
-                      <a:tailEnd type="none" w="med" len="med"/>
-                    </a:lnB>
-                  </a:tcPr>
-                </a:tc>
-                <a:tc>
-                  <a:txBody>
-                    <a:bodyPr/>
-                    <a:lstStyle/>
-                    <a:p>
-                      <a:pPr indent="0" marL="0">
-                        <a:buNone/>
-                      </a:pPr>
-                      <a:r>
-                        <a:rPr lang="en-US" sz="1150" dirty="0">
-                          <a:solidFill>
-                            <a:srgbClr val="1B1A18"/>
-                          </a:solidFill>
-                          <a:latin typeface="Georgia" pitchFamily="34" charset="0"/>
-                          <a:ea typeface="Georgia" pitchFamily="34" charset="-122"/>
-                          <a:cs typeface="Georgia" pitchFamily="34" charset="-120"/>
-                        </a:rPr>
-                        <a:t>Risk data aggregation: accuracy, completeness, lineage</a:t>
-                      </a:r>
-                      <a:endParaRPr lang="en-US" sz="1150" dirty="0">
-                        <a:latin typeface="Georgia" charset="0"/>
-                        <a:ea typeface="Georgia" charset="0"/>
-                        <a:cs typeface="Georgia" charset="0"/>
-                      </a:endParaRPr>
-                    </a:p>
-                  </a:txBody>
-                  <a:tcPr marL="82296" marR="82296" marT="82296" marB="82296" anchor="t">
-                    <a:lnL w="6350" cap="flat" cmpd="sng" algn="ctr">
-                      <a:solidFill>
-                        <a:srgbClr val="D6D2C9"/>
-                      </a:solidFill>
-                      <a:prstDash val="solid"/>
-                      <a:round/>
-                      <a:headEnd type="none" w="med" len="med"/>
-                      <a:tailEnd type="none" w="med" len="med"/>
-                    </a:lnL>
-                    <a:lnR w="6350" cap="flat" cmpd="sng" algn="ctr">
-                      <a:solidFill>
-                        <a:srgbClr val="D6D2C9"/>
-                      </a:solidFill>
-                      <a:prstDash val="solid"/>
-                      <a:round/>
-                      <a:headEnd type="none" w="med" len="med"/>
-                      <a:tailEnd type="none" w="med" len="med"/>
-                    </a:lnR>
-                    <a:lnT w="6350" cap="flat" cmpd="sng" algn="ctr">
-                      <a:solidFill>
-                        <a:srgbClr val="D6D2C9"/>
-                      </a:solidFill>
-                      <a:prstDash val="solid"/>
-                      <a:round/>
-                      <a:headEnd type="none" w="med" len="med"/>
-                      <a:tailEnd type="none" w="med" len="med"/>
-                    </a:lnT>
-                    <a:lnB w="6350" cap="flat" cmpd="sng" algn="ctr">
-                      <a:solidFill>
-                        <a:srgbClr val="D6D2C9"/>
-                      </a:solidFill>
-                      <a:prstDash val="solid"/>
-                      <a:round/>
-                      <a:headEnd type="none" w="med" len="med"/>
-                      <a:tailEnd type="none" w="med" len="med"/>
-                    </a:lnB>
-                  </a:tcPr>
-                </a:tc>
-              </a:tr>
-              <a:tr h="0">
-                <a:tc>
-                  <a:txBody>
-                    <a:bodyPr/>
-                    <a:lstStyle/>
-                    <a:p>
-                      <a:pPr indent="0" marL="0">
-                        <a:buNone/>
-                      </a:pPr>
-                      <a:r>
-                        <a:rPr lang="en-US" sz="1150" b="1" dirty="0">
-                          <a:solidFill>
-                            <a:srgbClr val="33302B"/>
-                          </a:solidFill>
-                          <a:latin typeface="Georgia" pitchFamily="34" charset="0"/>
-                          <a:ea typeface="Georgia" pitchFamily="34" charset="-122"/>
-                          <a:cs typeface="Georgia" pitchFamily="34" charset="-120"/>
-                        </a:rPr>
-                        <a:t>Authority</a:t>
-                      </a:r>
-                      <a:endParaRPr lang="en-US" sz="1150" dirty="0">
-                        <a:latin typeface="Georgia" charset="0"/>
-                        <a:ea typeface="Georgia" charset="0"/>
-                        <a:cs typeface="Georgia" charset="0"/>
-                      </a:endParaRPr>
-                    </a:p>
-                  </a:txBody>
-                  <a:tcPr marL="82296" marR="82296" marT="82296" marB="82296" anchor="t">
-                    <a:lnL w="6350" cap="flat" cmpd="sng" algn="ctr">
-                      <a:solidFill>
-                        <a:srgbClr val="D6D2C9"/>
-                      </a:solidFill>
-                      <a:prstDash val="solid"/>
-                      <a:round/>
-                      <a:headEnd type="none" w="med" len="med"/>
-                      <a:tailEnd type="none" w="med" len="med"/>
-                    </a:lnL>
-                    <a:lnR w="6350" cap="flat" cmpd="sng" algn="ctr">
-                      <a:solidFill>
-                        <a:srgbClr val="D6D2C9"/>
-                      </a:solidFill>
-                      <a:prstDash val="solid"/>
-                      <a:round/>
-                      <a:headEnd type="none" w="med" len="med"/>
-                      <a:tailEnd type="none" w="med" len="med"/>
-                    </a:lnR>
-                    <a:lnT w="6350" cap="flat" cmpd="sng" algn="ctr">
-                      <a:solidFill>
-                        <a:srgbClr val="D6D2C9"/>
-                      </a:solidFill>
-                      <a:prstDash val="solid"/>
-                      <a:round/>
-                      <a:headEnd type="none" w="med" len="med"/>
-                      <a:tailEnd type="none" w="med" len="med"/>
-                    </a:lnT>
-                    <a:lnB w="6350" cap="flat" cmpd="sng" algn="ctr">
-                      <a:solidFill>
-                        <a:srgbClr val="D6D2C9"/>
-                      </a:solidFill>
-                      <a:prstDash val="solid"/>
-                      <a:round/>
-                      <a:headEnd type="none" w="med" len="med"/>
-                      <a:tailEnd type="none" w="med" len="med"/>
-                    </a:lnB>
-                  </a:tcPr>
-                </a:tc>
-                <a:tc>
-                  <a:txBody>
-                    <a:bodyPr/>
-                    <a:lstStyle/>
-                    <a:p>
-                      <a:pPr indent="0" marL="0">
-                        <a:buNone/>
-                      </a:pPr>
-                      <a:r>
-                        <a:rPr lang="en-US" sz="1150" dirty="0">
-                          <a:solidFill>
-                            <a:srgbClr val="1B1A18"/>
-                          </a:solidFill>
-                          <a:latin typeface="Georgia" pitchFamily="34" charset="0"/>
-                          <a:ea typeface="Georgia" pitchFamily="34" charset="-122"/>
-                          <a:cs typeface="Georgia" pitchFamily="34" charset="-120"/>
-                        </a:rPr>
-                        <a:t>The decision right, consulted at the boundary</a:t>
-                      </a:r>
-                      <a:endParaRPr lang="en-US" sz="1150" dirty="0">
-                        <a:latin typeface="Georgia" charset="0"/>
-                        <a:ea typeface="Georgia" charset="0"/>
-                        <a:cs typeface="Georgia" charset="0"/>
-                      </a:endParaRPr>
-                    </a:p>
-                  </a:txBody>
-                  <a:tcPr marL="82296" marR="82296" marT="82296" marB="82296" anchor="t">
-                    <a:lnL w="6350" cap="flat" cmpd="sng" algn="ctr">
-                      <a:solidFill>
-                        <a:srgbClr val="D6D2C9"/>
-                      </a:solidFill>
-                      <a:prstDash val="solid"/>
-                      <a:round/>
-                      <a:headEnd type="none" w="med" len="med"/>
-                      <a:tailEnd type="none" w="med" len="med"/>
-                    </a:lnL>
-                    <a:lnR w="6350" cap="flat" cmpd="sng" algn="ctr">
-                      <a:solidFill>
-                        <a:srgbClr val="D6D2C9"/>
-                      </a:solidFill>
-                      <a:prstDash val="solid"/>
-                      <a:round/>
-                      <a:headEnd type="none" w="med" len="med"/>
-                      <a:tailEnd type="none" w="med" len="med"/>
-                    </a:lnR>
-                    <a:lnT w="6350" cap="flat" cmpd="sng" algn="ctr">
-                      <a:solidFill>
-                        <a:srgbClr val="D6D2C9"/>
-                      </a:solidFill>
-                      <a:prstDash val="solid"/>
-                      <a:round/>
-                      <a:headEnd type="none" w="med" len="med"/>
-                      <a:tailEnd type="none" w="med" len="med"/>
-                    </a:lnT>
-                    <a:lnB w="6350" cap="flat" cmpd="sng" algn="ctr">
-                      <a:solidFill>
-                        <a:srgbClr val="D6D2C9"/>
-                      </a:solidFill>
-                      <a:prstDash val="solid"/>
-                      <a:round/>
-                      <a:headEnd type="none" w="med" len="med"/>
-                      <a:tailEnd type="none" w="med" len="med"/>
-                    </a:lnB>
-                  </a:tcPr>
-                </a:tc>
-                <a:tc>
-                  <a:txBody>
-                    <a:bodyPr/>
-                    <a:lstStyle/>
-                    <a:p>
-                      <a:pPr indent="0" marL="0">
-                        <a:buNone/>
-                      </a:pPr>
-                      <a:r>
-                        <a:rPr lang="en-US" sz="1150" dirty="0">
-                          <a:solidFill>
-                            <a:srgbClr val="1B1A18"/>
-                          </a:solidFill>
-                          <a:latin typeface="Georgia" pitchFamily="34" charset="0"/>
-                          <a:ea typeface="Georgia" pitchFamily="34" charset="-122"/>
-                          <a:cs typeface="Georgia" pitchFamily="34" charset="-120"/>
-                        </a:rPr>
-                        <a:t>Mandates and delegated authority — recorded for people, not for machines</a:t>
-                      </a:r>
-                      <a:endParaRPr lang="en-US" sz="1150" dirty="0">
-                        <a:latin typeface="Georgia" charset="0"/>
-                        <a:ea typeface="Georgia" charset="0"/>
-                        <a:cs typeface="Georgia" charset="0"/>
-                      </a:endParaRPr>
-                    </a:p>
-                  </a:txBody>
-                  <a:tcPr marL="82296" marR="82296" marT="82296" marB="82296" anchor="t">
-                    <a:lnL w="6350" cap="flat" cmpd="sng" algn="ctr">
-                      <a:solidFill>
-                        <a:srgbClr val="D6D2C9"/>
-                      </a:solidFill>
-                      <a:prstDash val="solid"/>
-                      <a:round/>
-                      <a:headEnd type="none" w="med" len="med"/>
-                      <a:tailEnd type="none" w="med" len="med"/>
-                    </a:lnL>
-                    <a:lnR w="6350" cap="flat" cmpd="sng" algn="ctr">
-                      <a:solidFill>
-                        <a:srgbClr val="D6D2C9"/>
-                      </a:solidFill>
-                      <a:prstDash val="solid"/>
-                      <a:round/>
-                      <a:headEnd type="none" w="med" len="med"/>
-                      <a:tailEnd type="none" w="med" len="med"/>
-                    </a:lnR>
-                    <a:lnT w="6350" cap="flat" cmpd="sng" algn="ctr">
-                      <a:solidFill>
-                        <a:srgbClr val="D6D2C9"/>
-                      </a:solidFill>
-                      <a:prstDash val="solid"/>
-                      <a:round/>
-                      <a:headEnd type="none" w="med" len="med"/>
-                      <a:tailEnd type="none" w="med" len="med"/>
-                    </a:lnT>
-                    <a:lnB w="6350" cap="flat" cmpd="sng" algn="ctr">
-                      <a:solidFill>
-                        <a:srgbClr val="D6D2C9"/>
-                      </a:solidFill>
-                      <a:prstDash val="solid"/>
-                      <a:round/>
-                      <a:headEnd type="none" w="med" len="med"/>
-                      <a:tailEnd type="none" w="med" len="med"/>
-                    </a:lnB>
-                  </a:tcPr>
-                </a:tc>
-              </a:tr>
-              <a:tr h="0">
-                <a:tc>
-                  <a:txBody>
-                    <a:bodyPr/>
-                    <a:lstStyle/>
-                    <a:p>
-                      <a:pPr indent="0" marL="0">
-                        <a:buNone/>
-                      </a:pPr>
-                      <a:r>
-                        <a:rPr lang="en-US" sz="1150" b="1" dirty="0">
-                          <a:solidFill>
-                            <a:srgbClr val="33302B"/>
-                          </a:solidFill>
-                          <a:latin typeface="Georgia" pitchFamily="34" charset="0"/>
-                          <a:ea typeface="Georgia" pitchFamily="34" charset="-122"/>
-                          <a:cs typeface="Georgia" pitchFamily="34" charset="-120"/>
-                        </a:rPr>
-                        <a:t>Accountability</a:t>
-                      </a:r>
-                      <a:endParaRPr lang="en-US" sz="1150" dirty="0">
-                        <a:latin typeface="Georgia" charset="0"/>
-                        <a:ea typeface="Georgia" charset="0"/>
-                        <a:cs typeface="Georgia" charset="0"/>
-                      </a:endParaRPr>
-                    </a:p>
-                  </a:txBody>
-                  <a:tcPr marL="82296" marR="82296" marT="82296" marB="82296" anchor="t">
-                    <a:lnL w="6350" cap="flat" cmpd="sng" algn="ctr">
-                      <a:solidFill>
-                        <a:srgbClr val="D6D2C9"/>
-                      </a:solidFill>
-                      <a:prstDash val="solid"/>
-                      <a:round/>
-                      <a:headEnd type="none" w="med" len="med"/>
-                      <a:tailEnd type="none" w="med" len="med"/>
-                    </a:lnL>
-                    <a:lnR w="6350" cap="flat" cmpd="sng" algn="ctr">
-                      <a:solidFill>
-                        <a:srgbClr val="D6D2C9"/>
-                      </a:solidFill>
-                      <a:prstDash val="solid"/>
-                      <a:round/>
-                      <a:headEnd type="none" w="med" len="med"/>
-                      <a:tailEnd type="none" w="med" len="med"/>
-                    </a:lnR>
-                    <a:lnT w="6350" cap="flat" cmpd="sng" algn="ctr">
-                      <a:solidFill>
-                        <a:srgbClr val="D6D2C9"/>
-                      </a:solidFill>
-                      <a:prstDash val="solid"/>
-                      <a:round/>
-                      <a:headEnd type="none" w="med" len="med"/>
-                      <a:tailEnd type="none" w="med" len="med"/>
-                    </a:lnT>
-                    <a:lnB w="6350" cap="flat" cmpd="sng" algn="ctr">
-                      <a:solidFill>
-                        <a:srgbClr val="D6D2C9"/>
-                      </a:solidFill>
-                      <a:prstDash val="solid"/>
-                      <a:round/>
-                      <a:headEnd type="none" w="med" len="med"/>
-                      <a:tailEnd type="none" w="med" len="med"/>
-                    </a:lnB>
-                  </a:tcPr>
-                </a:tc>
-                <a:tc>
-                  <a:txBody>
-                    <a:bodyPr/>
-                    <a:lstStyle/>
-                    <a:p>
-                      <a:pPr indent="0" marL="0">
-                        <a:buNone/>
-                      </a:pPr>
-                      <a:r>
-                        <a:rPr lang="en-US" sz="1150" dirty="0">
-                          <a:solidFill>
-                            <a:srgbClr val="1B1A18"/>
-                          </a:solidFill>
-                          <a:latin typeface="Georgia" pitchFamily="34" charset="0"/>
-                          <a:ea typeface="Georgia" pitchFamily="34" charset="-122"/>
-                          <a:cs typeface="Georgia" pitchFamily="34" charset="-120"/>
-                        </a:rPr>
-                        <a:t>Attribution generated at execution</a:t>
-                      </a:r>
-                      <a:endParaRPr lang="en-US" sz="1150" dirty="0">
-                        <a:latin typeface="Georgia" charset="0"/>
-                        <a:ea typeface="Georgia" charset="0"/>
-                        <a:cs typeface="Georgia" charset="0"/>
-                      </a:endParaRPr>
-                    </a:p>
-                  </a:txBody>
-                  <a:tcPr marL="82296" marR="82296" marT="82296" marB="82296" anchor="t">
-                    <a:lnL w="6350" cap="flat" cmpd="sng" algn="ctr">
-                      <a:solidFill>
-                        <a:srgbClr val="D6D2C9"/>
-                      </a:solidFill>
-                      <a:prstDash val="solid"/>
-                      <a:round/>
-                      <a:headEnd type="none" w="med" len="med"/>
-                      <a:tailEnd type="none" w="med" len="med"/>
-                    </a:lnL>
-                    <a:lnR w="6350" cap="flat" cmpd="sng" algn="ctr">
-                      <a:solidFill>
-                        <a:srgbClr val="D6D2C9"/>
-                      </a:solidFill>
-                      <a:prstDash val="solid"/>
-                      <a:round/>
-                      <a:headEnd type="none" w="med" len="med"/>
-                      <a:tailEnd type="none" w="med" len="med"/>
-                    </a:lnR>
-                    <a:lnT w="6350" cap="flat" cmpd="sng" algn="ctr">
-                      <a:solidFill>
-                        <a:srgbClr val="D6D2C9"/>
-                      </a:solidFill>
-                      <a:prstDash val="solid"/>
-                      <a:round/>
-                      <a:headEnd type="none" w="med" len="med"/>
-                      <a:tailEnd type="none" w="med" len="med"/>
-                    </a:lnT>
-                    <a:lnB w="6350" cap="flat" cmpd="sng" algn="ctr">
-                      <a:solidFill>
-                        <a:srgbClr val="D6D2C9"/>
-                      </a:solidFill>
-                      <a:prstDash val="solid"/>
-                      <a:round/>
-                      <a:headEnd type="none" w="med" len="med"/>
-                      <a:tailEnd type="none" w="med" len="med"/>
-                    </a:lnB>
-                  </a:tcPr>
-                </a:tc>
-                <a:tc>
-                  <a:txBody>
-                    <a:bodyPr/>
-                    <a:lstStyle/>
-                    <a:p>
-                      <a:pPr indent="0" marL="0">
-                        <a:buNone/>
-                      </a:pPr>
-                      <a:r>
-                        <a:rPr lang="en-US" sz="1150" dirty="0">
-                          <a:solidFill>
-                            <a:srgbClr val="1B1A18"/>
-                          </a:solidFill>
-                          <a:latin typeface="Georgia" pitchFamily="34" charset="0"/>
-                          <a:ea typeface="Georgia" pitchFamily="34" charset="-122"/>
-                          <a:cs typeface="Georgia" pitchFamily="34" charset="-120"/>
-                        </a:rPr>
-                        <a:t>Audit trail and record-keeping obligations</a:t>
-                      </a:r>
-                      <a:endParaRPr lang="en-US" sz="1150" dirty="0">
-                        <a:latin typeface="Georgia" charset="0"/>
-                        <a:ea typeface="Georgia" charset="0"/>
-                        <a:cs typeface="Georgia" charset="0"/>
-                      </a:endParaRPr>
-                    </a:p>
-                  </a:txBody>
-                  <a:tcPr marL="82296" marR="82296" marT="82296" marB="82296" anchor="t">
-                    <a:lnL w="6350" cap="flat" cmpd="sng" algn="ctr">
-                      <a:solidFill>
-                        <a:srgbClr val="D6D2C9"/>
-                      </a:solidFill>
-                      <a:prstDash val="solid"/>
-                      <a:round/>
-                      <a:headEnd type="none" w="med" len="med"/>
-                      <a:tailEnd type="none" w="med" len="med"/>
-                    </a:lnL>
-                    <a:lnR w="6350" cap="flat" cmpd="sng" algn="ctr">
-                      <a:solidFill>
-                        <a:srgbClr val="D6D2C9"/>
-                      </a:solidFill>
-                      <a:prstDash val="solid"/>
-                      <a:round/>
-                      <a:headEnd type="none" w="med" len="med"/>
-                      <a:tailEnd type="none" w="med" len="med"/>
-                    </a:lnR>
-                    <a:lnT w="6350" cap="flat" cmpd="sng" algn="ctr">
-                      <a:solidFill>
-                        <a:srgbClr val="D6D2C9"/>
-                      </a:solidFill>
-                      <a:prstDash val="solid"/>
-                      <a:round/>
-                      <a:headEnd type="none" w="med" len="med"/>
-                      <a:tailEnd type="none" w="med" len="med"/>
-                    </a:lnT>
-                    <a:lnB w="6350" cap="flat" cmpd="sng" algn="ctr">
-                      <a:solidFill>
-                        <a:srgbClr val="D6D2C9"/>
-                      </a:solidFill>
-                      <a:prstDash val="solid"/>
-                      <a:round/>
-                      <a:headEnd type="none" w="med" len="med"/>
-                      <a:tailEnd type="none" w="med" len="med"/>
-                    </a:lnB>
-                  </a:tcPr>
-                </a:tc>
-              </a:tr>
-              <a:tr h="0">
-                <a:tc>
-                  <a:txBody>
-                    <a:bodyPr/>
-                    <a:lstStyle/>
-                    <a:p>
-                      <a:pPr indent="0" marL="0">
-                        <a:buNone/>
-                      </a:pPr>
-                      <a:r>
-                        <a:rPr lang="en-US" sz="1150" b="1" dirty="0">
-                          <a:solidFill>
-                            <a:srgbClr val="33302B"/>
-                          </a:solidFill>
-                          <a:latin typeface="Georgia" pitchFamily="34" charset="0"/>
-                          <a:ea typeface="Georgia" pitchFamily="34" charset="-122"/>
-                          <a:cs typeface="Georgia" pitchFamily="34" charset="-120"/>
-                        </a:rPr>
-                        <a:t>Coordination</a:t>
-                      </a:r>
-                      <a:endParaRPr lang="en-US" sz="1150" dirty="0">
-                        <a:latin typeface="Georgia" charset="0"/>
-                        <a:ea typeface="Georgia" charset="0"/>
-                        <a:cs typeface="Georgia" charset="0"/>
-                      </a:endParaRPr>
-                    </a:p>
-                  </a:txBody>
-                  <a:tcPr marL="82296" marR="82296" marT="82296" marB="82296" anchor="t">
-                    <a:lnL w="6350" cap="flat" cmpd="sng" algn="ctr">
-                      <a:solidFill>
-                        <a:srgbClr val="D6D2C9"/>
-                      </a:solidFill>
-                      <a:prstDash val="solid"/>
-                      <a:round/>
-                      <a:headEnd type="none" w="med" len="med"/>
-                      <a:tailEnd type="none" w="med" len="med"/>
-                    </a:lnL>
-                    <a:lnR w="6350" cap="flat" cmpd="sng" algn="ctr">
-                      <a:solidFill>
-                        <a:srgbClr val="D6D2C9"/>
-                      </a:solidFill>
-                      <a:prstDash val="solid"/>
-                      <a:round/>
-                      <a:headEnd type="none" w="med" len="med"/>
-                      <a:tailEnd type="none" w="med" len="med"/>
-                    </a:lnR>
-                    <a:lnT w="6350" cap="flat" cmpd="sng" algn="ctr">
-                      <a:solidFill>
-                        <a:srgbClr val="D6D2C9"/>
-                      </a:solidFill>
-                      <a:prstDash val="solid"/>
-                      <a:round/>
-                      <a:headEnd type="none" w="med" len="med"/>
-                      <a:tailEnd type="none" w="med" len="med"/>
-                    </a:lnT>
-                    <a:lnB w="6350" cap="flat" cmpd="sng" algn="ctr">
-                      <a:solidFill>
-                        <a:srgbClr val="D6D2C9"/>
-                      </a:solidFill>
-                      <a:prstDash val="solid"/>
-                      <a:round/>
-                      <a:headEnd type="none" w="med" len="med"/>
-                      <a:tailEnd type="none" w="med" len="med"/>
-                    </a:lnB>
-                  </a:tcPr>
-                </a:tc>
-                <a:tc>
-                  <a:txBody>
-                    <a:bodyPr/>
-                    <a:lstStyle/>
-                    <a:p>
-                      <a:pPr indent="0" marL="0">
-                        <a:buNone/>
-                      </a:pPr>
-                      <a:r>
-                        <a:rPr lang="en-US" sz="1150" dirty="0">
-                          <a:solidFill>
-                            <a:srgbClr val="1B1A18"/>
-                          </a:solidFill>
-                          <a:latin typeface="Georgia" pitchFamily="34" charset="0"/>
-                          <a:ea typeface="Georgia" pitchFamily="34" charset="-122"/>
-                          <a:cs typeface="Georgia" pitchFamily="34" charset="-120"/>
-                        </a:rPr>
-                        <a:t>One statement of the invariant, binding all participants</a:t>
-                      </a:r>
-                      <a:endParaRPr lang="en-US" sz="1150" dirty="0">
-                        <a:latin typeface="Georgia" charset="0"/>
-                        <a:ea typeface="Georgia" charset="0"/>
-                        <a:cs typeface="Georgia" charset="0"/>
-                      </a:endParaRPr>
-                    </a:p>
-                  </a:txBody>
-                  <a:tcPr marL="82296" marR="82296" marT="82296" marB="82296" anchor="t">
-                    <a:lnL w="6350" cap="flat" cmpd="sng" algn="ctr">
-                      <a:solidFill>
-                        <a:srgbClr val="D6D2C9"/>
-                      </a:solidFill>
-                      <a:prstDash val="solid"/>
-                      <a:round/>
-                      <a:headEnd type="none" w="med" len="med"/>
-                      <a:tailEnd type="none" w="med" len="med"/>
-                    </a:lnL>
-                    <a:lnR w="6350" cap="flat" cmpd="sng" algn="ctr">
-                      <a:solidFill>
-                        <a:srgbClr val="D6D2C9"/>
-                      </a:solidFill>
-                      <a:prstDash val="solid"/>
-                      <a:round/>
-                      <a:headEnd type="none" w="med" len="med"/>
-                      <a:tailEnd type="none" w="med" len="med"/>
-                    </a:lnR>
-                    <a:lnT w="6350" cap="flat" cmpd="sng" algn="ctr">
-                      <a:solidFill>
-                        <a:srgbClr val="D6D2C9"/>
-                      </a:solidFill>
-                      <a:prstDash val="solid"/>
-                      <a:round/>
-                      <a:headEnd type="none" w="med" len="med"/>
-                      <a:tailEnd type="none" w="med" len="med"/>
-                    </a:lnT>
-                    <a:lnB w="6350" cap="flat" cmpd="sng" algn="ctr">
-                      <a:solidFill>
-                        <a:srgbClr val="D6D2C9"/>
-                      </a:solidFill>
-                      <a:prstDash val="solid"/>
-                      <a:round/>
-                      <a:headEnd type="none" w="med" len="med"/>
-                      <a:tailEnd type="none" w="med" len="med"/>
-                    </a:lnB>
-                  </a:tcPr>
-                </a:tc>
-                <a:tc>
-                  <a:txBody>
-                    <a:bodyPr/>
-                    <a:lstStyle/>
-                    <a:p>
-                      <a:pPr indent="0" marL="0">
-                        <a:buNone/>
-                      </a:pPr>
-                      <a:r>
-                        <a:rPr lang="en-US" sz="1150" dirty="0">
-                          <a:solidFill>
-                            <a:srgbClr val="1B1A18"/>
-                          </a:solidFill>
-                          <a:latin typeface="Georgia" pitchFamily="34" charset="0"/>
-                          <a:ea typeface="Georgia" pitchFamily="34" charset="-122"/>
-                          <a:cs typeface="Georgia" pitchFamily="34" charset="-120"/>
-                        </a:rPr>
-                        <a:t>Group-wide aggregation and consistent risk appetite</a:t>
-                      </a:r>
-                      <a:endParaRPr lang="en-US" sz="1150" dirty="0">
-                        <a:latin typeface="Georgia" charset="0"/>
-                        <a:ea typeface="Georgia" charset="0"/>
-                        <a:cs typeface="Georgia" charset="0"/>
-                      </a:endParaRPr>
-                    </a:p>
-                  </a:txBody>
-                  <a:tcPr marL="82296" marR="82296" marT="82296" marB="82296" anchor="t">
-                    <a:lnL w="6350" cap="flat" cmpd="sng" algn="ctr">
-                      <a:solidFill>
-                        <a:srgbClr val="D6D2C9"/>
-                      </a:solidFill>
-                      <a:prstDash val="solid"/>
-                      <a:round/>
-                      <a:headEnd type="none" w="med" len="med"/>
-                      <a:tailEnd type="none" w="med" len="med"/>
-                    </a:lnL>
-                    <a:lnR w="6350" cap="flat" cmpd="sng" algn="ctr">
-                      <a:solidFill>
-                        <a:srgbClr val="D6D2C9"/>
-                      </a:solidFill>
-                      <a:prstDash val="solid"/>
-                      <a:round/>
-                      <a:headEnd type="none" w="med" len="med"/>
-                      <a:tailEnd type="none" w="med" len="med"/>
-                    </a:lnR>
-                    <a:lnT w="6350" cap="flat" cmpd="sng" algn="ctr">
-                      <a:solidFill>
-                        <a:srgbClr val="D6D2C9"/>
-                      </a:solidFill>
-                      <a:prstDash val="solid"/>
-                      <a:round/>
-                      <a:headEnd type="none" w="med" len="med"/>
-                      <a:tailEnd type="none" w="med" len="med"/>
-                    </a:lnT>
-                    <a:lnB w="6350" cap="flat" cmpd="sng" algn="ctr">
-                      <a:solidFill>
-                        <a:srgbClr val="D6D2C9"/>
-                      </a:solidFill>
-                      <a:prstDash val="solid"/>
-                      <a:round/>
-                      <a:headEnd type="none" w="med" len="med"/>
-                      <a:tailEnd type="none" w="med" len="med"/>
-                    </a:lnB>
-                  </a:tcPr>
-                </a:tc>
-              </a:tr>
-              <a:tr h="0">
-                <a:tc>
-                  <a:txBody>
-                    <a:bodyPr/>
-                    <a:lstStyle/>
-                    <a:p>
-                      <a:pPr indent="0" marL="0">
-                        <a:buNone/>
-                      </a:pPr>
-                      <a:r>
-                        <a:rPr lang="en-US" sz="1150" b="1" dirty="0">
-                          <a:solidFill>
-                            <a:srgbClr val="33302B"/>
-                          </a:solidFill>
-                          <a:latin typeface="Georgia" pitchFamily="34" charset="0"/>
-                          <a:ea typeface="Georgia" pitchFamily="34" charset="-122"/>
-                          <a:cs typeface="Georgia" pitchFamily="34" charset="-120"/>
-                        </a:rPr>
-                        <a:t>Coherence</a:t>
-                      </a:r>
-                      <a:endParaRPr lang="en-US" sz="1150" dirty="0">
-                        <a:latin typeface="Georgia" charset="0"/>
-                        <a:ea typeface="Georgia" charset="0"/>
-                        <a:cs typeface="Georgia" charset="0"/>
-                      </a:endParaRPr>
-                    </a:p>
-                  </a:txBody>
-                  <a:tcPr marL="82296" marR="82296" marT="82296" marB="82296" anchor="t">
-                    <a:lnL w="6350" cap="flat" cmpd="sng" algn="ctr">
-                      <a:solidFill>
-                        <a:srgbClr val="D6D2C9"/>
-                      </a:solidFill>
-                      <a:prstDash val="solid"/>
-                      <a:round/>
-                      <a:headEnd type="none" w="med" len="med"/>
-                      <a:tailEnd type="none" w="med" len="med"/>
-                    </a:lnL>
-                    <a:lnR w="6350" cap="flat" cmpd="sng" algn="ctr">
-                      <a:solidFill>
-                        <a:srgbClr val="D6D2C9"/>
-                      </a:solidFill>
-                      <a:prstDash val="solid"/>
-                      <a:round/>
-                      <a:headEnd type="none" w="med" len="med"/>
-                      <a:tailEnd type="none" w="med" len="med"/>
-                    </a:lnR>
-                    <a:lnT w="6350" cap="flat" cmpd="sng" algn="ctr">
-                      <a:solidFill>
-                        <a:srgbClr val="D6D2C9"/>
-                      </a:solidFill>
-                      <a:prstDash val="solid"/>
-                      <a:round/>
-                      <a:headEnd type="none" w="med" len="med"/>
-                      <a:tailEnd type="none" w="med" len="med"/>
-                    </a:lnT>
-                    <a:lnB w="6350" cap="flat" cmpd="sng" algn="ctr">
-                      <a:solidFill>
-                        <a:srgbClr val="D6D2C9"/>
-                      </a:solidFill>
-                      <a:prstDash val="solid"/>
-                      <a:round/>
-                      <a:headEnd type="none" w="med" len="med"/>
-                      <a:tailEnd type="none" w="med" len="med"/>
-                    </a:lnB>
-                  </a:tcPr>
-                </a:tc>
-                <a:tc>
-                  <a:txBody>
-                    <a:bodyPr/>
-                    <a:lstStyle/>
-                    <a:p>
-                      <a:pPr indent="0" marL="0">
-                        <a:buNone/>
-                      </a:pPr>
-                      <a:r>
-                        <a:rPr lang="en-US" sz="1150" dirty="0">
-                          <a:solidFill>
-                            <a:srgbClr val="1B1A18"/>
-                          </a:solidFill>
-                          <a:latin typeface="Georgia" pitchFamily="34" charset="0"/>
-                          <a:ea typeface="Georgia" pitchFamily="34" charset="-122"/>
-                          <a:cs typeface="Georgia" pitchFamily="34" charset="-120"/>
-                        </a:rPr>
-                        <a:t>One enforcement point, no bypass</a:t>
-                      </a:r>
-                      <a:endParaRPr lang="en-US" sz="1150" dirty="0">
-                        <a:latin typeface="Georgia" charset="0"/>
-                        <a:ea typeface="Georgia" charset="0"/>
-                        <a:cs typeface="Georgia" charset="0"/>
-                      </a:endParaRPr>
-                    </a:p>
-                  </a:txBody>
-                  <a:tcPr marL="82296" marR="82296" marT="82296" marB="82296" anchor="t">
-                    <a:lnL w="6350" cap="flat" cmpd="sng" algn="ctr">
-                      <a:solidFill>
-                        <a:srgbClr val="D6D2C9"/>
-                      </a:solidFill>
-                      <a:prstDash val="solid"/>
-                      <a:round/>
-                      <a:headEnd type="none" w="med" len="med"/>
-                      <a:tailEnd type="none" w="med" len="med"/>
-                    </a:lnL>
-                    <a:lnR w="6350" cap="flat" cmpd="sng" algn="ctr">
-                      <a:solidFill>
-                        <a:srgbClr val="D6D2C9"/>
-                      </a:solidFill>
-                      <a:prstDash val="solid"/>
-                      <a:round/>
-                      <a:headEnd type="none" w="med" len="med"/>
-                      <a:tailEnd type="none" w="med" len="med"/>
-                    </a:lnR>
-                    <a:lnT w="6350" cap="flat" cmpd="sng" algn="ctr">
-                      <a:solidFill>
-                        <a:srgbClr val="D6D2C9"/>
-                      </a:solidFill>
-                      <a:prstDash val="solid"/>
-                      <a:round/>
-                      <a:headEnd type="none" w="med" len="med"/>
-                      <a:tailEnd type="none" w="med" len="med"/>
-                    </a:lnT>
-                    <a:lnB w="6350" cap="flat" cmpd="sng" algn="ctr">
-                      <a:solidFill>
-                        <a:srgbClr val="D6D2C9"/>
-                      </a:solidFill>
-                      <a:prstDash val="solid"/>
-                      <a:round/>
-                      <a:headEnd type="none" w="med" len="med"/>
-                      <a:tailEnd type="none" w="med" len="med"/>
-                    </a:lnB>
-                  </a:tcPr>
-                </a:tc>
-                <a:tc>
-                  <a:txBody>
-                    <a:bodyPr/>
-                    <a:lstStyle/>
-                    <a:p>
-                      <a:pPr indent="0" marL="0">
-                        <a:buNone/>
-                      </a:pPr>
-                      <a:r>
-                        <a:rPr lang="en-US" sz="1150" dirty="0">
-                          <a:solidFill>
-                            <a:srgbClr val="1B1A18"/>
-                          </a:solidFill>
-                          <a:latin typeface="Georgia" pitchFamily="34" charset="0"/>
-                          <a:ea typeface="Georgia" pitchFamily="34" charset="-122"/>
-                          <a:cs typeface="Georgia" pitchFamily="34" charset="-120"/>
-                        </a:rPr>
-                        <a:t>Pre-trade controls; kill functionality; hard limits</a:t>
-                      </a:r>
-                      <a:endParaRPr lang="en-US" sz="1150" dirty="0">
-                        <a:latin typeface="Georgia" charset="0"/>
-                        <a:ea typeface="Georgia" charset="0"/>
-                        <a:cs typeface="Georgia" charset="0"/>
-                      </a:endParaRPr>
-                    </a:p>
-                  </a:txBody>
-                  <a:tcPr marL="82296" marR="82296" marT="82296" marB="82296" anchor="t">
-                    <a:lnL w="6350" cap="flat" cmpd="sng" algn="ctr">
-                      <a:solidFill>
-                        <a:srgbClr val="D6D2C9"/>
-                      </a:solidFill>
-                      <a:prstDash val="solid"/>
-                      <a:round/>
-                      <a:headEnd type="none" w="med" len="med"/>
-                      <a:tailEnd type="none" w="med" len="med"/>
-                    </a:lnL>
-                    <a:lnR w="6350" cap="flat" cmpd="sng" algn="ctr">
-                      <a:solidFill>
-                        <a:srgbClr val="D6D2C9"/>
-                      </a:solidFill>
-                      <a:prstDash val="solid"/>
-                      <a:round/>
-                      <a:headEnd type="none" w="med" len="med"/>
-                      <a:tailEnd type="none" w="med" len="med"/>
-                    </a:lnR>
-                    <a:lnT w="6350" cap="flat" cmpd="sng" algn="ctr">
-                      <a:solidFill>
-                        <a:srgbClr val="D6D2C9"/>
-                      </a:solidFill>
-                      <a:prstDash val="solid"/>
-                      <a:round/>
-                      <a:headEnd type="none" w="med" len="med"/>
-                      <a:tailEnd type="none" w="med" len="med"/>
-                    </a:lnT>
-                    <a:lnB w="6350" cap="flat" cmpd="sng" algn="ctr">
-                      <a:solidFill>
-                        <a:srgbClr val="D6D2C9"/>
-                      </a:solidFill>
-                      <a:prstDash val="solid"/>
-                      <a:round/>
-                      <a:headEnd type="none" w="med" len="med"/>
-                      <a:tailEnd type="none" w="med" len="med"/>
-                    </a:lnB>
-                  </a:tcPr>
-                </a:tc>
-              </a:tr>
-              <a:tr h="0">
-                <a:tc>
-                  <a:txBody>
-                    <a:bodyPr/>
-                    <a:lstStyle/>
-                    <a:p>
-                      <a:pPr indent="0" marL="0">
-                        <a:buNone/>
-                      </a:pPr>
-                      <a:r>
-                        <a:rPr lang="en-US" sz="1150" b="1" dirty="0">
-                          <a:solidFill>
-                            <a:srgbClr val="33302B"/>
-                          </a:solidFill>
-                          <a:latin typeface="Georgia" pitchFamily="34" charset="0"/>
-                          <a:ea typeface="Georgia" pitchFamily="34" charset="-122"/>
-                          <a:cs typeface="Georgia" pitchFamily="34" charset="-120"/>
-                        </a:rPr>
-                        <a:t>Memory</a:t>
-                      </a:r>
-                      <a:endParaRPr lang="en-US" sz="1150" dirty="0">
-                        <a:latin typeface="Georgia" charset="0"/>
-                        <a:ea typeface="Georgia" charset="0"/>
-                        <a:cs typeface="Georgia" charset="0"/>
-                      </a:endParaRPr>
-                    </a:p>
-                  </a:txBody>
-                  <a:tcPr marL="82296" marR="82296" marT="82296" marB="82296" anchor="t">
-                    <a:lnL w="6350" cap="flat" cmpd="sng" algn="ctr">
-                      <a:solidFill>
-                        <a:srgbClr val="D6D2C9"/>
-                      </a:solidFill>
-                      <a:prstDash val="solid"/>
-                      <a:round/>
-                      <a:headEnd type="none" w="med" len="med"/>
-                      <a:tailEnd type="none" w="med" len="med"/>
-                    </a:lnL>
-                    <a:lnR w="6350" cap="flat" cmpd="sng" algn="ctr">
-                      <a:solidFill>
-                        <a:srgbClr val="D6D2C9"/>
-                      </a:solidFill>
-                      <a:prstDash val="solid"/>
-                      <a:round/>
-                      <a:headEnd type="none" w="med" len="med"/>
-                      <a:tailEnd type="none" w="med" len="med"/>
-                    </a:lnR>
-                    <a:lnT w="6350" cap="flat" cmpd="sng" algn="ctr">
-                      <a:solidFill>
-                        <a:srgbClr val="D6D2C9"/>
-                      </a:solidFill>
-                      <a:prstDash val="solid"/>
-                      <a:round/>
-                      <a:headEnd type="none" w="med" len="med"/>
-                      <a:tailEnd type="none" w="med" len="med"/>
-                    </a:lnT>
-                    <a:lnB w="6350" cap="flat" cmpd="sng" algn="ctr">
-                      <a:solidFill>
-                        <a:srgbClr val="D6D2C9"/>
-                      </a:solidFill>
-                      <a:prstDash val="solid"/>
-                      <a:round/>
-                      <a:headEnd type="none" w="med" len="med"/>
-                      <a:tailEnd type="none" w="med" len="med"/>
-                    </a:lnB>
-                  </a:tcPr>
-                </a:tc>
-                <a:tc>
-                  <a:txBody>
-                    <a:bodyPr/>
-                    <a:lstStyle/>
-                    <a:p>
-                      <a:pPr indent="0" marL="0">
-                        <a:buNone/>
-                      </a:pPr>
-                      <a:r>
-                        <a:rPr lang="en-US" sz="1150" dirty="0">
-                          <a:solidFill>
-                            <a:srgbClr val="1B1A18"/>
-                          </a:solidFill>
-                          <a:latin typeface="Georgia" pitchFamily="34" charset="0"/>
-                          <a:ea typeface="Georgia" pitchFamily="34" charset="-122"/>
-                          <a:cs typeface="Georgia" pitchFamily="34" charset="-120"/>
-                        </a:rPr>
-                        <a:t>A durable record with provenance, and the ability to act without the system</a:t>
-                      </a:r>
-                      <a:endParaRPr lang="en-US" sz="1150" dirty="0">
-                        <a:latin typeface="Georgia" charset="0"/>
-                        <a:ea typeface="Georgia" charset="0"/>
-                        <a:cs typeface="Georgia" charset="0"/>
-                      </a:endParaRPr>
-                    </a:p>
-                  </a:txBody>
-                  <a:tcPr marL="82296" marR="82296" marT="82296" marB="82296" anchor="t">
-                    <a:lnL w="6350" cap="flat" cmpd="sng" algn="ctr">
-                      <a:solidFill>
-                        <a:srgbClr val="D6D2C9"/>
-                      </a:solidFill>
-                      <a:prstDash val="solid"/>
-                      <a:round/>
-                      <a:headEnd type="none" w="med" len="med"/>
-                      <a:tailEnd type="none" w="med" len="med"/>
-                    </a:lnL>
-                    <a:lnR w="6350" cap="flat" cmpd="sng" algn="ctr">
-                      <a:solidFill>
-                        <a:srgbClr val="D6D2C9"/>
-                      </a:solidFill>
-                      <a:prstDash val="solid"/>
-                      <a:round/>
-                      <a:headEnd type="none" w="med" len="med"/>
-                      <a:tailEnd type="none" w="med" len="med"/>
-                    </a:lnR>
-                    <a:lnT w="6350" cap="flat" cmpd="sng" algn="ctr">
-                      <a:solidFill>
-                        <a:srgbClr val="D6D2C9"/>
-                      </a:solidFill>
-                      <a:prstDash val="solid"/>
-                      <a:round/>
-                      <a:headEnd type="none" w="med" len="med"/>
-                      <a:tailEnd type="none" w="med" len="med"/>
-                    </a:lnT>
-                    <a:lnB w="6350" cap="flat" cmpd="sng" algn="ctr">
-                      <a:solidFill>
-                        <a:srgbClr val="D6D2C9"/>
-                      </a:solidFill>
-                      <a:prstDash val="solid"/>
-                      <a:round/>
-                      <a:headEnd type="none" w="med" len="med"/>
-                      <a:tailEnd type="none" w="med" len="med"/>
-                    </a:lnB>
-                  </a:tcPr>
-                </a:tc>
-                <a:tc>
-                  <a:txBody>
-                    <a:bodyPr/>
-                    <a:lstStyle/>
-                    <a:p>
-                      <a:pPr indent="0" marL="0">
-                        <a:buNone/>
-                      </a:pPr>
-                      <a:r>
-                        <a:rPr lang="en-US" sz="1150" dirty="0">
-                          <a:solidFill>
-                            <a:srgbClr val="1B1A18"/>
-                          </a:solidFill>
-                          <a:latin typeface="Georgia" pitchFamily="34" charset="0"/>
-                          <a:ea typeface="Georgia" pitchFamily="34" charset="-122"/>
-                          <a:cs typeface="Georgia" pitchFamily="34" charset="-120"/>
-                        </a:rPr>
-                        <a:t>Retention rules and the expectation of reconstruction</a:t>
-                      </a:r>
-                      <a:endParaRPr lang="en-US" sz="1150" dirty="0">
-                        <a:latin typeface="Georgia" charset="0"/>
-                        <a:ea typeface="Georgia" charset="0"/>
-                        <a:cs typeface="Georgia" charset="0"/>
-                      </a:endParaRPr>
-                    </a:p>
-                  </a:txBody>
-                  <a:tcPr marL="82296" marR="82296" marT="82296" marB="82296" anchor="t">
-                    <a:lnL w="6350" cap="flat" cmpd="sng" algn="ctr">
-                      <a:solidFill>
-                        <a:srgbClr val="D6D2C9"/>
-                      </a:solidFill>
-                      <a:prstDash val="solid"/>
-                      <a:round/>
-                      <a:headEnd type="none" w="med" len="med"/>
-                      <a:tailEnd type="none" w="med" len="med"/>
-                    </a:lnL>
-                    <a:lnR w="6350" cap="flat" cmpd="sng" algn="ctr">
-                      <a:solidFill>
-                        <a:srgbClr val="D6D2C9"/>
-                      </a:solidFill>
-                      <a:prstDash val="solid"/>
-                      <a:round/>
-                      <a:headEnd type="none" w="med" len="med"/>
-                      <a:tailEnd type="none" w="med" len="med"/>
-                    </a:lnR>
-                    <a:lnT w="6350" cap="flat" cmpd="sng" algn="ctr">
-                      <a:solidFill>
-                        <a:srgbClr val="D6D2C9"/>
-                      </a:solidFill>
-                      <a:prstDash val="solid"/>
-                      <a:round/>
-                      <a:headEnd type="none" w="med" len="med"/>
-                      <a:tailEnd type="none" w="med" len="med"/>
-                    </a:lnT>
-                    <a:lnB w="6350" cap="flat" cmpd="sng" algn="ctr">
-                      <a:solidFill>
-                        <a:srgbClr val="D6D2C9"/>
-                      </a:solidFill>
-                      <a:prstDash val="solid"/>
-                      <a:round/>
-                      <a:headEnd type="none" w="med" len="med"/>
-                      <a:tailEnd type="none" w="med" len="med"/>
-                    </a:lnB>
-                  </a:tcPr>
-                </a:tc>
-              </a:tr>
-            </a:tbl>
-          </a:graphicData>
-        </a:graphic>
-      </p:graphicFrame>
-      <p:sp>
-        <p:nvSpPr>
-          <p:cNvPr id="5" name="Text 2"/>
-          <p:cNvSpPr/>
-          <p:nvPr/>
-        </p:nvSpPr>
-        <p:spPr>
-          <a:xfrm>
-            <a:off x="566928" y="6473952"/>
-            <a:ext cx="9957816" cy="274320"/>
-          </a:xfrm>
-          <a:prstGeom prst="rect">
-            <a:avLst/>
-          </a:prstGeom>
-          <a:noFill/>
-          <a:ln/>
-        </p:spPr>
-        <p:txBody>
-          <a:bodyPr wrap="square" rtlCol="0" anchor="ctr"/>
-          <a:lstStyle/>
-          <a:p>
-            <a:pPr indent="0" marL="0">
-              <a:buNone/>
-            </a:pPr>
-            <a:r>
-              <a:rPr lang="en-US" sz="900" i="1" dirty="0">
-                <a:solidFill>
-                  <a:srgbClr val="6E6A62"/>
-                </a:solidFill>
-                <a:latin typeface="Georgia" pitchFamily="34" charset="0"/>
-                <a:ea typeface="Georgia" pitchFamily="34" charset="-122"/>
-                <a:cs typeface="Georgia" pitchFamily="34" charset="-120"/>
-              </a:rPr>
-              <a:t>What the Structure Does Not Carry</a:t>
-            </a:r>
-            <a:pPr indent="0" marL="0">
-              <a:buNone/>
-            </a:pPr>
-            <a:r>
-              <a:rPr lang="en-US" sz="900" dirty="0">
-                <a:solidFill>
-                  <a:srgbClr val="6E6A62"/>
-                </a:solidFill>
-                <a:latin typeface="Georgia" pitchFamily="34" charset="0"/>
-                <a:ea typeface="Georgia" pitchFamily="34" charset="-122"/>
-                <a:cs typeface="Georgia" pitchFamily="34" charset="-120"/>
-              </a:rPr>
-              <a:t>  ·  PCERT-FS — Custody in the Regulated Institution</a:t>
-            </a:r>
-            <a:endParaRPr lang="en-US" sz="900" dirty="0"/>
-          </a:p>
-        </p:txBody>
-      </p:sp>
-      <p:sp>
-        <p:nvSpPr>
-          <p:cNvPr id="6" name="Text 3"/>
           <p:cNvSpPr/>
           <p:nvPr/>
         </p:nvSpPr>
